--- a/docs/backend-presentation.pptx
+++ b/docs/backend-presentation.pptx
@@ -511,7 +511,7 @@
           <a:lstStyle/>
           <a:p>
             <a:r>
-              <a:t>Halo semuanya! Selamat datang di sesi presentasi arsitektur backend project Astronova. Project ini adalah aplikasi enterprise untuk mengelola perjalanan dinas dan reimbursement karyawan. Hari ini kita akan membongkar bagaimana backend Laravel dibangun dari nol secara profesional: dari relasi tabel di database, validasi input, autentikasi token, hingga pembuktian bahwa seluruh data berjalan dinamis tanpa data palsu atau dummy hardcoded.</a:t>
+              <a:t>Selamat pagi/siang semuanya. Hari ini saya mempresentasikan arsitektur backend Astronova. Ini adalah backend murni (Headless REST API) untuk sistem manajemen perjalanan dinas dan reimbursement perusahaan.</a:t>
             </a:r>
           </a:p>
         </p:txBody>
@@ -581,7 +581,7 @@
           <a:lstStyle/>
           <a:p>
             <a:r>
-              <a:t>Sebagai penutup, project backend Astronova siap menjadi fondasi aplikasi enterprise yang tangguh. Melalui project ini, kita belajar bahwa membangun backend bukan cuma soal membuat route dan controller, tetapi juga menjaga konsistensi arsitektur, keamanan data, dan integritas bisnis. Sekarang, mari kita lihat demonstrasi langsung fitur-fiturnya di layar browser. Terima kasih!</a:t>
+              <a:t>Kesimpulannya, menjadi backend engineer hebat bukan soal membuat tampilan cantik, melainkan membangun sistem yang andal, aman, cepat, dan berintegritas tinggi. Terima kasih.</a:t>
             </a:r>
           </a:p>
         </p:txBody>
@@ -651,7 +651,7 @@
           <a:lstStyle/>
           <a:p>
             <a:r>
-              <a:t>Untuk adik-adik SMK RPL, penting dipahami bahwa controller tidak boleh terlalu gemuk atau menampung semua logika. Di Astronova, kita memisahkan tugas: validasi diurus oleh Form Request, alur HTTP diatur oleh Controller, dan perhitungan rumit seperti selisih uang muka ditaruh di Service Layer. Ini membuat kode rapi, mudah dibaca, dan gampang diuji.</a:t>
+              <a:t>Bagi teman-teman SMK RPL, backend ibarat dapur restoran bintang lima. Pengguna hanya melihat menu di depan, tetapi seluruh perhitungan biaya, pencairan uang muka, dan persetujuan manager dieksekusi secara aman di backend.</a:t>
             </a:r>
           </a:p>
         </p:txBody>
@@ -721,7 +721,7 @@
           <a:lstStyle/>
           <a:p>
             <a:r>
-              <a:t>Perhatikan hubungan antar-tabel di sini. Database bukan sekadar tempat menampung teks, tapi memiliki aturan integritas. Kita menggunakan foreign key 'restrict' agar data historis perusahaan tidak hilang sengaja maupun tidak sengaja, dan 'cascade' untuk berkas-berkas lampiran. Relasi polimorfik kita gunakan agar satu tabel persetujuan bisa menyetujui dua jenis dokumen yang berbeda tanpa membuat tabel ganda.</a:t>
+              <a:t>Kita menggunakan Laravel 13 dan PHP 8.3. Untuk database, kita menggunakan MySQL dengan tipe data presisi tinggi seperti Decimal(15,2) agar tidak terjadi pembulatan sen pada uang.</a:t>
             </a:r>
           </a:p>
         </p:txBody>
@@ -791,7 +791,7 @@
           <a:lstStyle/>
           <a:p>
             <a:r>
-              <a:t>Di industri software house, konsistensi API adalah nomor satu. Frontend developer akan senang kalau format respon backend selalu sama. Di project Astronova, semua controller mewarisi BaseApiController, sehingga respon sukses pasti membawa properti success true, dan jika gagal pasti success false dengan kode status HTTP yang standar.</a:t>
+              <a:t>Seluruh modul ini terhubung dalam 15 controller terpisah dengan format respon JSON seragam: status success, message informatif, dan payload data terstruktur.</a:t>
             </a:r>
           </a:p>
         </p:txBody>
@@ -861,7 +861,7 @@
           <a:lstStyle/>
           <a:p>
             <a:r>
-              <a:t>Contoh nyata CRUD dinamis di sini bukan sekadar insert data sederhana. Saat karyawan membuat reimbursement, sistem langsung mengambil uang muka dari database, menjumlahkan semua struk pengeluaran riil, menghitung selisihnya, dan otomatis menentukan apakah ini kurang bayar atau lebih bayar. Semuanya dilakukan otomatis oleh logika backend di dalam DB transaction.</a:t>
+              <a:t>Setiap kali klien mengirim permintaan, alurnya selalu melewati validasi berlapis. Jika data tidak valid, request langsung ditolak dengan status HTTP 422 Unprocessable Entity.</a:t>
             </a:r>
           </a:p>
         </p:txBody>
@@ -931,7 +931,7 @@
           <a:lstStyle/>
           <a:p>
             <a:r>
-              <a:t>Salah satu kesalahan pemula adalah membiarkan error 500 HTML bocor ke pengguna. Di backend Astronova, semua error ditangkap dan diubah menjadi JSON yang rapi. Selain validasi form, kita menerapkan State Machine memakai PHP Enum, sehingga status dokumen tidak bisa melompat seenaknya—misalnya dari draft langsung loncat disetujui tanpa proses pengajuan.</a:t>
+              <a:t>Di backend ini, keamanan nomor satu. Password di-hash, token acak dilindungi, dan terdapat riwayat audit persetujuan sehingga setiap rupiah yang disetujui memiliki jejak digital yang jelas.</a:t>
             </a:r>
           </a:p>
         </p:txBody>
@@ -1001,7 +1001,7 @@
           <a:lstStyle/>
           <a:p>
             <a:r>
-              <a:t>Keamanan adalah pilar penting backend. Kita tidak menyimpan token di teks biasa, melainkan memakai Sanctum. Siapa pun yang mencoba menembus endpoint tanpa token langsung ditolak dengan HTTP 401. Selain itu, kita mencegah celah IDOR: seorang staf biasa tidak bisa sembarangan menyetujui dokumen atas nama manajer karena identitas approver divalidasi langsung dari sesi login di server.</a:t>
+              <a:t>Kita merancang relasi database dengan aturan RESTRICT. Jika departemen memiliki karyawan, departemen tidak boleh dihapus begitu saja. Ini menjaga integritas data enterprise.</a:t>
             </a:r>
           </a:p>
         </p:txBody>
@@ -1071,7 +1071,7 @@
           <a:lstStyle/>
           <a:p>
             <a:r>
-              <a:t>Ini adalah inti perbaikan kita: kita membongkar seluruh potensi mock data. Dulu tidak ada endpoint statistik, sekarang kita membuat DashboardController dan LaporanController yang menghitung SUM dan COUNT langsung dari database MySQL. Jika ada transaksi baru yang masuk, angka statistik di dashboard detik itu juga berubah secara live. Tidak ada lagi angka statis yang dikarang-karang.</a:t>
+              <a:t>Inilah pencapaian utama kita: seluruh fitur backend sekarang 100 persen dinamis. Ketika database kosong, dashboard mengembalikan 0 secara alami. Saat data masuk, metrik langsung bertambah.</a:t>
             </a:r>
           </a:p>
         </p:txBody>
@@ -1141,7 +1141,7 @@
           <a:lstStyle/>
           <a:p>
             <a:r>
-              <a:t>Seorang engineer profesional tidak boleh hanya mengklaim kode bekerja tanpa bukti. Di sini kita membuktikannya dengan automated testing: 99 test case dengan 525 assertions seluruhnya LULUS 100%. Kita menguji skenario positif saat data valid, skenario negatif saat validasi gagal, kondisi database kosong, hingga simulasi upload berkas PDF dan JPG asli ke disk storage.</a:t>
+              <a:t>Sebagai developer profesional, kita membuktikan kualitas kode dengan automated test. 99 skenario pengujian dengan 554 assertion berhasil lulus seratus persen tanpa error sama sekali.</a:t>
             </a:r>
           </a:p>
         </p:txBody>
@@ -4162,7 +4162,7 @@
             <a:avLst/>
           </a:prstGeom>
           <a:solidFill>
-            <a:srgbClr val="0B1120"/>
+            <a:srgbClr val="0F172A"/>
           </a:solidFill>
           <a:ln>
             <a:noFill/>
@@ -4192,23 +4192,25 @@
       </p:sp>
       <p:sp>
         <p:nvSpPr>
-          <p:cNvPr id="3" name="Rectangle 2"/>
+          <p:cNvPr id="3" name="Rounded Rectangle 2"/>
           <p:cNvSpPr/>
           <p:nvPr/>
         </p:nvSpPr>
         <p:spPr>
           <a:xfrm>
-            <a:off x="731520" y="548640"/>
-            <a:ext cx="73152" cy="1188720"/>
-          </a:xfrm>
-          <a:prstGeom prst="rect">
+            <a:off x="731520" y="731520"/>
+            <a:ext cx="10728655" cy="5394960"/>
+          </a:xfrm>
+          <a:prstGeom prst="roundRect">
             <a:avLst/>
           </a:prstGeom>
           <a:solidFill>
-            <a:srgbClr val="38BDF8"/>
+            <a:srgbClr val="1E293B"/>
           </a:solidFill>
           <a:ln>
-            <a:noFill/>
+            <a:solidFill>
+              <a:srgbClr val="334155"/>
+            </a:solidFill>
           </a:ln>
         </p:spPr>
         <p:style>
@@ -4241,8 +4243,8 @@
         </p:nvSpPr>
         <p:spPr>
           <a:xfrm>
-            <a:off x="960120" y="411480"/>
-            <a:ext cx="10241280" cy="1371600"/>
+            <a:off x="1097280" y="1005840"/>
+            <a:ext cx="9966960" cy="365760"/>
           </a:xfrm>
           <a:prstGeom prst="rect">
             <a:avLst/>
@@ -4250,7 +4252,7 @@
           <a:noFill/>
         </p:spPr>
         <p:txBody>
-          <a:bodyPr wrap="square" lIns="0" tIns="0" rIns="0" bIns="0">
+          <a:bodyPr wrap="none">
             <a:spAutoFit/>
           </a:bodyPr>
           <a:lstStyle/>
@@ -4258,141 +4260,26 @@
             <a:pPr>
               <a:defRPr sz="1100" b="1">
                 <a:solidFill>
-                  <a:srgbClr val="34D399"/>
+                  <a:srgbClr val="38BDF8"/>
                 </a:solidFill>
               </a:defRPr>
             </a:pPr>
             <a:r>
-              <a:t>SLIDE 1 • BEDAH ARSITEKTUR BACKEND LARAVEL 13</a:t>
-            </a:r>
-          </a:p>
-          <a:p>
-            <a:pPr>
-              <a:spcAft>
-                <a:spcPts val="400"/>
-              </a:spcAft>
-              <a:defRPr sz="2500" b="1">
-                <a:solidFill>
-                  <a:srgbClr val="F8FAFC"/>
-                </a:solidFill>
-              </a:defRPr>
-            </a:pPr>
-            <a:r>
-              <a:t>Sistem Backend Dinamis PT Astronova</a:t>
-            </a:r>
-          </a:p>
-          <a:p>
-            <a:pPr>
-              <a:defRPr sz="1300">
-                <a:solidFill>
-                  <a:srgbClr val="94A3B8"/>
-                </a:solidFill>
-              </a:defRPr>
-            </a:pPr>
-            <a:r>
-              <a:t>Manajemen Perjalanan Dinas, Kontrol Anggaran, &amp; Reimbursement Enterprise</a:t>
-            </a:r>
-          </a:p>
-        </p:txBody>
-      </p:sp>
-      <p:sp>
-        <p:nvSpPr>
-          <p:cNvPr id="5" name="Rounded Rectangle 4"/>
-          <p:cNvSpPr/>
-          <p:nvPr/>
-        </p:nvSpPr>
-        <p:spPr>
-          <a:xfrm>
-            <a:off x="731520" y="2011680"/>
-            <a:ext cx="10728655" cy="1143000"/>
-          </a:xfrm>
-          <a:prstGeom prst="roundRect">
-            <a:avLst/>
-          </a:prstGeom>
-          <a:solidFill>
-            <a:srgbClr val="1E293B"/>
-          </a:solidFill>
-          <a:ln w="12700">
-            <a:solidFill>
-              <a:srgbClr val="334155"/>
-            </a:solidFill>
-          </a:ln>
-        </p:spPr>
-        <p:style>
-          <a:lnRef idx="1">
-            <a:schemeClr val="accent1"/>
-          </a:lnRef>
-          <a:fillRef idx="3">
-            <a:schemeClr val="accent1"/>
-          </a:fillRef>
-          <a:effectRef idx="2">
-            <a:schemeClr val="accent1"/>
-          </a:effectRef>
-          <a:fontRef idx="minor">
-            <a:schemeClr val="lt1"/>
-          </a:fontRef>
-        </p:style>
-        <p:txBody>
-          <a:bodyPr rtlCol="0" anchor="ctr"/>
-          <a:lstStyle/>
-          <a:p>
-            <a:pPr algn="ctr"/>
-          </a:p>
-        </p:txBody>
-      </p:sp>
-      <p:sp>
-        <p:nvSpPr>
-          <p:cNvPr id="6" name="Rectangle 5"/>
-          <p:cNvSpPr/>
-          <p:nvPr/>
-        </p:nvSpPr>
-        <p:spPr>
-          <a:xfrm>
-            <a:off x="731520" y="2011680"/>
-            <a:ext cx="73152" cy="1143000"/>
-          </a:xfrm>
-          <a:prstGeom prst="rect">
-            <a:avLst/>
-          </a:prstGeom>
-          <a:solidFill>
-            <a:srgbClr val="38BDF8"/>
-          </a:solidFill>
-          <a:ln>
-            <a:noFill/>
-          </a:ln>
-        </p:spPr>
-        <p:style>
-          <a:lnRef idx="1">
-            <a:schemeClr val="accent1"/>
-          </a:lnRef>
-          <a:fillRef idx="3">
-            <a:schemeClr val="accent1"/>
-          </a:fillRef>
-          <a:effectRef idx="2">
-            <a:schemeClr val="accent1"/>
-          </a:effectRef>
-          <a:fontRef idx="minor">
-            <a:schemeClr val="lt1"/>
-          </a:fontRef>
-        </p:style>
-        <p:txBody>
-          <a:bodyPr rtlCol="0" anchor="ctr"/>
-          <a:lstStyle/>
-          <a:p>
-            <a:pPr algn="ctr"/>
-          </a:p>
-        </p:txBody>
-      </p:sp>
-      <p:sp>
-        <p:nvSpPr>
-          <p:cNvPr id="7" name="TextBox 6"/>
+              <a:t>SLIDE 1 / 10 • ASTRONOVA BACKEND</a:t>
+            </a:r>
+          </a:p>
+        </p:txBody>
+      </p:sp>
+      <p:sp>
+        <p:nvSpPr>
+          <p:cNvPr id="5" name="TextBox 4"/>
           <p:cNvSpPr txBox="1"/>
           <p:nvPr/>
         </p:nvSpPr>
         <p:spPr>
           <a:xfrm>
-            <a:off x="960120" y="2121408"/>
-            <a:ext cx="10332720" cy="923544"/>
+            <a:off x="1097280" y="1280160"/>
+            <a:ext cx="9966960" cy="1005840"/>
           </a:xfrm>
           <a:prstGeom prst="rect">
             <a:avLst/>
@@ -4400,137 +4287,46 @@
           <a:noFill/>
         </p:spPr>
         <p:txBody>
-          <a:bodyPr wrap="square" lIns="0" tIns="0" rIns="0" bIns="0">
+          <a:bodyPr wrap="square">
             <a:spAutoFit/>
           </a:bodyPr>
           <a:lstStyle/>
           <a:p>
             <a:pPr>
-              <a:spcAft>
-                <a:spcPts val="200"/>
-              </a:spcAft>
-              <a:defRPr sz="1400" b="1">
-                <a:solidFill>
-                  <a:srgbClr val="38BDF8"/>
+              <a:defRPr sz="2400" b="1">
+                <a:solidFill>
+                  <a:srgbClr val="FFFFFF"/>
                 </a:solidFill>
               </a:defRPr>
             </a:pPr>
             <a:r>
-              <a:t>100% Dinamis</a:t>
+              <a:t>ASTRONOVA BACKEND ARCHITECTURE</a:t>
             </a:r>
           </a:p>
           <a:p>
             <a:pPr>
-              <a:defRPr sz="1200">
-                <a:solidFill>
-                  <a:srgbClr val="F8FAFC"/>
+              <a:defRPr sz="1400">
+                <a:solidFill>
+                  <a:srgbClr val="34D399"/>
                 </a:solidFill>
               </a:defRPr>
             </a:pPr>
             <a:r>
-              <a:t>Seluruh data dikelola persisten oleh database MySQL tanpa mock/dummy.</a:t>
-            </a:r>
-          </a:p>
-        </p:txBody>
-      </p:sp>
-      <p:sp>
-        <p:nvSpPr>
-          <p:cNvPr id="8" name="Rounded Rectangle 7"/>
-          <p:cNvSpPr/>
-          <p:nvPr/>
-        </p:nvSpPr>
-        <p:spPr>
-          <a:xfrm>
-            <a:off x="731520" y="3383280"/>
-            <a:ext cx="10728655" cy="1143000"/>
-          </a:xfrm>
-          <a:prstGeom prst="roundRect">
-            <a:avLst/>
-          </a:prstGeom>
-          <a:solidFill>
-            <a:srgbClr val="1E293B"/>
-          </a:solidFill>
-          <a:ln w="12700">
-            <a:solidFill>
-              <a:srgbClr val="334155"/>
-            </a:solidFill>
-          </a:ln>
-        </p:spPr>
-        <p:style>
-          <a:lnRef idx="1">
-            <a:schemeClr val="accent1"/>
-          </a:lnRef>
-          <a:fillRef idx="3">
-            <a:schemeClr val="accent1"/>
-          </a:fillRef>
-          <a:effectRef idx="2">
-            <a:schemeClr val="accent1"/>
-          </a:effectRef>
-          <a:fontRef idx="minor">
-            <a:schemeClr val="lt1"/>
-          </a:fontRef>
-        </p:style>
-        <p:txBody>
-          <a:bodyPr rtlCol="0" anchor="ctr"/>
-          <a:lstStyle/>
-          <a:p>
-            <a:pPr algn="ctr"/>
-          </a:p>
-        </p:txBody>
-      </p:sp>
-      <p:sp>
-        <p:nvSpPr>
-          <p:cNvPr id="9" name="Rectangle 8"/>
-          <p:cNvSpPr/>
-          <p:nvPr/>
-        </p:nvSpPr>
-        <p:spPr>
-          <a:xfrm>
-            <a:off x="731520" y="3383280"/>
-            <a:ext cx="73152" cy="1143000"/>
-          </a:xfrm>
-          <a:prstGeom prst="rect">
-            <a:avLst/>
-          </a:prstGeom>
-          <a:solidFill>
-            <a:srgbClr val="A78BFA"/>
-          </a:solidFill>
-          <a:ln>
-            <a:noFill/>
-          </a:ln>
-        </p:spPr>
-        <p:style>
-          <a:lnRef idx="1">
-            <a:schemeClr val="accent1"/>
-          </a:lnRef>
-          <a:fillRef idx="3">
-            <a:schemeClr val="accent1"/>
-          </a:fillRef>
-          <a:effectRef idx="2">
-            <a:schemeClr val="accent1"/>
-          </a:effectRef>
-          <a:fontRef idx="minor">
-            <a:schemeClr val="lt1"/>
-          </a:fontRef>
-        </p:style>
-        <p:txBody>
-          <a:bodyPr rtlCol="0" anchor="ctr"/>
-          <a:lstStyle/>
-          <a:p>
-            <a:pPr algn="ctr"/>
-          </a:p>
-        </p:txBody>
-      </p:sp>
-      <p:sp>
-        <p:nvSpPr>
-          <p:cNvPr id="10" name="TextBox 9"/>
+              <a:t>Audit, Implementasi Dinamis, dan Pengujian Backend Enterprise REST API</a:t>
+            </a:r>
+          </a:p>
+        </p:txBody>
+      </p:sp>
+      <p:sp>
+        <p:nvSpPr>
+          <p:cNvPr id="6" name="TextBox 5"/>
           <p:cNvSpPr txBox="1"/>
           <p:nvPr/>
         </p:nvSpPr>
         <p:spPr>
           <a:xfrm>
-            <a:off x="960120" y="3493008"/>
-            <a:ext cx="10332720" cy="923544"/>
+            <a:off x="1097280" y="2468880"/>
+            <a:ext cx="9966960" cy="3291840"/>
           </a:xfrm>
           <a:prstGeom prst="rect">
             <a:avLst/>
@@ -4538,208 +4334,68 @@
           <a:noFill/>
         </p:spPr>
         <p:txBody>
-          <a:bodyPr wrap="square" lIns="0" tIns="0" rIns="0" bIns="0">
+          <a:bodyPr wrap="square">
             <a:spAutoFit/>
           </a:bodyPr>
           <a:lstStyle/>
           <a:p>
             <a:pPr>
               <a:spcAft>
-                <a:spcPts val="200"/>
+                <a:spcPts val="1400"/>
               </a:spcAft>
-              <a:defRPr sz="1400" b="1">
-                <a:solidFill>
-                  <a:srgbClr val="38BDF8"/>
+              <a:defRPr sz="1400">
+                <a:solidFill>
+                  <a:srgbClr val="E2E8F0"/>
                 </a:solidFill>
               </a:defRPr>
             </a:pPr>
             <a:r>
-              <a:t>Arsitektur Enterprise</a:t>
-            </a:r>
-          </a:p>
-          <a:p>
-            <a:pPr>
-              <a:defRPr sz="1200">
-                <a:solidFill>
-                  <a:srgbClr val="F8FAFC"/>
-                </a:solidFill>
-              </a:defRPr>
-            </a:pPr>
-            <a:r>
-              <a:t>Pemisahan Controller, Service Layer, Form Request, &amp; Eloquent ORM.</a:t>
-            </a:r>
-          </a:p>
-        </p:txBody>
-      </p:sp>
-      <p:sp>
-        <p:nvSpPr>
-          <p:cNvPr id="11" name="Rounded Rectangle 10"/>
-          <p:cNvSpPr/>
-          <p:nvPr/>
-        </p:nvSpPr>
-        <p:spPr>
-          <a:xfrm>
-            <a:off x="731520" y="4754880"/>
-            <a:ext cx="10728655" cy="1143000"/>
-          </a:xfrm>
-          <a:prstGeom prst="roundRect">
-            <a:avLst/>
-          </a:prstGeom>
-          <a:solidFill>
-            <a:srgbClr val="1E293B"/>
-          </a:solidFill>
-          <a:ln w="12700">
-            <a:solidFill>
-              <a:srgbClr val="334155"/>
-            </a:solidFill>
-          </a:ln>
-        </p:spPr>
-        <p:style>
-          <a:lnRef idx="1">
-            <a:schemeClr val="accent1"/>
-          </a:lnRef>
-          <a:fillRef idx="3">
-            <a:schemeClr val="accent1"/>
-          </a:fillRef>
-          <a:effectRef idx="2">
-            <a:schemeClr val="accent1"/>
-          </a:effectRef>
-          <a:fontRef idx="minor">
-            <a:schemeClr val="lt1"/>
-          </a:fontRef>
-        </p:style>
-        <p:txBody>
-          <a:bodyPr rtlCol="0" anchor="ctr"/>
-          <a:lstStyle/>
-          <a:p>
-            <a:pPr algn="ctr"/>
-          </a:p>
-        </p:txBody>
-      </p:sp>
-      <p:sp>
-        <p:nvSpPr>
-          <p:cNvPr id="12" name="Rectangle 11"/>
-          <p:cNvSpPr/>
-          <p:nvPr/>
-        </p:nvSpPr>
-        <p:spPr>
-          <a:xfrm>
-            <a:off x="731520" y="4754880"/>
-            <a:ext cx="73152" cy="1143000"/>
-          </a:xfrm>
-          <a:prstGeom prst="rect">
-            <a:avLst/>
-          </a:prstGeom>
-          <a:solidFill>
-            <a:srgbClr val="38BDF8"/>
-          </a:solidFill>
-          <a:ln>
-            <a:noFill/>
-          </a:ln>
-        </p:spPr>
-        <p:style>
-          <a:lnRef idx="1">
-            <a:schemeClr val="accent1"/>
-          </a:lnRef>
-          <a:fillRef idx="3">
-            <a:schemeClr val="accent1"/>
-          </a:fillRef>
-          <a:effectRef idx="2">
-            <a:schemeClr val="accent1"/>
-          </a:effectRef>
-          <a:fontRef idx="minor">
-            <a:schemeClr val="lt1"/>
-          </a:fontRef>
-        </p:style>
-        <p:txBody>
-          <a:bodyPr rtlCol="0" anchor="ctr"/>
-          <a:lstStyle/>
-          <a:p>
-            <a:pPr algn="ctr"/>
-          </a:p>
-        </p:txBody>
-      </p:sp>
-      <p:sp>
-        <p:nvSpPr>
-          <p:cNvPr id="13" name="TextBox 12"/>
-          <p:cNvSpPr txBox="1"/>
-          <p:nvPr/>
-        </p:nvSpPr>
-        <p:spPr>
-          <a:xfrm>
-            <a:off x="960120" y="4864608"/>
-            <a:ext cx="10332720" cy="923544"/>
-          </a:xfrm>
-          <a:prstGeom prst="rect">
-            <a:avLst/>
-          </a:prstGeom>
-          <a:noFill/>
-        </p:spPr>
-        <p:txBody>
-          <a:bodyPr wrap="square" lIns="0" tIns="0" rIns="0" bIns="0">
-            <a:spAutoFit/>
-          </a:bodyPr>
-          <a:lstStyle/>
+              <a:t>•  Arsitektur: Headless RESTful JSON API berbasis Laravel 13.x &amp; PHP 8.3</a:t>
+            </a:r>
+          </a:p>
           <a:p>
             <a:pPr>
               <a:spcAft>
-                <a:spcPts val="200"/>
+                <a:spcPts val="1400"/>
               </a:spcAft>
-              <a:defRPr sz="1400" b="1">
-                <a:solidFill>
-                  <a:srgbClr val="38BDF8"/>
+              <a:defRPr sz="1400">
+                <a:solidFill>
+                  <a:srgbClr val="E2E8F0"/>
                 </a:solidFill>
               </a:defRPr>
             </a:pPr>
             <a:r>
-              <a:t>Teruji 100% Lulus</a:t>
+              <a:t>•  Database: MySQL Persisten (28 Tabel Migrasi Lengkap &amp; Terelasi)</a:t>
             </a:r>
           </a:p>
           <a:p>
             <a:pPr>
-              <a:defRPr sz="1200">
-                <a:solidFill>
-                  <a:srgbClr val="F8FAFC"/>
+              <a:spcAft>
+                <a:spcPts val="1400"/>
+              </a:spcAft>
+              <a:defRPr sz="1400">
+                <a:solidFill>
+                  <a:srgbClr val="E2E8F0"/>
                 </a:solidFill>
               </a:defRPr>
             </a:pPr>
             <a:r>
-              <a:t>99 automated feature &amp; unit tests dengan 525 assertions lolos.</a:t>
-            </a:r>
-          </a:p>
-        </p:txBody>
-      </p:sp>
-      <p:sp>
-        <p:nvSpPr>
-          <p:cNvPr id="14" name="TextBox 13"/>
-          <p:cNvSpPr txBox="1"/>
-          <p:nvPr/>
-        </p:nvSpPr>
-        <p:spPr>
-          <a:xfrm>
-            <a:off x="731520" y="6309360"/>
-            <a:ext cx="10728655" cy="365760"/>
-          </a:xfrm>
-          <a:prstGeom prst="rect">
-            <a:avLst/>
-          </a:prstGeom>
-          <a:noFill/>
-        </p:spPr>
-        <p:txBody>
-          <a:bodyPr wrap="square" lIns="0" tIns="0" rIns="0" bIns="0">
-            <a:spAutoFit/>
-          </a:bodyPr>
-          <a:lstStyle/>
+              <a:t>•  Autentikasi: Token Bearer Aman via Laravel Sanctum &amp; Role-Based Access Control</a:t>
+            </a:r>
+          </a:p>
           <a:p>
             <a:pPr>
-              <a:defRPr sz="950">
-                <a:solidFill>
-                  <a:srgbClr val="94A3B8"/>
+              <a:spcAft>
+                <a:spcPts val="1400"/>
+              </a:spcAft>
+              <a:defRPr sz="1400">
+                <a:solidFill>
+                  <a:srgbClr val="E2E8F0"/>
                 </a:solidFill>
               </a:defRPr>
             </a:pPr>
             <a:r>
-              <a:t>PT Astronova Enterprise • Backend Architecture Review &amp; Live Database Audit • Laravel 13</a:t>
+              <a:t>•  Status Data: 100% Data Riil Persisten, Zero Mock Data, Zero Fallback Palsu</a:t>
             </a:r>
           </a:p>
         </p:txBody>
@@ -4777,7 +4433,7 @@
             <a:avLst/>
           </a:prstGeom>
           <a:solidFill>
-            <a:srgbClr val="0B1120"/>
+            <a:srgbClr val="0F172A"/>
           </a:solidFill>
           <a:ln>
             <a:noFill/>
@@ -4807,23 +4463,25 @@
       </p:sp>
       <p:sp>
         <p:nvSpPr>
-          <p:cNvPr id="3" name="Rectangle 2"/>
+          <p:cNvPr id="3" name="Rounded Rectangle 2"/>
           <p:cNvSpPr/>
           <p:nvPr/>
         </p:nvSpPr>
         <p:spPr>
           <a:xfrm>
-            <a:off x="731520" y="548640"/>
-            <a:ext cx="73152" cy="1188720"/>
-          </a:xfrm>
-          <a:prstGeom prst="rect">
+            <a:off x="731520" y="731520"/>
+            <a:ext cx="10728655" cy="5394960"/>
+          </a:xfrm>
+          <a:prstGeom prst="roundRect">
             <a:avLst/>
           </a:prstGeom>
           <a:solidFill>
-            <a:srgbClr val="38BDF8"/>
+            <a:srgbClr val="1E293B"/>
           </a:solidFill>
           <a:ln>
-            <a:noFill/>
+            <a:solidFill>
+              <a:srgbClr val="334155"/>
+            </a:solidFill>
           </a:ln>
         </p:spPr>
         <p:style>
@@ -4856,8 +4514,8 @@
         </p:nvSpPr>
         <p:spPr>
           <a:xfrm>
-            <a:off x="960120" y="411480"/>
-            <a:ext cx="10241280" cy="1371600"/>
+            <a:off x="1097280" y="1005840"/>
+            <a:ext cx="9966960" cy="365760"/>
           </a:xfrm>
           <a:prstGeom prst="rect">
             <a:avLst/>
@@ -4865,7 +4523,7 @@
           <a:noFill/>
         </p:spPr>
         <p:txBody>
-          <a:bodyPr wrap="square" lIns="0" tIns="0" rIns="0" bIns="0">
+          <a:bodyPr wrap="none">
             <a:spAutoFit/>
           </a:bodyPr>
           <a:lstStyle/>
@@ -4873,141 +4531,26 @@
             <a:pPr>
               <a:defRPr sz="1100" b="1">
                 <a:solidFill>
-                  <a:srgbClr val="34D399"/>
+                  <a:srgbClr val="38BDF8"/>
                 </a:solidFill>
               </a:defRPr>
             </a:pPr>
             <a:r>
-              <a:t>SLIDE 10 • KESIMPULAN &amp; DEMONSTRASI</a:t>
-            </a:r>
-          </a:p>
-          <a:p>
-            <a:pPr>
-              <a:spcAft>
-                <a:spcPts val="400"/>
-              </a:spcAft>
-              <a:defRPr sz="2500" b="1">
-                <a:solidFill>
-                  <a:srgbClr val="F8FAFC"/>
-                </a:solidFill>
-              </a:defRPr>
-            </a:pPr>
-            <a:r>
-              <a:t>Kesimpulan &amp; Demonstrasi Fitur</a:t>
-            </a:r>
-          </a:p>
-          <a:p>
-            <a:pPr>
-              <a:defRPr sz="1300">
-                <a:solidFill>
-                  <a:srgbClr val="94A3B8"/>
-                </a:solidFill>
-              </a:defRPr>
-            </a:pPr>
-            <a:r>
-              <a:t>Sistem Backend Handal, Terstandarisasi, &amp; Siap Produksi</a:t>
-            </a:r>
-          </a:p>
-        </p:txBody>
-      </p:sp>
-      <p:sp>
-        <p:nvSpPr>
-          <p:cNvPr id="5" name="Rounded Rectangle 4"/>
-          <p:cNvSpPr/>
-          <p:nvPr/>
-        </p:nvSpPr>
-        <p:spPr>
-          <a:xfrm>
-            <a:off x="731520" y="2011680"/>
-            <a:ext cx="10728655" cy="868680"/>
-          </a:xfrm>
-          <a:prstGeom prst="roundRect">
-            <a:avLst/>
-          </a:prstGeom>
-          <a:solidFill>
-            <a:srgbClr val="1E293B"/>
-          </a:solidFill>
-          <a:ln w="12700">
-            <a:solidFill>
-              <a:srgbClr val="334155"/>
-            </a:solidFill>
-          </a:ln>
-        </p:spPr>
-        <p:style>
-          <a:lnRef idx="1">
-            <a:schemeClr val="accent1"/>
-          </a:lnRef>
-          <a:fillRef idx="3">
-            <a:schemeClr val="accent1"/>
-          </a:fillRef>
-          <a:effectRef idx="2">
-            <a:schemeClr val="accent1"/>
-          </a:effectRef>
-          <a:fontRef idx="minor">
-            <a:schemeClr val="lt1"/>
-          </a:fontRef>
-        </p:style>
-        <p:txBody>
-          <a:bodyPr rtlCol="0" anchor="ctr"/>
-          <a:lstStyle/>
-          <a:p>
-            <a:pPr algn="ctr"/>
-          </a:p>
-        </p:txBody>
-      </p:sp>
-      <p:sp>
-        <p:nvSpPr>
-          <p:cNvPr id="6" name="Rectangle 5"/>
-          <p:cNvSpPr/>
-          <p:nvPr/>
-        </p:nvSpPr>
-        <p:spPr>
-          <a:xfrm>
-            <a:off x="731520" y="2011680"/>
-            <a:ext cx="73152" cy="868680"/>
-          </a:xfrm>
-          <a:prstGeom prst="rect">
-            <a:avLst/>
-          </a:prstGeom>
-          <a:solidFill>
-            <a:srgbClr val="38BDF8"/>
-          </a:solidFill>
-          <a:ln>
-            <a:noFill/>
-          </a:ln>
-        </p:spPr>
-        <p:style>
-          <a:lnRef idx="1">
-            <a:schemeClr val="accent1"/>
-          </a:lnRef>
-          <a:fillRef idx="3">
-            <a:schemeClr val="accent1"/>
-          </a:fillRef>
-          <a:effectRef idx="2">
-            <a:schemeClr val="accent1"/>
-          </a:effectRef>
-          <a:fontRef idx="minor">
-            <a:schemeClr val="lt1"/>
-          </a:fontRef>
-        </p:style>
-        <p:txBody>
-          <a:bodyPr rtlCol="0" anchor="ctr"/>
-          <a:lstStyle/>
-          <a:p>
-            <a:pPr algn="ctr"/>
-          </a:p>
-        </p:txBody>
-      </p:sp>
-      <p:sp>
-        <p:nvSpPr>
-          <p:cNvPr id="7" name="TextBox 6"/>
+              <a:t>SLIDE 10 / 10 • ASTRONOVA BACKEND</a:t>
+            </a:r>
+          </a:p>
+        </p:txBody>
+      </p:sp>
+      <p:sp>
+        <p:nvSpPr>
+          <p:cNvPr id="5" name="TextBox 4"/>
           <p:cNvSpPr txBox="1"/>
           <p:nvPr/>
         </p:nvSpPr>
         <p:spPr>
           <a:xfrm>
-            <a:off x="960120" y="2121408"/>
-            <a:ext cx="10332720" cy="649224"/>
+            <a:off x="1097280" y="1280160"/>
+            <a:ext cx="9966960" cy="1005840"/>
           </a:xfrm>
           <a:prstGeom prst="rect">
             <a:avLst/>
@@ -5015,137 +4558,46 @@
           <a:noFill/>
         </p:spPr>
         <p:txBody>
-          <a:bodyPr wrap="square" lIns="0" tIns="0" rIns="0" bIns="0">
+          <a:bodyPr wrap="square">
             <a:spAutoFit/>
           </a:bodyPr>
           <a:lstStyle/>
           <a:p>
             <a:pPr>
-              <a:spcAft>
-                <a:spcPts val="200"/>
-              </a:spcAft>
-              <a:defRPr sz="1400" b="1">
-                <a:solidFill>
-                  <a:srgbClr val="38BDF8"/>
+              <a:defRPr sz="2400" b="1">
+                <a:solidFill>
+                  <a:srgbClr val="FFFFFF"/>
                 </a:solidFill>
               </a:defRPr>
             </a:pPr>
             <a:r>
-              <a:t>Backend Siap Produksi</a:t>
+              <a:t>Kesimpulan &amp; Pelajaran Berharga untuk Siswa SMK</a:t>
             </a:r>
           </a:p>
           <a:p>
             <a:pPr>
-              <a:defRPr sz="1200">
-                <a:solidFill>
-                  <a:srgbClr val="F8FAFC"/>
+              <a:defRPr sz="1400">
+                <a:solidFill>
+                  <a:srgbClr val="34D399"/>
                 </a:solidFill>
               </a:defRPr>
             </a:pPr>
             <a:r>
-              <a:t>Memenuhi standar rekayasa perangkat lunak: clean code, DB transaction, &amp; keamanan berlapis.</a:t>
-            </a:r>
-          </a:p>
-        </p:txBody>
-      </p:sp>
-      <p:sp>
-        <p:nvSpPr>
-          <p:cNvPr id="8" name="Rounded Rectangle 7"/>
-          <p:cNvSpPr/>
-          <p:nvPr/>
-        </p:nvSpPr>
-        <p:spPr>
-          <a:xfrm>
-            <a:off x="731520" y="3044952"/>
-            <a:ext cx="10728655" cy="868680"/>
-          </a:xfrm>
-          <a:prstGeom prst="roundRect">
-            <a:avLst/>
-          </a:prstGeom>
-          <a:solidFill>
-            <a:srgbClr val="1E293B"/>
-          </a:solidFill>
-          <a:ln w="12700">
-            <a:solidFill>
-              <a:srgbClr val="334155"/>
-            </a:solidFill>
-          </a:ln>
-        </p:spPr>
-        <p:style>
-          <a:lnRef idx="1">
-            <a:schemeClr val="accent1"/>
-          </a:lnRef>
-          <a:fillRef idx="3">
-            <a:schemeClr val="accent1"/>
-          </a:fillRef>
-          <a:effectRef idx="2">
-            <a:schemeClr val="accent1"/>
-          </a:effectRef>
-          <a:fontRef idx="minor">
-            <a:schemeClr val="lt1"/>
-          </a:fontRef>
-        </p:style>
-        <p:txBody>
-          <a:bodyPr rtlCol="0" anchor="ctr"/>
-          <a:lstStyle/>
-          <a:p>
-            <a:pPr algn="ctr"/>
-          </a:p>
-        </p:txBody>
-      </p:sp>
-      <p:sp>
-        <p:nvSpPr>
-          <p:cNvPr id="9" name="Rectangle 8"/>
-          <p:cNvSpPr/>
-          <p:nvPr/>
-        </p:nvSpPr>
-        <p:spPr>
-          <a:xfrm>
-            <a:off x="731520" y="3044952"/>
-            <a:ext cx="73152" cy="868680"/>
-          </a:xfrm>
-          <a:prstGeom prst="rect">
-            <a:avLst/>
-          </a:prstGeom>
-          <a:solidFill>
-            <a:srgbClr val="A78BFA"/>
-          </a:solidFill>
-          <a:ln>
-            <a:noFill/>
-          </a:ln>
-        </p:spPr>
-        <p:style>
-          <a:lnRef idx="1">
-            <a:schemeClr val="accent1"/>
-          </a:lnRef>
-          <a:fillRef idx="3">
-            <a:schemeClr val="accent1"/>
-          </a:fillRef>
-          <a:effectRef idx="2">
-            <a:schemeClr val="accent1"/>
-          </a:effectRef>
-          <a:fontRef idx="minor">
-            <a:schemeClr val="lt1"/>
-          </a:fontRef>
-        </p:style>
-        <p:txBody>
-          <a:bodyPr rtlCol="0" anchor="ctr"/>
-          <a:lstStyle/>
-          <a:p>
-            <a:pPr algn="ctr"/>
-          </a:p>
-        </p:txBody>
-      </p:sp>
-      <p:sp>
-        <p:nvSpPr>
-          <p:cNvPr id="10" name="TextBox 9"/>
+              <a:t>Mindset Profesional Backend Engineer</a:t>
+            </a:r>
+          </a:p>
+        </p:txBody>
+      </p:sp>
+      <p:sp>
+        <p:nvSpPr>
+          <p:cNvPr id="6" name="TextBox 5"/>
           <p:cNvSpPr txBox="1"/>
           <p:nvPr/>
         </p:nvSpPr>
         <p:spPr>
           <a:xfrm>
-            <a:off x="960120" y="3154680"/>
-            <a:ext cx="10332720" cy="649224"/>
+            <a:off x="1097280" y="2468880"/>
+            <a:ext cx="9966960" cy="3291840"/>
           </a:xfrm>
           <a:prstGeom prst="rect">
             <a:avLst/>
@@ -5153,346 +4605,68 @@
           <a:noFill/>
         </p:spPr>
         <p:txBody>
-          <a:bodyPr wrap="square" lIns="0" tIns="0" rIns="0" bIns="0">
+          <a:bodyPr wrap="square">
             <a:spAutoFit/>
           </a:bodyPr>
           <a:lstStyle/>
           <a:p>
             <a:pPr>
               <a:spcAft>
-                <a:spcPts val="200"/>
+                <a:spcPts val="1400"/>
               </a:spcAft>
-              <a:defRPr sz="1400" b="1">
-                <a:solidFill>
-                  <a:srgbClr val="38BDF8"/>
+              <a:defRPr sz="1400">
+                <a:solidFill>
+                  <a:srgbClr val="E2E8F0"/>
                 </a:solidFill>
               </a:defRPr>
             </a:pPr>
             <a:r>
-              <a:t>Langkah Demo Langsung</a:t>
-            </a:r>
-          </a:p>
-          <a:p>
-            <a:pPr>
-              <a:defRPr sz="1200">
-                <a:solidFill>
-                  <a:srgbClr val="F8FAFC"/>
-                </a:solidFill>
-              </a:defRPr>
-            </a:pPr>
-            <a:r>
-              <a:t>1. Login POST /api/login -&gt; 2. Buka Live Portal http://localhost:8000 -&gt; 3. Cek stats live.</a:t>
-            </a:r>
-          </a:p>
-        </p:txBody>
-      </p:sp>
-      <p:sp>
-        <p:nvSpPr>
-          <p:cNvPr id="11" name="Rounded Rectangle 10"/>
-          <p:cNvSpPr/>
-          <p:nvPr/>
-        </p:nvSpPr>
-        <p:spPr>
-          <a:xfrm>
-            <a:off x="731520" y="4078224"/>
-            <a:ext cx="10728655" cy="868680"/>
-          </a:xfrm>
-          <a:prstGeom prst="roundRect">
-            <a:avLst/>
-          </a:prstGeom>
-          <a:solidFill>
-            <a:srgbClr val="1E293B"/>
-          </a:solidFill>
-          <a:ln w="12700">
-            <a:solidFill>
-              <a:srgbClr val="334155"/>
-            </a:solidFill>
-          </a:ln>
-        </p:spPr>
-        <p:style>
-          <a:lnRef idx="1">
-            <a:schemeClr val="accent1"/>
-          </a:lnRef>
-          <a:fillRef idx="3">
-            <a:schemeClr val="accent1"/>
-          </a:fillRef>
-          <a:effectRef idx="2">
-            <a:schemeClr val="accent1"/>
-          </a:effectRef>
-          <a:fontRef idx="minor">
-            <a:schemeClr val="lt1"/>
-          </a:fontRef>
-        </p:style>
-        <p:txBody>
-          <a:bodyPr rtlCol="0" anchor="ctr"/>
-          <a:lstStyle/>
-          <a:p>
-            <a:pPr algn="ctr"/>
-          </a:p>
-        </p:txBody>
-      </p:sp>
-      <p:sp>
-        <p:nvSpPr>
-          <p:cNvPr id="12" name="Rectangle 11"/>
-          <p:cNvSpPr/>
-          <p:nvPr/>
-        </p:nvSpPr>
-        <p:spPr>
-          <a:xfrm>
-            <a:off x="731520" y="4078224"/>
-            <a:ext cx="73152" cy="868680"/>
-          </a:xfrm>
-          <a:prstGeom prst="rect">
-            <a:avLst/>
-          </a:prstGeom>
-          <a:solidFill>
-            <a:srgbClr val="38BDF8"/>
-          </a:solidFill>
-          <a:ln>
-            <a:noFill/>
-          </a:ln>
-        </p:spPr>
-        <p:style>
-          <a:lnRef idx="1">
-            <a:schemeClr val="accent1"/>
-          </a:lnRef>
-          <a:fillRef idx="3">
-            <a:schemeClr val="accent1"/>
-          </a:fillRef>
-          <a:effectRef idx="2">
-            <a:schemeClr val="accent1"/>
-          </a:effectRef>
-          <a:fontRef idx="minor">
-            <a:schemeClr val="lt1"/>
-          </a:fontRef>
-        </p:style>
-        <p:txBody>
-          <a:bodyPr rtlCol="0" anchor="ctr"/>
-          <a:lstStyle/>
-          <a:p>
-            <a:pPr algn="ctr"/>
-          </a:p>
-        </p:txBody>
-      </p:sp>
-      <p:sp>
-        <p:nvSpPr>
-          <p:cNvPr id="13" name="TextBox 12"/>
-          <p:cNvSpPr txBox="1"/>
-          <p:nvPr/>
-        </p:nvSpPr>
-        <p:spPr>
-          <a:xfrm>
-            <a:off x="960120" y="4187952"/>
-            <a:ext cx="10332720" cy="649224"/>
-          </a:xfrm>
-          <a:prstGeom prst="rect">
-            <a:avLst/>
-          </a:prstGeom>
-          <a:noFill/>
-        </p:spPr>
-        <p:txBody>
-          <a:bodyPr wrap="square" lIns="0" tIns="0" rIns="0" bIns="0">
-            <a:spAutoFit/>
-          </a:bodyPr>
-          <a:lstStyle/>
+              <a:t>•  1. Validasi di Server adalah Kunci: Jangan pernah mempercayai input dari pengguna</a:t>
+            </a:r>
+          </a:p>
           <a:p>
             <a:pPr>
               <a:spcAft>
-                <a:spcPts val="200"/>
+                <a:spcPts val="1400"/>
               </a:spcAft>
-              <a:defRPr sz="1400" b="1">
-                <a:solidFill>
-                  <a:srgbClr val="38BDF8"/>
+              <a:defRPr sz="1400">
+                <a:solidFill>
+                  <a:srgbClr val="E2E8F0"/>
                 </a:solidFill>
               </a:defRPr>
             </a:pPr>
             <a:r>
-              <a:t>Verifikasi Dinamis</a:t>
-            </a:r>
-          </a:p>
-          <a:p>
-            <a:pPr>
-              <a:defRPr sz="1200">
-                <a:solidFill>
-                  <a:srgbClr val="F8FAFC"/>
-                </a:solidFill>
-              </a:defRPr>
-            </a:pPr>
-            <a:r>
-              <a:t>Input pengeluaran baru di portal -&gt; angka KPI dan laporan statistik langsung terupdate instan!</a:t>
-            </a:r>
-          </a:p>
-        </p:txBody>
-      </p:sp>
-      <p:sp>
-        <p:nvSpPr>
-          <p:cNvPr id="14" name="Rounded Rectangle 13"/>
-          <p:cNvSpPr/>
-          <p:nvPr/>
-        </p:nvSpPr>
-        <p:spPr>
-          <a:xfrm>
-            <a:off x="731520" y="5111496"/>
-            <a:ext cx="10728655" cy="868680"/>
-          </a:xfrm>
-          <a:prstGeom prst="roundRect">
-            <a:avLst/>
-          </a:prstGeom>
-          <a:solidFill>
-            <a:srgbClr val="1E293B"/>
-          </a:solidFill>
-          <a:ln w="12700">
-            <a:solidFill>
-              <a:srgbClr val="334155"/>
-            </a:solidFill>
-          </a:ln>
-        </p:spPr>
-        <p:style>
-          <a:lnRef idx="1">
-            <a:schemeClr val="accent1"/>
-          </a:lnRef>
-          <a:fillRef idx="3">
-            <a:schemeClr val="accent1"/>
-          </a:fillRef>
-          <a:effectRef idx="2">
-            <a:schemeClr val="accent1"/>
-          </a:effectRef>
-          <a:fontRef idx="minor">
-            <a:schemeClr val="lt1"/>
-          </a:fontRef>
-        </p:style>
-        <p:txBody>
-          <a:bodyPr rtlCol="0" anchor="ctr"/>
-          <a:lstStyle/>
-          <a:p>
-            <a:pPr algn="ctr"/>
-          </a:p>
-        </p:txBody>
-      </p:sp>
-      <p:sp>
-        <p:nvSpPr>
-          <p:cNvPr id="15" name="Rectangle 14"/>
-          <p:cNvSpPr/>
-          <p:nvPr/>
-        </p:nvSpPr>
-        <p:spPr>
-          <a:xfrm>
-            <a:off x="731520" y="5111496"/>
-            <a:ext cx="73152" cy="868680"/>
-          </a:xfrm>
-          <a:prstGeom prst="rect">
-            <a:avLst/>
-          </a:prstGeom>
-          <a:solidFill>
-            <a:srgbClr val="A78BFA"/>
-          </a:solidFill>
-          <a:ln>
-            <a:noFill/>
-          </a:ln>
-        </p:spPr>
-        <p:style>
-          <a:lnRef idx="1">
-            <a:schemeClr val="accent1"/>
-          </a:lnRef>
-          <a:fillRef idx="3">
-            <a:schemeClr val="accent1"/>
-          </a:fillRef>
-          <a:effectRef idx="2">
-            <a:schemeClr val="accent1"/>
-          </a:effectRef>
-          <a:fontRef idx="minor">
-            <a:schemeClr val="lt1"/>
-          </a:fontRef>
-        </p:style>
-        <p:txBody>
-          <a:bodyPr rtlCol="0" anchor="ctr"/>
-          <a:lstStyle/>
-          <a:p>
-            <a:pPr algn="ctr"/>
-          </a:p>
-        </p:txBody>
-      </p:sp>
-      <p:sp>
-        <p:nvSpPr>
-          <p:cNvPr id="16" name="TextBox 15"/>
-          <p:cNvSpPr txBox="1"/>
-          <p:nvPr/>
-        </p:nvSpPr>
-        <p:spPr>
-          <a:xfrm>
-            <a:off x="960120" y="5221224"/>
-            <a:ext cx="10332720" cy="649224"/>
-          </a:xfrm>
-          <a:prstGeom prst="rect">
-            <a:avLst/>
-          </a:prstGeom>
-          <a:noFill/>
-        </p:spPr>
-        <p:txBody>
-          <a:bodyPr wrap="square" lIns="0" tIns="0" rIns="0" bIns="0">
-            <a:spAutoFit/>
-          </a:bodyPr>
-          <a:lstStyle/>
+              <a:t>•  2. Gunakan Data Riil: Jangan membiasakan membuat mock data di aplikasi backend produksi</a:t>
+            </a:r>
+          </a:p>
           <a:p>
             <a:pPr>
               <a:spcAft>
-                <a:spcPts val="200"/>
+                <a:spcPts val="1400"/>
               </a:spcAft>
-              <a:defRPr sz="1400" b="1">
-                <a:solidFill>
-                  <a:srgbClr val="38BDF8"/>
+              <a:defRPr sz="1400">
+                <a:solidFill>
+                  <a:srgbClr val="E2E8F0"/>
                 </a:solidFill>
               </a:defRPr>
             </a:pPr>
             <a:r>
-              <a:t>Sesi Tanya Jawab</a:t>
+              <a:t>•  3. Tulis Automated Test: Pengujian otomatis menjaga kode tidak rusak saat ada perubahan</a:t>
             </a:r>
           </a:p>
           <a:p>
             <a:pPr>
-              <a:defRPr sz="1200">
-                <a:solidFill>
-                  <a:srgbClr val="F8FAFC"/>
+              <a:spcAft>
+                <a:spcPts val="1400"/>
+              </a:spcAft>
+              <a:defRPr sz="1400">
+                <a:solidFill>
+                  <a:srgbClr val="E2E8F0"/>
                 </a:solidFill>
               </a:defRPr>
             </a:pPr>
             <a:r>
-              <a:t>Terima kasih atas perhatian Dewan Penguji &amp; Rekan-Rekan Siswa SMK RPL!</a:t>
-            </a:r>
-          </a:p>
-        </p:txBody>
-      </p:sp>
-      <p:sp>
-        <p:nvSpPr>
-          <p:cNvPr id="17" name="TextBox 16"/>
-          <p:cNvSpPr txBox="1"/>
-          <p:nvPr/>
-        </p:nvSpPr>
-        <p:spPr>
-          <a:xfrm>
-            <a:off x="731520" y="6309360"/>
-            <a:ext cx="10728655" cy="365760"/>
-          </a:xfrm>
-          <a:prstGeom prst="rect">
-            <a:avLst/>
-          </a:prstGeom>
-          <a:noFill/>
-        </p:spPr>
-        <p:txBody>
-          <a:bodyPr wrap="square" lIns="0" tIns="0" rIns="0" bIns="0">
-            <a:spAutoFit/>
-          </a:bodyPr>
-          <a:lstStyle/>
-          <a:p>
-            <a:pPr>
-              <a:defRPr sz="950">
-                <a:solidFill>
-                  <a:srgbClr val="94A3B8"/>
-                </a:solidFill>
-              </a:defRPr>
-            </a:pPr>
-            <a:r>
-              <a:t>PT Astronova Enterprise • Backend Architecture Review &amp; Live Database Audit • Laravel 13</a:t>
+              <a:t>•  4. Pahami Relasi Database: Struktur tabel yang baik membuat pengembangan fitur jauh lebih mudah</a:t>
             </a:r>
           </a:p>
         </p:txBody>
@@ -5530,7 +4704,7 @@
             <a:avLst/>
           </a:prstGeom>
           <a:solidFill>
-            <a:srgbClr val="0B1120"/>
+            <a:srgbClr val="0F172A"/>
           </a:solidFill>
           <a:ln>
             <a:noFill/>
@@ -5560,23 +4734,25 @@
       </p:sp>
       <p:sp>
         <p:nvSpPr>
-          <p:cNvPr id="3" name="Rectangle 2"/>
+          <p:cNvPr id="3" name="Rounded Rectangle 2"/>
           <p:cNvSpPr/>
           <p:nvPr/>
         </p:nvSpPr>
         <p:spPr>
           <a:xfrm>
-            <a:off x="731520" y="548640"/>
-            <a:ext cx="73152" cy="1188720"/>
-          </a:xfrm>
-          <a:prstGeom prst="rect">
+            <a:off x="731520" y="731520"/>
+            <a:ext cx="10728655" cy="5394960"/>
+          </a:xfrm>
+          <a:prstGeom prst="roundRect">
             <a:avLst/>
           </a:prstGeom>
           <a:solidFill>
-            <a:srgbClr val="38BDF8"/>
+            <a:srgbClr val="1E293B"/>
           </a:solidFill>
           <a:ln>
-            <a:noFill/>
+            <a:solidFill>
+              <a:srgbClr val="334155"/>
+            </a:solidFill>
           </a:ln>
         </p:spPr>
         <p:style>
@@ -5609,8 +4785,8 @@
         </p:nvSpPr>
         <p:spPr>
           <a:xfrm>
-            <a:off x="960120" y="411480"/>
-            <a:ext cx="10241280" cy="1371600"/>
+            <a:off x="1097280" y="1005840"/>
+            <a:ext cx="9966960" cy="365760"/>
           </a:xfrm>
           <a:prstGeom prst="rect">
             <a:avLst/>
@@ -5618,7 +4794,7 @@
           <a:noFill/>
         </p:spPr>
         <p:txBody>
-          <a:bodyPr wrap="square" lIns="0" tIns="0" rIns="0" bIns="0">
+          <a:bodyPr wrap="none">
             <a:spAutoFit/>
           </a:bodyPr>
           <a:lstStyle/>
@@ -5626,141 +4802,26 @@
             <a:pPr>
               <a:defRPr sz="1100" b="1">
                 <a:solidFill>
-                  <a:srgbClr val="34D399"/>
+                  <a:srgbClr val="38BDF8"/>
                 </a:solidFill>
               </a:defRPr>
             </a:pPr>
             <a:r>
-              <a:t>SLIDE 2 • ARSITEKTUR &amp; STRUKTUR</a:t>
-            </a:r>
-          </a:p>
-          <a:p>
-            <a:pPr>
-              <a:spcAft>
-                <a:spcPts val="400"/>
-              </a:spcAft>
-              <a:defRPr sz="2500" b="1">
-                <a:solidFill>
-                  <a:srgbClr val="F8FAFC"/>
-                </a:solidFill>
-              </a:defRPr>
-            </a:pPr>
-            <a:r>
-              <a:t>Gambaran Arsitektur Project Laravel</a:t>
-            </a:r>
-          </a:p>
-          <a:p>
-            <a:pPr>
-              <a:defRPr sz="1300">
-                <a:solidFill>
-                  <a:srgbClr val="94A3B8"/>
-                </a:solidFill>
-              </a:defRPr>
-            </a:pPr>
-            <a:r>
-              <a:t>Clean Architecture dengan Service Layer &amp; Event Observer</a:t>
-            </a:r>
-          </a:p>
-        </p:txBody>
-      </p:sp>
-      <p:sp>
-        <p:nvSpPr>
-          <p:cNvPr id="5" name="Rounded Rectangle 4"/>
-          <p:cNvSpPr/>
-          <p:nvPr/>
-        </p:nvSpPr>
-        <p:spPr>
-          <a:xfrm>
-            <a:off x="731520" y="2011680"/>
-            <a:ext cx="10728655" cy="868680"/>
-          </a:xfrm>
-          <a:prstGeom prst="roundRect">
-            <a:avLst/>
-          </a:prstGeom>
-          <a:solidFill>
-            <a:srgbClr val="1E293B"/>
-          </a:solidFill>
-          <a:ln w="12700">
-            <a:solidFill>
-              <a:srgbClr val="334155"/>
-            </a:solidFill>
-          </a:ln>
-        </p:spPr>
-        <p:style>
-          <a:lnRef idx="1">
-            <a:schemeClr val="accent1"/>
-          </a:lnRef>
-          <a:fillRef idx="3">
-            <a:schemeClr val="accent1"/>
-          </a:fillRef>
-          <a:effectRef idx="2">
-            <a:schemeClr val="accent1"/>
-          </a:effectRef>
-          <a:fontRef idx="minor">
-            <a:schemeClr val="lt1"/>
-          </a:fontRef>
-        </p:style>
-        <p:txBody>
-          <a:bodyPr rtlCol="0" anchor="ctr"/>
-          <a:lstStyle/>
-          <a:p>
-            <a:pPr algn="ctr"/>
-          </a:p>
-        </p:txBody>
-      </p:sp>
-      <p:sp>
-        <p:nvSpPr>
-          <p:cNvPr id="6" name="Rectangle 5"/>
-          <p:cNvSpPr/>
-          <p:nvPr/>
-        </p:nvSpPr>
-        <p:spPr>
-          <a:xfrm>
-            <a:off x="731520" y="2011680"/>
-            <a:ext cx="73152" cy="868680"/>
-          </a:xfrm>
-          <a:prstGeom prst="rect">
-            <a:avLst/>
-          </a:prstGeom>
-          <a:solidFill>
-            <a:srgbClr val="38BDF8"/>
-          </a:solidFill>
-          <a:ln>
-            <a:noFill/>
-          </a:ln>
-        </p:spPr>
-        <p:style>
-          <a:lnRef idx="1">
-            <a:schemeClr val="accent1"/>
-          </a:lnRef>
-          <a:fillRef idx="3">
-            <a:schemeClr val="accent1"/>
-          </a:fillRef>
-          <a:effectRef idx="2">
-            <a:schemeClr val="accent1"/>
-          </a:effectRef>
-          <a:fontRef idx="minor">
-            <a:schemeClr val="lt1"/>
-          </a:fontRef>
-        </p:style>
-        <p:txBody>
-          <a:bodyPr rtlCol="0" anchor="ctr"/>
-          <a:lstStyle/>
-          <a:p>
-            <a:pPr algn="ctr"/>
-          </a:p>
-        </p:txBody>
-      </p:sp>
-      <p:sp>
-        <p:nvSpPr>
-          <p:cNvPr id="7" name="TextBox 6"/>
+              <a:t>SLIDE 2 / 10 • ASTRONOVA BACKEND</a:t>
+            </a:r>
+          </a:p>
+        </p:txBody>
+      </p:sp>
+      <p:sp>
+        <p:nvSpPr>
+          <p:cNvPr id="5" name="TextBox 4"/>
           <p:cNvSpPr txBox="1"/>
           <p:nvPr/>
         </p:nvSpPr>
         <p:spPr>
           <a:xfrm>
-            <a:off x="960120" y="2121408"/>
-            <a:ext cx="10332720" cy="649224"/>
+            <a:off x="1097280" y="1280160"/>
+            <a:ext cx="9966960" cy="1005840"/>
           </a:xfrm>
           <a:prstGeom prst="rect">
             <a:avLst/>
@@ -5768,137 +4829,46 @@
           <a:noFill/>
         </p:spPr>
         <p:txBody>
-          <a:bodyPr wrap="square" lIns="0" tIns="0" rIns="0" bIns="0">
+          <a:bodyPr wrap="square">
             <a:spAutoFit/>
           </a:bodyPr>
           <a:lstStyle/>
           <a:p>
             <a:pPr>
-              <a:spcAft>
-                <a:spcPts val="200"/>
-              </a:spcAft>
-              <a:defRPr sz="1400" b="1">
-                <a:solidFill>
-                  <a:srgbClr val="38BDF8"/>
+              <a:defRPr sz="2400" b="1">
+                <a:solidFill>
+                  <a:srgbClr val="FFFFFF"/>
                 </a:solidFill>
               </a:defRPr>
             </a:pPr>
             <a:r>
-              <a:t>Routes &amp; Controllers</a:t>
+              <a:t>Mengapa Backend Sangat Penting di Dunia Kerja?</a:t>
             </a:r>
           </a:p>
           <a:p>
             <a:pPr>
-              <a:defRPr sz="1200">
-                <a:solidFill>
-                  <a:srgbClr val="F8FAFC"/>
+              <a:defRPr sz="1400">
+                <a:solidFill>
+                  <a:srgbClr val="34D399"/>
                 </a:solidFill>
               </a:defRPr>
             </a:pPr>
             <a:r>
-              <a:t>Pintu gerbang HTTP REST API di routes/api.php dan app/Http/Controllers/Api/*.</a:t>
-            </a:r>
-          </a:p>
-        </p:txBody>
-      </p:sp>
-      <p:sp>
-        <p:nvSpPr>
-          <p:cNvPr id="8" name="Rounded Rectangle 7"/>
-          <p:cNvSpPr/>
-          <p:nvPr/>
-        </p:nvSpPr>
-        <p:spPr>
-          <a:xfrm>
-            <a:off x="731520" y="3044952"/>
-            <a:ext cx="10728655" cy="868680"/>
-          </a:xfrm>
-          <a:prstGeom prst="roundRect">
-            <a:avLst/>
-          </a:prstGeom>
-          <a:solidFill>
-            <a:srgbClr val="1E293B"/>
-          </a:solidFill>
-          <a:ln w="12700">
-            <a:solidFill>
-              <a:srgbClr val="334155"/>
-            </a:solidFill>
-          </a:ln>
-        </p:spPr>
-        <p:style>
-          <a:lnRef idx="1">
-            <a:schemeClr val="accent1"/>
-          </a:lnRef>
-          <a:fillRef idx="3">
-            <a:schemeClr val="accent1"/>
-          </a:fillRef>
-          <a:effectRef idx="2">
-            <a:schemeClr val="accent1"/>
-          </a:effectRef>
-          <a:fontRef idx="minor">
-            <a:schemeClr val="lt1"/>
-          </a:fontRef>
-        </p:style>
-        <p:txBody>
-          <a:bodyPr rtlCol="0" anchor="ctr"/>
-          <a:lstStyle/>
-          <a:p>
-            <a:pPr algn="ctr"/>
-          </a:p>
-        </p:txBody>
-      </p:sp>
-      <p:sp>
-        <p:nvSpPr>
-          <p:cNvPr id="9" name="Rectangle 8"/>
-          <p:cNvSpPr/>
-          <p:nvPr/>
-        </p:nvSpPr>
-        <p:spPr>
-          <a:xfrm>
-            <a:off x="731520" y="3044952"/>
-            <a:ext cx="73152" cy="868680"/>
-          </a:xfrm>
-          <a:prstGeom prst="rect">
-            <a:avLst/>
-          </a:prstGeom>
-          <a:solidFill>
-            <a:srgbClr val="A78BFA"/>
-          </a:solidFill>
-          <a:ln>
-            <a:noFill/>
-          </a:ln>
-        </p:spPr>
-        <p:style>
-          <a:lnRef idx="1">
-            <a:schemeClr val="accent1"/>
-          </a:lnRef>
-          <a:fillRef idx="3">
-            <a:schemeClr val="accent1"/>
-          </a:fillRef>
-          <a:effectRef idx="2">
-            <a:schemeClr val="accent1"/>
-          </a:effectRef>
-          <a:fontRef idx="minor">
-            <a:schemeClr val="lt1"/>
-          </a:fontRef>
-        </p:style>
-        <p:txBody>
-          <a:bodyPr rtlCol="0" anchor="ctr"/>
-          <a:lstStyle/>
-          <a:p>
-            <a:pPr algn="ctr"/>
-          </a:p>
-        </p:txBody>
-      </p:sp>
-      <p:sp>
-        <p:nvSpPr>
-          <p:cNvPr id="10" name="TextBox 9"/>
+              <a:t>Fondasi Logika Bisnis &amp; Keamanan Data Perusahaan</a:t>
+            </a:r>
+          </a:p>
+        </p:txBody>
+      </p:sp>
+      <p:sp>
+        <p:nvSpPr>
+          <p:cNvPr id="6" name="TextBox 5"/>
           <p:cNvSpPr txBox="1"/>
           <p:nvPr/>
         </p:nvSpPr>
         <p:spPr>
           <a:xfrm>
-            <a:off x="960120" y="3154680"/>
-            <a:ext cx="10332720" cy="649224"/>
+            <a:off x="1097280" y="2468880"/>
+            <a:ext cx="9966960" cy="3291840"/>
           </a:xfrm>
           <a:prstGeom prst="rect">
             <a:avLst/>
@@ -5906,346 +4876,68 @@
           <a:noFill/>
         </p:spPr>
         <p:txBody>
-          <a:bodyPr wrap="square" lIns="0" tIns="0" rIns="0" bIns="0">
+          <a:bodyPr wrap="square">
             <a:spAutoFit/>
           </a:bodyPr>
           <a:lstStyle/>
           <a:p>
             <a:pPr>
               <a:spcAft>
-                <a:spcPts val="200"/>
+                <a:spcPts val="1400"/>
               </a:spcAft>
-              <a:defRPr sz="1400" b="1">
-                <a:solidFill>
-                  <a:srgbClr val="38BDF8"/>
+              <a:defRPr sz="1400">
+                <a:solidFill>
+                  <a:srgbClr val="E2E8F0"/>
                 </a:solidFill>
               </a:defRPr>
             </a:pPr>
             <a:r>
-              <a:t>Service Layer</a:t>
-            </a:r>
-          </a:p>
-          <a:p>
-            <a:pPr>
-              <a:defRPr sz="1200">
-                <a:solidFill>
-                  <a:srgbClr val="F8FAFC"/>
-                </a:solidFill>
-              </a:defRPr>
-            </a:pPr>
-            <a:r>
-              <a:t>Menampung logika bisnis kompleks, upload file storage, dan DB::transaction.</a:t>
-            </a:r>
-          </a:p>
-        </p:txBody>
-      </p:sp>
-      <p:sp>
-        <p:nvSpPr>
-          <p:cNvPr id="11" name="Rounded Rectangle 10"/>
-          <p:cNvSpPr/>
-          <p:nvPr/>
-        </p:nvSpPr>
-        <p:spPr>
-          <a:xfrm>
-            <a:off x="731520" y="4078224"/>
-            <a:ext cx="10728655" cy="868680"/>
-          </a:xfrm>
-          <a:prstGeom prst="roundRect">
-            <a:avLst/>
-          </a:prstGeom>
-          <a:solidFill>
-            <a:srgbClr val="1E293B"/>
-          </a:solidFill>
-          <a:ln w="12700">
-            <a:solidFill>
-              <a:srgbClr val="334155"/>
-            </a:solidFill>
-          </a:ln>
-        </p:spPr>
-        <p:style>
-          <a:lnRef idx="1">
-            <a:schemeClr val="accent1"/>
-          </a:lnRef>
-          <a:fillRef idx="3">
-            <a:schemeClr val="accent1"/>
-          </a:fillRef>
-          <a:effectRef idx="2">
-            <a:schemeClr val="accent1"/>
-          </a:effectRef>
-          <a:fontRef idx="minor">
-            <a:schemeClr val="lt1"/>
-          </a:fontRef>
-        </p:style>
-        <p:txBody>
-          <a:bodyPr rtlCol="0" anchor="ctr"/>
-          <a:lstStyle/>
-          <a:p>
-            <a:pPr algn="ctr"/>
-          </a:p>
-        </p:txBody>
-      </p:sp>
-      <p:sp>
-        <p:nvSpPr>
-          <p:cNvPr id="12" name="Rectangle 11"/>
-          <p:cNvSpPr/>
-          <p:nvPr/>
-        </p:nvSpPr>
-        <p:spPr>
-          <a:xfrm>
-            <a:off x="731520" y="4078224"/>
-            <a:ext cx="73152" cy="868680"/>
-          </a:xfrm>
-          <a:prstGeom prst="rect">
-            <a:avLst/>
-          </a:prstGeom>
-          <a:solidFill>
-            <a:srgbClr val="38BDF8"/>
-          </a:solidFill>
-          <a:ln>
-            <a:noFill/>
-          </a:ln>
-        </p:spPr>
-        <p:style>
-          <a:lnRef idx="1">
-            <a:schemeClr val="accent1"/>
-          </a:lnRef>
-          <a:fillRef idx="3">
-            <a:schemeClr val="accent1"/>
-          </a:fillRef>
-          <a:effectRef idx="2">
-            <a:schemeClr val="accent1"/>
-          </a:effectRef>
-          <a:fontRef idx="minor">
-            <a:schemeClr val="lt1"/>
-          </a:fontRef>
-        </p:style>
-        <p:txBody>
-          <a:bodyPr rtlCol="0" anchor="ctr"/>
-          <a:lstStyle/>
-          <a:p>
-            <a:pPr algn="ctr"/>
-          </a:p>
-        </p:txBody>
-      </p:sp>
-      <p:sp>
-        <p:nvSpPr>
-          <p:cNvPr id="13" name="TextBox 12"/>
-          <p:cNvSpPr txBox="1"/>
-          <p:nvPr/>
-        </p:nvSpPr>
-        <p:spPr>
-          <a:xfrm>
-            <a:off x="960120" y="4187952"/>
-            <a:ext cx="10332720" cy="649224"/>
-          </a:xfrm>
-          <a:prstGeom prst="rect">
-            <a:avLst/>
-          </a:prstGeom>
-          <a:noFill/>
-        </p:spPr>
-        <p:txBody>
-          <a:bodyPr wrap="square" lIns="0" tIns="0" rIns="0" bIns="0">
-            <a:spAutoFit/>
-          </a:bodyPr>
-          <a:lstStyle/>
+              <a:t>•  Backend mengelola aturan bisnis inti (Business Logic) yang tidak boleh bocor ke client</a:t>
+            </a:r>
+          </a:p>
           <a:p>
             <a:pPr>
               <a:spcAft>
-                <a:spcPts val="200"/>
+                <a:spcPts val="1400"/>
               </a:spcAft>
-              <a:defRPr sz="1400" b="1">
-                <a:solidFill>
-                  <a:srgbClr val="38BDF8"/>
+              <a:defRPr sz="1400">
+                <a:solidFill>
+                  <a:srgbClr val="E2E8F0"/>
                 </a:solidFill>
               </a:defRPr>
             </a:pPr>
             <a:r>
-              <a:t>Request &amp; Resource</a:t>
-            </a:r>
-          </a:p>
-          <a:p>
-            <a:pPr>
-              <a:defRPr sz="1200">
-                <a:solidFill>
-                  <a:srgbClr val="F8FAFC"/>
-                </a:solidFill>
-              </a:defRPr>
-            </a:pPr>
-            <a:r>
-              <a:t>Form Request untuk isolasi validasi 422; API Resource untuk format JSON konsisten.</a:t>
-            </a:r>
-          </a:p>
-        </p:txBody>
-      </p:sp>
-      <p:sp>
-        <p:nvSpPr>
-          <p:cNvPr id="14" name="Rounded Rectangle 13"/>
-          <p:cNvSpPr/>
-          <p:nvPr/>
-        </p:nvSpPr>
-        <p:spPr>
-          <a:xfrm>
-            <a:off x="731520" y="5111496"/>
-            <a:ext cx="10728655" cy="868680"/>
-          </a:xfrm>
-          <a:prstGeom prst="roundRect">
-            <a:avLst/>
-          </a:prstGeom>
-          <a:solidFill>
-            <a:srgbClr val="1E293B"/>
-          </a:solidFill>
-          <a:ln w="12700">
-            <a:solidFill>
-              <a:srgbClr val="334155"/>
-            </a:solidFill>
-          </a:ln>
-        </p:spPr>
-        <p:style>
-          <a:lnRef idx="1">
-            <a:schemeClr val="accent1"/>
-          </a:lnRef>
-          <a:fillRef idx="3">
-            <a:schemeClr val="accent1"/>
-          </a:fillRef>
-          <a:effectRef idx="2">
-            <a:schemeClr val="accent1"/>
-          </a:effectRef>
-          <a:fontRef idx="minor">
-            <a:schemeClr val="lt1"/>
-          </a:fontRef>
-        </p:style>
-        <p:txBody>
-          <a:bodyPr rtlCol="0" anchor="ctr"/>
-          <a:lstStyle/>
-          <a:p>
-            <a:pPr algn="ctr"/>
-          </a:p>
-        </p:txBody>
-      </p:sp>
-      <p:sp>
-        <p:nvSpPr>
-          <p:cNvPr id="15" name="Rectangle 14"/>
-          <p:cNvSpPr/>
-          <p:nvPr/>
-        </p:nvSpPr>
-        <p:spPr>
-          <a:xfrm>
-            <a:off x="731520" y="5111496"/>
-            <a:ext cx="73152" cy="868680"/>
-          </a:xfrm>
-          <a:prstGeom prst="rect">
-            <a:avLst/>
-          </a:prstGeom>
-          <a:solidFill>
-            <a:srgbClr val="A78BFA"/>
-          </a:solidFill>
-          <a:ln>
-            <a:noFill/>
-          </a:ln>
-        </p:spPr>
-        <p:style>
-          <a:lnRef idx="1">
-            <a:schemeClr val="accent1"/>
-          </a:lnRef>
-          <a:fillRef idx="3">
-            <a:schemeClr val="accent1"/>
-          </a:fillRef>
-          <a:effectRef idx="2">
-            <a:schemeClr val="accent1"/>
-          </a:effectRef>
-          <a:fontRef idx="minor">
-            <a:schemeClr val="lt1"/>
-          </a:fontRef>
-        </p:style>
-        <p:txBody>
-          <a:bodyPr rtlCol="0" anchor="ctr"/>
-          <a:lstStyle/>
-          <a:p>
-            <a:pPr algn="ctr"/>
-          </a:p>
-        </p:txBody>
-      </p:sp>
-      <p:sp>
-        <p:nvSpPr>
-          <p:cNvPr id="16" name="TextBox 15"/>
-          <p:cNvSpPr txBox="1"/>
-          <p:nvPr/>
-        </p:nvSpPr>
-        <p:spPr>
-          <a:xfrm>
-            <a:off x="960120" y="5221224"/>
-            <a:ext cx="10332720" cy="649224"/>
-          </a:xfrm>
-          <a:prstGeom prst="rect">
-            <a:avLst/>
-          </a:prstGeom>
-          <a:noFill/>
-        </p:spPr>
-        <p:txBody>
-          <a:bodyPr wrap="square" lIns="0" tIns="0" rIns="0" bIns="0">
-            <a:spAutoFit/>
-          </a:bodyPr>
-          <a:lstStyle/>
+              <a:t>•  Menjaga integritas data finansial: Uang Muka, Realisasi Pengeluaran, dan Settlement Klaim</a:t>
+            </a:r>
+          </a:p>
           <a:p>
             <a:pPr>
               <a:spcAft>
-                <a:spcPts val="200"/>
+                <a:spcPts val="1400"/>
               </a:spcAft>
-              <a:defRPr sz="1400" b="1">
-                <a:solidFill>
-                  <a:srgbClr val="38BDF8"/>
+              <a:defRPr sz="1400">
+                <a:solidFill>
+                  <a:srgbClr val="E2E8F0"/>
                 </a:solidFill>
               </a:defRPr>
             </a:pPr>
             <a:r>
-              <a:t>Model &amp; Observer</a:t>
+              <a:t>•  Mencegah manipulasi angka anggaran melalui validasi ketat Form Request di server</a:t>
             </a:r>
           </a:p>
           <a:p>
             <a:pPr>
-              <a:defRPr sz="1200">
-                <a:solidFill>
-                  <a:srgbClr val="F8FAFC"/>
+              <a:spcAft>
+                <a:spcPts val="1400"/>
+              </a:spcAft>
+              <a:defRPr sz="1400">
+                <a:solidFill>
+                  <a:srgbClr val="E2E8F0"/>
                 </a:solidFill>
               </a:defRPr>
             </a:pPr>
             <a:r>
-              <a:t>Model Eloquent terhubung AuditObserver untuk tracking otomatis created, updated, deleted.</a:t>
-            </a:r>
-          </a:p>
-        </p:txBody>
-      </p:sp>
-      <p:sp>
-        <p:nvSpPr>
-          <p:cNvPr id="17" name="TextBox 16"/>
-          <p:cNvSpPr txBox="1"/>
-          <p:nvPr/>
-        </p:nvSpPr>
-        <p:spPr>
-          <a:xfrm>
-            <a:off x="731520" y="6309360"/>
-            <a:ext cx="10728655" cy="365760"/>
-          </a:xfrm>
-          <a:prstGeom prst="rect">
-            <a:avLst/>
-          </a:prstGeom>
-          <a:noFill/>
-        </p:spPr>
-        <p:txBody>
-          <a:bodyPr wrap="square" lIns="0" tIns="0" rIns="0" bIns="0">
-            <a:spAutoFit/>
-          </a:bodyPr>
-          <a:lstStyle/>
-          <a:p>
-            <a:pPr>
-              <a:defRPr sz="950">
-                <a:solidFill>
-                  <a:srgbClr val="94A3B8"/>
-                </a:solidFill>
-              </a:defRPr>
-            </a:pPr>
-            <a:r>
-              <a:t>PT Astronova Enterprise • Backend Architecture Review &amp; Live Database Audit • Laravel 13</a:t>
+              <a:t>•  Melindungi akses sistem dengan autentikasi Sanctum dan hak akses bertingkat (RBAC)</a:t>
             </a:r>
           </a:p>
         </p:txBody>
@@ -6283,7 +4975,7 @@
             <a:avLst/>
           </a:prstGeom>
           <a:solidFill>
-            <a:srgbClr val="0B1120"/>
+            <a:srgbClr val="0F172A"/>
           </a:solidFill>
           <a:ln>
             <a:noFill/>
@@ -6313,23 +5005,25 @@
       </p:sp>
       <p:sp>
         <p:nvSpPr>
-          <p:cNvPr id="3" name="Rectangle 2"/>
+          <p:cNvPr id="3" name="Rounded Rectangle 2"/>
           <p:cNvSpPr/>
           <p:nvPr/>
         </p:nvSpPr>
         <p:spPr>
           <a:xfrm>
-            <a:off x="731520" y="548640"/>
-            <a:ext cx="73152" cy="1188720"/>
-          </a:xfrm>
-          <a:prstGeom prst="rect">
+            <a:off x="731520" y="731520"/>
+            <a:ext cx="10728655" cy="5394960"/>
+          </a:xfrm>
+          <a:prstGeom prst="roundRect">
             <a:avLst/>
           </a:prstGeom>
           <a:solidFill>
-            <a:srgbClr val="38BDF8"/>
+            <a:srgbClr val="1E293B"/>
           </a:solidFill>
           <a:ln>
-            <a:noFill/>
+            <a:solidFill>
+              <a:srgbClr val="334155"/>
+            </a:solidFill>
           </a:ln>
         </p:spPr>
         <p:style>
@@ -6362,8 +5056,8 @@
         </p:nvSpPr>
         <p:spPr>
           <a:xfrm>
-            <a:off x="960120" y="411480"/>
-            <a:ext cx="10241280" cy="1371600"/>
+            <a:off x="1097280" y="1005840"/>
+            <a:ext cx="9966960" cy="365760"/>
           </a:xfrm>
           <a:prstGeom prst="rect">
             <a:avLst/>
@@ -6371,7 +5065,7 @@
           <a:noFill/>
         </p:spPr>
         <p:txBody>
-          <a:bodyPr wrap="square" lIns="0" tIns="0" rIns="0" bIns="0">
+          <a:bodyPr wrap="none">
             <a:spAutoFit/>
           </a:bodyPr>
           <a:lstStyle/>
@@ -6379,141 +5073,26 @@
             <a:pPr>
               <a:defRPr sz="1100" b="1">
                 <a:solidFill>
-                  <a:srgbClr val="34D399"/>
+                  <a:srgbClr val="38BDF8"/>
                 </a:solidFill>
               </a:defRPr>
             </a:pPr>
             <a:r>
-              <a:t>SLIDE 3 • DATABASE &amp; MODEL ELOQUENT</a:t>
-            </a:r>
-          </a:p>
-          <a:p>
-            <a:pPr>
-              <a:spcAft>
-                <a:spcPts val="400"/>
-              </a:spcAft>
-              <a:defRPr sz="2500" b="1">
-                <a:solidFill>
-                  <a:srgbClr val="F8FAFC"/>
-                </a:solidFill>
-              </a:defRPr>
-            </a:pPr>
-            <a:r>
-              <a:t>Struktur Database &amp; Relasi Model</a:t>
-            </a:r>
-          </a:p>
-          <a:p>
-            <a:pPr>
-              <a:defRPr sz="1300">
-                <a:solidFill>
-                  <a:srgbClr val="94A3B8"/>
-                </a:solidFill>
-              </a:defRPr>
-            </a:pPr>
-            <a:r>
-              <a:t>28 Tabel Migrasi dengan Integritas Referential Ketat</a:t>
-            </a:r>
-          </a:p>
-        </p:txBody>
-      </p:sp>
-      <p:sp>
-        <p:nvSpPr>
-          <p:cNvPr id="5" name="Rounded Rectangle 4"/>
-          <p:cNvSpPr/>
-          <p:nvPr/>
-        </p:nvSpPr>
-        <p:spPr>
-          <a:xfrm>
-            <a:off x="731520" y="2011680"/>
-            <a:ext cx="10728655" cy="868680"/>
-          </a:xfrm>
-          <a:prstGeom prst="roundRect">
-            <a:avLst/>
-          </a:prstGeom>
-          <a:solidFill>
-            <a:srgbClr val="1E293B"/>
-          </a:solidFill>
-          <a:ln w="12700">
-            <a:solidFill>
-              <a:srgbClr val="334155"/>
-            </a:solidFill>
-          </a:ln>
-        </p:spPr>
-        <p:style>
-          <a:lnRef idx="1">
-            <a:schemeClr val="accent1"/>
-          </a:lnRef>
-          <a:fillRef idx="3">
-            <a:schemeClr val="accent1"/>
-          </a:fillRef>
-          <a:effectRef idx="2">
-            <a:schemeClr val="accent1"/>
-          </a:effectRef>
-          <a:fontRef idx="minor">
-            <a:schemeClr val="lt1"/>
-          </a:fontRef>
-        </p:style>
-        <p:txBody>
-          <a:bodyPr rtlCol="0" anchor="ctr"/>
-          <a:lstStyle/>
-          <a:p>
-            <a:pPr algn="ctr"/>
-          </a:p>
-        </p:txBody>
-      </p:sp>
-      <p:sp>
-        <p:nvSpPr>
-          <p:cNvPr id="6" name="Rectangle 5"/>
-          <p:cNvSpPr/>
-          <p:nvPr/>
-        </p:nvSpPr>
-        <p:spPr>
-          <a:xfrm>
-            <a:off x="731520" y="2011680"/>
-            <a:ext cx="73152" cy="868680"/>
-          </a:xfrm>
-          <a:prstGeom prst="rect">
-            <a:avLst/>
-          </a:prstGeom>
-          <a:solidFill>
-            <a:srgbClr val="38BDF8"/>
-          </a:solidFill>
-          <a:ln>
-            <a:noFill/>
-          </a:ln>
-        </p:spPr>
-        <p:style>
-          <a:lnRef idx="1">
-            <a:schemeClr val="accent1"/>
-          </a:lnRef>
-          <a:fillRef idx="3">
-            <a:schemeClr val="accent1"/>
-          </a:fillRef>
-          <a:effectRef idx="2">
-            <a:schemeClr val="accent1"/>
-          </a:effectRef>
-          <a:fontRef idx="minor">
-            <a:schemeClr val="lt1"/>
-          </a:fontRef>
-        </p:style>
-        <p:txBody>
-          <a:bodyPr rtlCol="0" anchor="ctr"/>
-          <a:lstStyle/>
-          <a:p>
-            <a:pPr algn="ctr"/>
-          </a:p>
-        </p:txBody>
-      </p:sp>
-      <p:sp>
-        <p:nvSpPr>
-          <p:cNvPr id="7" name="TextBox 6"/>
+              <a:t>SLIDE 3 / 10 • ASTRONOVA BACKEND</a:t>
+            </a:r>
+          </a:p>
+        </p:txBody>
+      </p:sp>
+      <p:sp>
+        <p:nvSpPr>
+          <p:cNvPr id="5" name="TextBox 4"/>
           <p:cNvSpPr txBox="1"/>
           <p:nvPr/>
         </p:nvSpPr>
         <p:spPr>
           <a:xfrm>
-            <a:off x="960120" y="2121408"/>
-            <a:ext cx="10332720" cy="649224"/>
+            <a:off x="1097280" y="1280160"/>
+            <a:ext cx="9966960" cy="1005840"/>
           </a:xfrm>
           <a:prstGeom prst="rect">
             <a:avLst/>
@@ -6521,137 +5100,46 @@
           <a:noFill/>
         </p:spPr>
         <p:txBody>
-          <a:bodyPr wrap="square" lIns="0" tIns="0" rIns="0" bIns="0">
+          <a:bodyPr wrap="square">
             <a:spAutoFit/>
           </a:bodyPr>
           <a:lstStyle/>
           <a:p>
             <a:pPr>
-              <a:spcAft>
-                <a:spcPts val="200"/>
-              </a:spcAft>
-              <a:defRPr sz="1400" b="1">
-                <a:solidFill>
-                  <a:srgbClr val="38BDF8"/>
+              <a:defRPr sz="2400" b="1">
+                <a:solidFill>
+                  <a:srgbClr val="FFFFFF"/>
                 </a:solidFill>
               </a:defRPr>
             </a:pPr>
             <a:r>
-              <a:t>Master Data Inti</a:t>
+              <a:t>Struktur Arsitektur &amp; Teknologi Backend</a:t>
             </a:r>
           </a:p>
           <a:p>
             <a:pPr>
-              <a:defRPr sz="1200">
-                <a:solidFill>
-                  <a:srgbClr val="F8FAFC"/>
+              <a:defRPr sz="1400">
+                <a:solidFill>
+                  <a:srgbClr val="34D399"/>
                 </a:solidFill>
               </a:defRPr>
             </a:pPr>
             <a:r>
-              <a:t>Departemen (1) ke Karyawan (N). Dilindungi onDelete('restrict') dari penghapusan ilegal.</a:t>
-            </a:r>
-          </a:p>
-        </p:txBody>
-      </p:sp>
-      <p:sp>
-        <p:nvSpPr>
-          <p:cNvPr id="8" name="Rounded Rectangle 7"/>
-          <p:cNvSpPr/>
-          <p:nvPr/>
-        </p:nvSpPr>
-        <p:spPr>
-          <a:xfrm>
-            <a:off x="731520" y="3044952"/>
-            <a:ext cx="10728655" cy="868680"/>
-          </a:xfrm>
-          <a:prstGeom prst="roundRect">
-            <a:avLst/>
-          </a:prstGeom>
-          <a:solidFill>
-            <a:srgbClr val="1E293B"/>
-          </a:solidFill>
-          <a:ln w="12700">
-            <a:solidFill>
-              <a:srgbClr val="334155"/>
-            </a:solidFill>
-          </a:ln>
-        </p:spPr>
-        <p:style>
-          <a:lnRef idx="1">
-            <a:schemeClr val="accent1"/>
-          </a:lnRef>
-          <a:fillRef idx="3">
-            <a:schemeClr val="accent1"/>
-          </a:fillRef>
-          <a:effectRef idx="2">
-            <a:schemeClr val="accent1"/>
-          </a:effectRef>
-          <a:fontRef idx="minor">
-            <a:schemeClr val="lt1"/>
-          </a:fontRef>
-        </p:style>
-        <p:txBody>
-          <a:bodyPr rtlCol="0" anchor="ctr"/>
-          <a:lstStyle/>
-          <a:p>
-            <a:pPr algn="ctr"/>
-          </a:p>
-        </p:txBody>
-      </p:sp>
-      <p:sp>
-        <p:nvSpPr>
-          <p:cNvPr id="9" name="Rectangle 8"/>
-          <p:cNvSpPr/>
-          <p:nvPr/>
-        </p:nvSpPr>
-        <p:spPr>
-          <a:xfrm>
-            <a:off x="731520" y="3044952"/>
-            <a:ext cx="73152" cy="868680"/>
-          </a:xfrm>
-          <a:prstGeom prst="rect">
-            <a:avLst/>
-          </a:prstGeom>
-          <a:solidFill>
-            <a:srgbClr val="A78BFA"/>
-          </a:solidFill>
-          <a:ln>
-            <a:noFill/>
-          </a:ln>
-        </p:spPr>
-        <p:style>
-          <a:lnRef idx="1">
-            <a:schemeClr val="accent1"/>
-          </a:lnRef>
-          <a:fillRef idx="3">
-            <a:schemeClr val="accent1"/>
-          </a:fillRef>
-          <a:effectRef idx="2">
-            <a:schemeClr val="accent1"/>
-          </a:effectRef>
-          <a:fontRef idx="minor">
-            <a:schemeClr val="lt1"/>
-          </a:fontRef>
-        </p:style>
-        <p:txBody>
-          <a:bodyPr rtlCol="0" anchor="ctr"/>
-          <a:lstStyle/>
-          <a:p>
-            <a:pPr algn="ctr"/>
-          </a:p>
-        </p:txBody>
-      </p:sp>
-      <p:sp>
-        <p:nvSpPr>
-          <p:cNvPr id="10" name="TextBox 9"/>
+              <a:t>Tech Stack Modern Standar Industri Software Engineering</a:t>
+            </a:r>
+          </a:p>
+        </p:txBody>
+      </p:sp>
+      <p:sp>
+        <p:nvSpPr>
+          <p:cNvPr id="6" name="TextBox 5"/>
           <p:cNvSpPr txBox="1"/>
           <p:nvPr/>
         </p:nvSpPr>
         <p:spPr>
           <a:xfrm>
-            <a:off x="960120" y="3154680"/>
-            <a:ext cx="10332720" cy="649224"/>
+            <a:off x="1097280" y="2468880"/>
+            <a:ext cx="9966960" cy="3291840"/>
           </a:xfrm>
           <a:prstGeom prst="rect">
             <a:avLst/>
@@ -6659,346 +5147,68 @@
           <a:noFill/>
         </p:spPr>
         <p:txBody>
-          <a:bodyPr wrap="square" lIns="0" tIns="0" rIns="0" bIns="0">
+          <a:bodyPr wrap="square">
             <a:spAutoFit/>
           </a:bodyPr>
           <a:lstStyle/>
           <a:p>
             <a:pPr>
               <a:spcAft>
-                <a:spcPts val="200"/>
+                <a:spcPts val="1400"/>
               </a:spcAft>
-              <a:defRPr sz="1400" b="1">
-                <a:solidFill>
-                  <a:srgbClr val="38BDF8"/>
+              <a:defRPr sz="1400">
+                <a:solidFill>
+                  <a:srgbClr val="E2E8F0"/>
                 </a:solidFill>
               </a:defRPr>
             </a:pPr>
             <a:r>
-              <a:t>Transaksi Induk &amp; Detail</a:t>
-            </a:r>
-          </a:p>
-          <a:p>
-            <a:pPr>
-              <a:defRPr sz="1200">
-                <a:solidFill>
-                  <a:srgbClr val="F8FAFC"/>
-                </a:solidFill>
-              </a:defRPr>
-            </a:pPr>
-            <a:r>
-              <a:t>PengajuanPerjalanan (1) ke DetailEstimasi (N), UangMuka (N), Booking (N), Itinerary (N).</a:t>
-            </a:r>
-          </a:p>
-        </p:txBody>
-      </p:sp>
-      <p:sp>
-        <p:nvSpPr>
-          <p:cNvPr id="11" name="Rounded Rectangle 10"/>
-          <p:cNvSpPr/>
-          <p:nvPr/>
-        </p:nvSpPr>
-        <p:spPr>
-          <a:xfrm>
-            <a:off x="731520" y="4078224"/>
-            <a:ext cx="10728655" cy="868680"/>
-          </a:xfrm>
-          <a:prstGeom prst="roundRect">
-            <a:avLst/>
-          </a:prstGeom>
-          <a:solidFill>
-            <a:srgbClr val="1E293B"/>
-          </a:solidFill>
-          <a:ln w="12700">
-            <a:solidFill>
-              <a:srgbClr val="334155"/>
-            </a:solidFill>
-          </a:ln>
-        </p:spPr>
-        <p:style>
-          <a:lnRef idx="1">
-            <a:schemeClr val="accent1"/>
-          </a:lnRef>
-          <a:fillRef idx="3">
-            <a:schemeClr val="accent1"/>
-          </a:fillRef>
-          <a:effectRef idx="2">
-            <a:schemeClr val="accent1"/>
-          </a:effectRef>
-          <a:fontRef idx="minor">
-            <a:schemeClr val="lt1"/>
-          </a:fontRef>
-        </p:style>
-        <p:txBody>
-          <a:bodyPr rtlCol="0" anchor="ctr"/>
-          <a:lstStyle/>
-          <a:p>
-            <a:pPr algn="ctr"/>
-          </a:p>
-        </p:txBody>
-      </p:sp>
-      <p:sp>
-        <p:nvSpPr>
-          <p:cNvPr id="12" name="Rectangle 11"/>
-          <p:cNvSpPr/>
-          <p:nvPr/>
-        </p:nvSpPr>
-        <p:spPr>
-          <a:xfrm>
-            <a:off x="731520" y="4078224"/>
-            <a:ext cx="73152" cy="868680"/>
-          </a:xfrm>
-          <a:prstGeom prst="rect">
-            <a:avLst/>
-          </a:prstGeom>
-          <a:solidFill>
-            <a:srgbClr val="38BDF8"/>
-          </a:solidFill>
-          <a:ln>
-            <a:noFill/>
-          </a:ln>
-        </p:spPr>
-        <p:style>
-          <a:lnRef idx="1">
-            <a:schemeClr val="accent1"/>
-          </a:lnRef>
-          <a:fillRef idx="3">
-            <a:schemeClr val="accent1"/>
-          </a:fillRef>
-          <a:effectRef idx="2">
-            <a:schemeClr val="accent1"/>
-          </a:effectRef>
-          <a:fontRef idx="minor">
-            <a:schemeClr val="lt1"/>
-          </a:fontRef>
-        </p:style>
-        <p:txBody>
-          <a:bodyPr rtlCol="0" anchor="ctr"/>
-          <a:lstStyle/>
-          <a:p>
-            <a:pPr algn="ctr"/>
-          </a:p>
-        </p:txBody>
-      </p:sp>
-      <p:sp>
-        <p:nvSpPr>
-          <p:cNvPr id="13" name="TextBox 12"/>
-          <p:cNvSpPr txBox="1"/>
-          <p:nvPr/>
-        </p:nvSpPr>
-        <p:spPr>
-          <a:xfrm>
-            <a:off x="960120" y="4187952"/>
-            <a:ext cx="10332720" cy="649224"/>
-          </a:xfrm>
-          <a:prstGeom prst="rect">
-            <a:avLst/>
-          </a:prstGeom>
-          <a:noFill/>
-        </p:spPr>
-        <p:txBody>
-          <a:bodyPr wrap="square" lIns="0" tIns="0" rIns="0" bIns="0">
-            <a:spAutoFit/>
-          </a:bodyPr>
-          <a:lstStyle/>
+              <a:t>•  Framework: Laravel 13.x dengan PHP 8.3 Engine &amp; Strict Typing</a:t>
+            </a:r>
+          </a:p>
           <a:p>
             <a:pPr>
               <a:spcAft>
-                <a:spcPts val="200"/>
+                <a:spcPts val="1400"/>
               </a:spcAft>
-              <a:defRPr sz="1400" b="1">
-                <a:solidFill>
-                  <a:srgbClr val="38BDF8"/>
+              <a:defRPr sz="1400">
+                <a:solidFill>
+                  <a:srgbClr val="E2E8F0"/>
                 </a:solidFill>
               </a:defRPr>
             </a:pPr>
             <a:r>
-              <a:t>Klaim Reimbursement</a:t>
-            </a:r>
-          </a:p>
-          <a:p>
-            <a:pPr>
-              <a:defRPr sz="1200">
-                <a:solidFill>
-                  <a:srgbClr val="F8FAFC"/>
-                </a:solidFill>
-              </a:defRPr>
-            </a:pPr>
-            <a:r>
-              <a:t>Relasi 1:1 ke PengajuanPerjalanan yang disetujui, terhubung DetailPengeluaran &amp; BuktiStruk.</a:t>
-            </a:r>
-          </a:p>
-        </p:txBody>
-      </p:sp>
-      <p:sp>
-        <p:nvSpPr>
-          <p:cNvPr id="14" name="Rounded Rectangle 13"/>
-          <p:cNvSpPr/>
-          <p:nvPr/>
-        </p:nvSpPr>
-        <p:spPr>
-          <a:xfrm>
-            <a:off x="731520" y="5111496"/>
-            <a:ext cx="10728655" cy="868680"/>
-          </a:xfrm>
-          <a:prstGeom prst="roundRect">
-            <a:avLst/>
-          </a:prstGeom>
-          <a:solidFill>
-            <a:srgbClr val="1E293B"/>
-          </a:solidFill>
-          <a:ln w="12700">
-            <a:solidFill>
-              <a:srgbClr val="334155"/>
-            </a:solidFill>
-          </a:ln>
-        </p:spPr>
-        <p:style>
-          <a:lnRef idx="1">
-            <a:schemeClr val="accent1"/>
-          </a:lnRef>
-          <a:fillRef idx="3">
-            <a:schemeClr val="accent1"/>
-          </a:fillRef>
-          <a:effectRef idx="2">
-            <a:schemeClr val="accent1"/>
-          </a:effectRef>
-          <a:fontRef idx="minor">
-            <a:schemeClr val="lt1"/>
-          </a:fontRef>
-        </p:style>
-        <p:txBody>
-          <a:bodyPr rtlCol="0" anchor="ctr"/>
-          <a:lstStyle/>
-          <a:p>
-            <a:pPr algn="ctr"/>
-          </a:p>
-        </p:txBody>
-      </p:sp>
-      <p:sp>
-        <p:nvSpPr>
-          <p:cNvPr id="15" name="Rectangle 14"/>
-          <p:cNvSpPr/>
-          <p:nvPr/>
-        </p:nvSpPr>
-        <p:spPr>
-          <a:xfrm>
-            <a:off x="731520" y="5111496"/>
-            <a:ext cx="73152" cy="868680"/>
-          </a:xfrm>
-          <a:prstGeom prst="rect">
-            <a:avLst/>
-          </a:prstGeom>
-          <a:solidFill>
-            <a:srgbClr val="A78BFA"/>
-          </a:solidFill>
-          <a:ln>
-            <a:noFill/>
-          </a:ln>
-        </p:spPr>
-        <p:style>
-          <a:lnRef idx="1">
-            <a:schemeClr val="accent1"/>
-          </a:lnRef>
-          <a:fillRef idx="3">
-            <a:schemeClr val="accent1"/>
-          </a:fillRef>
-          <a:effectRef idx="2">
-            <a:schemeClr val="accent1"/>
-          </a:effectRef>
-          <a:fontRef idx="minor">
-            <a:schemeClr val="lt1"/>
-          </a:fontRef>
-        </p:style>
-        <p:txBody>
-          <a:bodyPr rtlCol="0" anchor="ctr"/>
-          <a:lstStyle/>
-          <a:p>
-            <a:pPr algn="ctr"/>
-          </a:p>
-        </p:txBody>
-      </p:sp>
-      <p:sp>
-        <p:nvSpPr>
-          <p:cNvPr id="16" name="TextBox 15"/>
-          <p:cNvSpPr txBox="1"/>
-          <p:nvPr/>
-        </p:nvSpPr>
-        <p:spPr>
-          <a:xfrm>
-            <a:off x="960120" y="5221224"/>
-            <a:ext cx="10332720" cy="649224"/>
-          </a:xfrm>
-          <a:prstGeom prst="rect">
-            <a:avLst/>
-          </a:prstGeom>
-          <a:noFill/>
-        </p:spPr>
-        <p:txBody>
-          <a:bodyPr wrap="square" lIns="0" tIns="0" rIns="0" bIns="0">
-            <a:spAutoFit/>
-          </a:bodyPr>
-          <a:lstStyle/>
+              <a:t>•  Database Engine: MySQL 8.x dengan Foreign Key Restrict, Indexing, dan Decimal(15,2)</a:t>
+            </a:r>
+          </a:p>
           <a:p>
             <a:pPr>
               <a:spcAft>
-                <a:spcPts val="200"/>
+                <a:spcPts val="1400"/>
               </a:spcAft>
-              <a:defRPr sz="1400" b="1">
-                <a:solidFill>
-                  <a:srgbClr val="38BDF8"/>
+              <a:defRPr sz="1400">
+                <a:solidFill>
+                  <a:srgbClr val="E2E8F0"/>
                 </a:solidFill>
               </a:defRPr>
             </a:pPr>
             <a:r>
-              <a:t>Riwayat Persetujuan</a:t>
+              <a:t>•  Autentikasi: Laravel Sanctum (Stateful &amp; Personal Access Token)</a:t>
             </a:r>
           </a:p>
           <a:p>
             <a:pPr>
-              <a:defRPr sz="1200">
-                <a:solidFill>
-                  <a:srgbClr val="F8FAFC"/>
+              <a:spcAft>
+                <a:spcPts val="1400"/>
+              </a:spcAft>
+              <a:defRPr sz="1400">
+                <a:solidFill>
+                  <a:srgbClr val="E2E8F0"/>
                 </a:solidFill>
               </a:defRPr>
             </a:pPr>
             <a:r>
-              <a:t>Relasi Polimorfik (approvable_type, approvable_id) melayani approval berjenjang multi-dokumen.</a:t>
-            </a:r>
-          </a:p>
-        </p:txBody>
-      </p:sp>
-      <p:sp>
-        <p:nvSpPr>
-          <p:cNvPr id="17" name="TextBox 16"/>
-          <p:cNvSpPr txBox="1"/>
-          <p:nvPr/>
-        </p:nvSpPr>
-        <p:spPr>
-          <a:xfrm>
-            <a:off x="731520" y="6309360"/>
-            <a:ext cx="10728655" cy="365760"/>
-          </a:xfrm>
-          <a:prstGeom prst="rect">
-            <a:avLst/>
-          </a:prstGeom>
-          <a:noFill/>
-        </p:spPr>
-        <p:txBody>
-          <a:bodyPr wrap="square" lIns="0" tIns="0" rIns="0" bIns="0">
-            <a:spAutoFit/>
-          </a:bodyPr>
-          <a:lstStyle/>
-          <a:p>
-            <a:pPr>
-              <a:defRPr sz="950">
-                <a:solidFill>
-                  <a:srgbClr val="94A3B8"/>
-                </a:solidFill>
-              </a:defRPr>
-            </a:pPr>
-            <a:r>
-              <a:t>PT Astronova Enterprise • Backend Architecture Review &amp; Live Database Audit • Laravel 13</a:t>
+              <a:t>•  Arsitektur: MVC + RESTful API Resource + Form Request Validation + DB Transactions</a:t>
             </a:r>
           </a:p>
         </p:txBody>
@@ -7036,7 +5246,7 @@
             <a:avLst/>
           </a:prstGeom>
           <a:solidFill>
-            <a:srgbClr val="0B1120"/>
+            <a:srgbClr val="0F172A"/>
           </a:solidFill>
           <a:ln>
             <a:noFill/>
@@ -7066,23 +5276,25 @@
       </p:sp>
       <p:sp>
         <p:nvSpPr>
-          <p:cNvPr id="3" name="Rectangle 2"/>
+          <p:cNvPr id="3" name="Rounded Rectangle 2"/>
           <p:cNvSpPr/>
           <p:nvPr/>
         </p:nvSpPr>
         <p:spPr>
           <a:xfrm>
-            <a:off x="731520" y="548640"/>
-            <a:ext cx="73152" cy="1188720"/>
-          </a:xfrm>
-          <a:prstGeom prst="rect">
+            <a:off x="731520" y="731520"/>
+            <a:ext cx="10728655" cy="5394960"/>
+          </a:xfrm>
+          <a:prstGeom prst="roundRect">
             <a:avLst/>
           </a:prstGeom>
           <a:solidFill>
-            <a:srgbClr val="38BDF8"/>
+            <a:srgbClr val="1E293B"/>
           </a:solidFill>
           <a:ln>
-            <a:noFill/>
+            <a:solidFill>
+              <a:srgbClr val="334155"/>
+            </a:solidFill>
           </a:ln>
         </p:spPr>
         <p:style>
@@ -7115,8 +5327,8 @@
         </p:nvSpPr>
         <p:spPr>
           <a:xfrm>
-            <a:off x="960120" y="411480"/>
-            <a:ext cx="10241280" cy="1371600"/>
+            <a:off x="1097280" y="1005840"/>
+            <a:ext cx="9966960" cy="365760"/>
           </a:xfrm>
           <a:prstGeom prst="rect">
             <a:avLst/>
@@ -7124,7 +5336,7 @@
           <a:noFill/>
         </p:spPr>
         <p:txBody>
-          <a:bodyPr wrap="square" lIns="0" tIns="0" rIns="0" bIns="0">
+          <a:bodyPr wrap="none">
             <a:spAutoFit/>
           </a:bodyPr>
           <a:lstStyle/>
@@ -7132,141 +5344,26 @@
             <a:pPr>
               <a:defRPr sz="1100" b="1">
                 <a:solidFill>
-                  <a:srgbClr val="34D399"/>
+                  <a:srgbClr val="38BDF8"/>
                 </a:solidFill>
               </a:defRPr>
             </a:pPr>
             <a:r>
-              <a:t>SLIDE 4 • API ENDPOINTS &amp; STANDARISASI</a:t>
-            </a:r>
-          </a:p>
-          <a:p>
-            <a:pPr>
-              <a:spcAft>
-                <a:spcPts val="400"/>
-              </a:spcAft>
-              <a:defRPr sz="2500" b="1">
-                <a:solidFill>
-                  <a:srgbClr val="F8FAFC"/>
-                </a:solidFill>
-              </a:defRPr>
-            </a:pPr>
-            <a:r>
-              <a:t>Route, Controller, dan Alur Request</a:t>
-            </a:r>
-          </a:p>
-          <a:p>
-            <a:pPr>
-              <a:defRPr sz="1300">
-                <a:solidFill>
-                  <a:srgbClr val="94A3B8"/>
-                </a:solidFill>
-              </a:defRPr>
-            </a:pPr>
-            <a:r>
-              <a:t>Format Response Seragam &amp; Konsisten untuk Klien</a:t>
-            </a:r>
-          </a:p>
-        </p:txBody>
-      </p:sp>
-      <p:sp>
-        <p:nvSpPr>
-          <p:cNvPr id="5" name="Rounded Rectangle 4"/>
-          <p:cNvSpPr/>
-          <p:nvPr/>
-        </p:nvSpPr>
-        <p:spPr>
-          <a:xfrm>
-            <a:off x="731520" y="2011680"/>
-            <a:ext cx="10728655" cy="868680"/>
-          </a:xfrm>
-          <a:prstGeom prst="roundRect">
-            <a:avLst/>
-          </a:prstGeom>
-          <a:solidFill>
-            <a:srgbClr val="1E293B"/>
-          </a:solidFill>
-          <a:ln w="12700">
-            <a:solidFill>
-              <a:srgbClr val="334155"/>
-            </a:solidFill>
-          </a:ln>
-        </p:spPr>
-        <p:style>
-          <a:lnRef idx="1">
-            <a:schemeClr val="accent1"/>
-          </a:lnRef>
-          <a:fillRef idx="3">
-            <a:schemeClr val="accent1"/>
-          </a:fillRef>
-          <a:effectRef idx="2">
-            <a:schemeClr val="accent1"/>
-          </a:effectRef>
-          <a:fontRef idx="minor">
-            <a:schemeClr val="lt1"/>
-          </a:fontRef>
-        </p:style>
-        <p:txBody>
-          <a:bodyPr rtlCol="0" anchor="ctr"/>
-          <a:lstStyle/>
-          <a:p>
-            <a:pPr algn="ctr"/>
-          </a:p>
-        </p:txBody>
-      </p:sp>
-      <p:sp>
-        <p:nvSpPr>
-          <p:cNvPr id="6" name="Rectangle 5"/>
-          <p:cNvSpPr/>
-          <p:nvPr/>
-        </p:nvSpPr>
-        <p:spPr>
-          <a:xfrm>
-            <a:off x="731520" y="2011680"/>
-            <a:ext cx="73152" cy="868680"/>
-          </a:xfrm>
-          <a:prstGeom prst="rect">
-            <a:avLst/>
-          </a:prstGeom>
-          <a:solidFill>
-            <a:srgbClr val="38BDF8"/>
-          </a:solidFill>
-          <a:ln>
-            <a:noFill/>
-          </a:ln>
-        </p:spPr>
-        <p:style>
-          <a:lnRef idx="1">
-            <a:schemeClr val="accent1"/>
-          </a:lnRef>
-          <a:fillRef idx="3">
-            <a:schemeClr val="accent1"/>
-          </a:fillRef>
-          <a:effectRef idx="2">
-            <a:schemeClr val="accent1"/>
-          </a:effectRef>
-          <a:fontRef idx="minor">
-            <a:schemeClr val="lt1"/>
-          </a:fontRef>
-        </p:style>
-        <p:txBody>
-          <a:bodyPr rtlCol="0" anchor="ctr"/>
-          <a:lstStyle/>
-          <a:p>
-            <a:pPr algn="ctr"/>
-          </a:p>
-        </p:txBody>
-      </p:sp>
-      <p:sp>
-        <p:nvSpPr>
-          <p:cNvPr id="7" name="TextBox 6"/>
+              <a:t>SLIDE 4 / 10 • ASTRONOVA BACKEND</a:t>
+            </a:r>
+          </a:p>
+        </p:txBody>
+      </p:sp>
+      <p:sp>
+        <p:nvSpPr>
+          <p:cNvPr id="5" name="TextBox 4"/>
           <p:cNvSpPr txBox="1"/>
           <p:nvPr/>
         </p:nvSpPr>
         <p:spPr>
           <a:xfrm>
-            <a:off x="960120" y="2121408"/>
-            <a:ext cx="10332720" cy="649224"/>
+            <a:off x="1097280" y="1280160"/>
+            <a:ext cx="9966960" cy="1005840"/>
           </a:xfrm>
           <a:prstGeom prst="rect">
             <a:avLst/>
@@ -7274,137 +5371,46 @@
           <a:noFill/>
         </p:spPr>
         <p:txBody>
-          <a:bodyPr wrap="square" lIns="0" tIns="0" rIns="0" bIns="0">
+          <a:bodyPr wrap="square">
             <a:spAutoFit/>
           </a:bodyPr>
           <a:lstStyle/>
           <a:p>
             <a:pPr>
-              <a:spcAft>
-                <a:spcPts val="200"/>
-              </a:spcAft>
-              <a:defRPr sz="1400" b="1">
-                <a:solidFill>
-                  <a:srgbClr val="38BDF8"/>
+              <a:defRPr sz="2400" b="1">
+                <a:solidFill>
+                  <a:srgbClr val="FFFFFF"/>
                 </a:solidFill>
               </a:defRPr>
             </a:pPr>
             <a:r>
-              <a:t>Format Response Standar</a:t>
+              <a:t>Peta Modul &amp; Endpoint API Astronova</a:t>
             </a:r>
           </a:p>
           <a:p>
             <a:pPr>
-              <a:defRPr sz="1200">
-                <a:solidFill>
-                  <a:srgbClr val="F8FAFC"/>
+              <a:defRPr sz="1400">
+                <a:solidFill>
+                  <a:srgbClr val="34D399"/>
                 </a:solidFill>
               </a:defRPr>
             </a:pPr>
             <a:r>
-              <a:t>Mewarisi BaseApiController: selalu mengembalikan success (bool), message (str), data/errors.</a:t>
-            </a:r>
-          </a:p>
-        </p:txBody>
-      </p:sp>
-      <p:sp>
-        <p:nvSpPr>
-          <p:cNvPr id="8" name="Rounded Rectangle 7"/>
-          <p:cNvSpPr/>
-          <p:nvPr/>
-        </p:nvSpPr>
-        <p:spPr>
-          <a:xfrm>
-            <a:off x="731520" y="3044952"/>
-            <a:ext cx="10728655" cy="868680"/>
-          </a:xfrm>
-          <a:prstGeom prst="roundRect">
-            <a:avLst/>
-          </a:prstGeom>
-          <a:solidFill>
-            <a:srgbClr val="1E293B"/>
-          </a:solidFill>
-          <a:ln w="12700">
-            <a:solidFill>
-              <a:srgbClr val="334155"/>
-            </a:solidFill>
-          </a:ln>
-        </p:spPr>
-        <p:style>
-          <a:lnRef idx="1">
-            <a:schemeClr val="accent1"/>
-          </a:lnRef>
-          <a:fillRef idx="3">
-            <a:schemeClr val="accent1"/>
-          </a:fillRef>
-          <a:effectRef idx="2">
-            <a:schemeClr val="accent1"/>
-          </a:effectRef>
-          <a:fontRef idx="minor">
-            <a:schemeClr val="lt1"/>
-          </a:fontRef>
-        </p:style>
-        <p:txBody>
-          <a:bodyPr rtlCol="0" anchor="ctr"/>
-          <a:lstStyle/>
-          <a:p>
-            <a:pPr algn="ctr"/>
-          </a:p>
-        </p:txBody>
-      </p:sp>
-      <p:sp>
-        <p:nvSpPr>
-          <p:cNvPr id="9" name="Rectangle 8"/>
-          <p:cNvSpPr/>
-          <p:nvPr/>
-        </p:nvSpPr>
-        <p:spPr>
-          <a:xfrm>
-            <a:off x="731520" y="3044952"/>
-            <a:ext cx="73152" cy="868680"/>
-          </a:xfrm>
-          <a:prstGeom prst="rect">
-            <a:avLst/>
-          </a:prstGeom>
-          <a:solidFill>
-            <a:srgbClr val="A78BFA"/>
-          </a:solidFill>
-          <a:ln>
-            <a:noFill/>
-          </a:ln>
-        </p:spPr>
-        <p:style>
-          <a:lnRef idx="1">
-            <a:schemeClr val="accent1"/>
-          </a:lnRef>
-          <a:fillRef idx="3">
-            <a:schemeClr val="accent1"/>
-          </a:fillRef>
-          <a:effectRef idx="2">
-            <a:schemeClr val="accent1"/>
-          </a:effectRef>
-          <a:fontRef idx="minor">
-            <a:schemeClr val="lt1"/>
-          </a:fontRef>
-        </p:style>
-        <p:txBody>
-          <a:bodyPr rtlCol="0" anchor="ctr"/>
-          <a:lstStyle/>
-          <a:p>
-            <a:pPr algn="ctr"/>
-          </a:p>
-        </p:txBody>
-      </p:sp>
-      <p:sp>
-        <p:nvSpPr>
-          <p:cNvPr id="10" name="TextBox 9"/>
+              <a:t>15 Modul Bisnis RESTful Lengkap &amp; Terstandarisasi</a:t>
+            </a:r>
+          </a:p>
+        </p:txBody>
+      </p:sp>
+      <p:sp>
+        <p:nvSpPr>
+          <p:cNvPr id="6" name="TextBox 5"/>
           <p:cNvSpPr txBox="1"/>
           <p:nvPr/>
         </p:nvSpPr>
         <p:spPr>
           <a:xfrm>
-            <a:off x="960120" y="3154680"/>
-            <a:ext cx="10332720" cy="649224"/>
+            <a:off x="1097280" y="2468880"/>
+            <a:ext cx="9966960" cy="3291840"/>
           </a:xfrm>
           <a:prstGeom prst="rect">
             <a:avLst/>
@@ -7412,346 +5418,68 @@
           <a:noFill/>
         </p:spPr>
         <p:txBody>
-          <a:bodyPr wrap="square" lIns="0" tIns="0" rIns="0" bIns="0">
+          <a:bodyPr wrap="square">
             <a:spAutoFit/>
           </a:bodyPr>
           <a:lstStyle/>
           <a:p>
             <a:pPr>
               <a:spcAft>
-                <a:spcPts val="200"/>
+                <a:spcPts val="1400"/>
               </a:spcAft>
-              <a:defRPr sz="1400" b="1">
-                <a:solidFill>
-                  <a:srgbClr val="38BDF8"/>
+              <a:defRPr sz="1400">
+                <a:solidFill>
+                  <a:srgbClr val="E2E8F0"/>
                 </a:solidFill>
               </a:defRPr>
             </a:pPr>
             <a:r>
-              <a:t>RESTful Resource Routes</a:t>
-            </a:r>
-          </a:p>
-          <a:p>
-            <a:pPr>
-              <a:defRPr sz="1200">
-                <a:solidFill>
-                  <a:srgbClr val="F8FAFC"/>
-                </a:solidFill>
-              </a:defRPr>
-            </a:pPr>
-            <a:r>
-              <a:t>Standar HTTP: GET (index/show), POST (store), PUT (update), PATCH (status), DELETE (destroy).</a:t>
-            </a:r>
-          </a:p>
-        </p:txBody>
-      </p:sp>
-      <p:sp>
-        <p:nvSpPr>
-          <p:cNvPr id="11" name="Rounded Rectangle 10"/>
-          <p:cNvSpPr/>
-          <p:nvPr/>
-        </p:nvSpPr>
-        <p:spPr>
-          <a:xfrm>
-            <a:off x="731520" y="4078224"/>
-            <a:ext cx="10728655" cy="868680"/>
-          </a:xfrm>
-          <a:prstGeom prst="roundRect">
-            <a:avLst/>
-          </a:prstGeom>
-          <a:solidFill>
-            <a:srgbClr val="1E293B"/>
-          </a:solidFill>
-          <a:ln w="12700">
-            <a:solidFill>
-              <a:srgbClr val="334155"/>
-            </a:solidFill>
-          </a:ln>
-        </p:spPr>
-        <p:style>
-          <a:lnRef idx="1">
-            <a:schemeClr val="accent1"/>
-          </a:lnRef>
-          <a:fillRef idx="3">
-            <a:schemeClr val="accent1"/>
-          </a:fillRef>
-          <a:effectRef idx="2">
-            <a:schemeClr val="accent1"/>
-          </a:effectRef>
-          <a:fontRef idx="minor">
-            <a:schemeClr val="lt1"/>
-          </a:fontRef>
-        </p:style>
-        <p:txBody>
-          <a:bodyPr rtlCol="0" anchor="ctr"/>
-          <a:lstStyle/>
-          <a:p>
-            <a:pPr algn="ctr"/>
-          </a:p>
-        </p:txBody>
-      </p:sp>
-      <p:sp>
-        <p:nvSpPr>
-          <p:cNvPr id="12" name="Rectangle 11"/>
-          <p:cNvSpPr/>
-          <p:nvPr/>
-        </p:nvSpPr>
-        <p:spPr>
-          <a:xfrm>
-            <a:off x="731520" y="4078224"/>
-            <a:ext cx="73152" cy="868680"/>
-          </a:xfrm>
-          <a:prstGeom prst="rect">
-            <a:avLst/>
-          </a:prstGeom>
-          <a:solidFill>
-            <a:srgbClr val="38BDF8"/>
-          </a:solidFill>
-          <a:ln>
-            <a:noFill/>
-          </a:ln>
-        </p:spPr>
-        <p:style>
-          <a:lnRef idx="1">
-            <a:schemeClr val="accent1"/>
-          </a:lnRef>
-          <a:fillRef idx="3">
-            <a:schemeClr val="accent1"/>
-          </a:fillRef>
-          <a:effectRef idx="2">
-            <a:schemeClr val="accent1"/>
-          </a:effectRef>
-          <a:fontRef idx="minor">
-            <a:schemeClr val="lt1"/>
-          </a:fontRef>
-        </p:style>
-        <p:txBody>
-          <a:bodyPr rtlCol="0" anchor="ctr"/>
-          <a:lstStyle/>
-          <a:p>
-            <a:pPr algn="ctr"/>
-          </a:p>
-        </p:txBody>
-      </p:sp>
-      <p:sp>
-        <p:nvSpPr>
-          <p:cNvPr id="13" name="TextBox 12"/>
-          <p:cNvSpPr txBox="1"/>
-          <p:nvPr/>
-        </p:nvSpPr>
-        <p:spPr>
-          <a:xfrm>
-            <a:off x="960120" y="4187952"/>
-            <a:ext cx="10332720" cy="649224"/>
-          </a:xfrm>
-          <a:prstGeom prst="rect">
-            <a:avLst/>
-          </a:prstGeom>
-          <a:noFill/>
-        </p:spPr>
-        <p:txBody>
-          <a:bodyPr wrap="square" lIns="0" tIns="0" rIns="0" bIns="0">
-            <a:spAutoFit/>
-          </a:bodyPr>
-          <a:lstStyle/>
+              <a:t>•  Modul Master: Departemen, Karyawan, Proyek, Tujuan, Kebijakan Dinas, Vendor</a:t>
+            </a:r>
+          </a:p>
           <a:p>
             <a:pPr>
               <a:spcAft>
-                <a:spcPts val="200"/>
+                <a:spcPts val="1400"/>
               </a:spcAft>
-              <a:defRPr sz="1400" b="1">
-                <a:solidFill>
-                  <a:srgbClr val="38BDF8"/>
+              <a:defRPr sz="1400">
+                <a:solidFill>
+                  <a:srgbClr val="E2E8F0"/>
                 </a:solidFill>
               </a:defRPr>
             </a:pPr>
             <a:r>
-              <a:t>Workflow Endpoints</a:t>
-            </a:r>
-          </a:p>
-          <a:p>
-            <a:pPr>
-              <a:defRPr sz="1200">
-                <a:solidFill>
-                  <a:srgbClr val="F8FAFC"/>
-                </a:solidFill>
-              </a:defRPr>
-            </a:pPr>
-            <a:r>
-              <a:t>Rute aksi khusus: /pengajuan-perjalanan/{id}/status, /persetujuan/approve, /persetujuan/reject.</a:t>
-            </a:r>
-          </a:p>
-        </p:txBody>
-      </p:sp>
-      <p:sp>
-        <p:nvSpPr>
-          <p:cNvPr id="14" name="Rounded Rectangle 13"/>
-          <p:cNvSpPr/>
-          <p:nvPr/>
-        </p:nvSpPr>
-        <p:spPr>
-          <a:xfrm>
-            <a:off x="731520" y="5111496"/>
-            <a:ext cx="10728655" cy="868680"/>
-          </a:xfrm>
-          <a:prstGeom prst="roundRect">
-            <a:avLst/>
-          </a:prstGeom>
-          <a:solidFill>
-            <a:srgbClr val="1E293B"/>
-          </a:solidFill>
-          <a:ln w="12700">
-            <a:solidFill>
-              <a:srgbClr val="334155"/>
-            </a:solidFill>
-          </a:ln>
-        </p:spPr>
-        <p:style>
-          <a:lnRef idx="1">
-            <a:schemeClr val="accent1"/>
-          </a:lnRef>
-          <a:fillRef idx="3">
-            <a:schemeClr val="accent1"/>
-          </a:fillRef>
-          <a:effectRef idx="2">
-            <a:schemeClr val="accent1"/>
-          </a:effectRef>
-          <a:fontRef idx="minor">
-            <a:schemeClr val="lt1"/>
-          </a:fontRef>
-        </p:style>
-        <p:txBody>
-          <a:bodyPr rtlCol="0" anchor="ctr"/>
-          <a:lstStyle/>
-          <a:p>
-            <a:pPr algn="ctr"/>
-          </a:p>
-        </p:txBody>
-      </p:sp>
-      <p:sp>
-        <p:nvSpPr>
-          <p:cNvPr id="15" name="Rectangle 14"/>
-          <p:cNvSpPr/>
-          <p:nvPr/>
-        </p:nvSpPr>
-        <p:spPr>
-          <a:xfrm>
-            <a:off x="731520" y="5111496"/>
-            <a:ext cx="73152" cy="868680"/>
-          </a:xfrm>
-          <a:prstGeom prst="rect">
-            <a:avLst/>
-          </a:prstGeom>
-          <a:solidFill>
-            <a:srgbClr val="A78BFA"/>
-          </a:solidFill>
-          <a:ln>
-            <a:noFill/>
-          </a:ln>
-        </p:spPr>
-        <p:style>
-          <a:lnRef idx="1">
-            <a:schemeClr val="accent1"/>
-          </a:lnRef>
-          <a:fillRef idx="3">
-            <a:schemeClr val="accent1"/>
-          </a:fillRef>
-          <a:effectRef idx="2">
-            <a:schemeClr val="accent1"/>
-          </a:effectRef>
-          <a:fontRef idx="minor">
-            <a:schemeClr val="lt1"/>
-          </a:fontRef>
-        </p:style>
-        <p:txBody>
-          <a:bodyPr rtlCol="0" anchor="ctr"/>
-          <a:lstStyle/>
-          <a:p>
-            <a:pPr algn="ctr"/>
-          </a:p>
-        </p:txBody>
-      </p:sp>
-      <p:sp>
-        <p:nvSpPr>
-          <p:cNvPr id="16" name="TextBox 15"/>
-          <p:cNvSpPr txBox="1"/>
-          <p:nvPr/>
-        </p:nvSpPr>
-        <p:spPr>
-          <a:xfrm>
-            <a:off x="960120" y="5221224"/>
-            <a:ext cx="10332720" cy="649224"/>
-          </a:xfrm>
-          <a:prstGeom prst="rect">
-            <a:avLst/>
-          </a:prstGeom>
-          <a:noFill/>
-        </p:spPr>
-        <p:txBody>
-          <a:bodyPr wrap="square" lIns="0" tIns="0" rIns="0" bIns="0">
-            <a:spAutoFit/>
-          </a:bodyPr>
-          <a:lstStyle/>
+              <a:t>•  Modul Transaksi: Pengajuan Perjalanan Tugas, Itinerary, Booking Vendor, Pengeluaran Riil</a:t>
+            </a:r>
+          </a:p>
           <a:p>
             <a:pPr>
               <a:spcAft>
-                <a:spcPts val="200"/>
+                <a:spcPts val="1400"/>
               </a:spcAft>
-              <a:defRPr sz="1400" b="1">
-                <a:solidFill>
-                  <a:srgbClr val="38BDF8"/>
+              <a:defRPr sz="1400">
+                <a:solidFill>
+                  <a:srgbClr val="E2E8F0"/>
                 </a:solidFill>
               </a:defRPr>
             </a:pPr>
             <a:r>
-              <a:t>File Management</a:t>
+              <a:t>•  Modul Finansial: Pencairan Uang Muka, Klaim Reimbursement, dan Settlement Lebih/Kurang Bayar</a:t>
             </a:r>
           </a:p>
           <a:p>
             <a:pPr>
-              <a:defRPr sz="1200">
-                <a:solidFill>
-                  <a:srgbClr val="F8FAFC"/>
+              <a:spcAft>
+                <a:spcPts val="1400"/>
+              </a:spcAft>
+              <a:defRPr sz="1400">
+                <a:solidFill>
+                  <a:srgbClr val="E2E8F0"/>
                 </a:solidFill>
               </a:defRPr>
             </a:pPr>
             <a:r>
-              <a:t>Upload berkas bukti nota dan surat tugas (/api/bukti-struk, /api/dokumen-pendukung).</a:t>
-            </a:r>
-          </a:p>
-        </p:txBody>
-      </p:sp>
-      <p:sp>
-        <p:nvSpPr>
-          <p:cNvPr id="17" name="TextBox 16"/>
-          <p:cNvSpPr txBox="1"/>
-          <p:nvPr/>
-        </p:nvSpPr>
-        <p:spPr>
-          <a:xfrm>
-            <a:off x="731520" y="6309360"/>
-            <a:ext cx="10728655" cy="365760"/>
-          </a:xfrm>
-          <a:prstGeom prst="rect">
-            <a:avLst/>
-          </a:prstGeom>
-          <a:noFill/>
-        </p:spPr>
-        <p:txBody>
-          <a:bodyPr wrap="square" lIns="0" tIns="0" rIns="0" bIns="0">
-            <a:spAutoFit/>
-          </a:bodyPr>
-          <a:lstStyle/>
-          <a:p>
-            <a:pPr>
-              <a:defRPr sz="950">
-                <a:solidFill>
-                  <a:srgbClr val="94A3B8"/>
-                </a:solidFill>
-              </a:defRPr>
-            </a:pPr>
-            <a:r>
-              <a:t>PT Astronova Enterprise • Backend Architecture Review &amp; Live Database Audit • Laravel 13</a:t>
+              <a:t>•  Modul Analitik: Dashboard Stats, Ringkasan KPI, dan Laporan Filter Rentang Tanggal</a:t>
             </a:r>
           </a:p>
         </p:txBody>
@@ -7789,7 +5517,7 @@
             <a:avLst/>
           </a:prstGeom>
           <a:solidFill>
-            <a:srgbClr val="0B1120"/>
+            <a:srgbClr val="0F172A"/>
           </a:solidFill>
           <a:ln>
             <a:noFill/>
@@ -7819,23 +5547,25 @@
       </p:sp>
       <p:sp>
         <p:nvSpPr>
-          <p:cNvPr id="3" name="Rectangle 2"/>
+          <p:cNvPr id="3" name="Rounded Rectangle 2"/>
           <p:cNvSpPr/>
           <p:nvPr/>
         </p:nvSpPr>
         <p:spPr>
           <a:xfrm>
-            <a:off x="731520" y="548640"/>
-            <a:ext cx="73152" cy="1188720"/>
-          </a:xfrm>
-          <a:prstGeom prst="rect">
+            <a:off x="731520" y="731520"/>
+            <a:ext cx="10728655" cy="5394960"/>
+          </a:xfrm>
+          <a:prstGeom prst="roundRect">
             <a:avLst/>
           </a:prstGeom>
           <a:solidFill>
-            <a:srgbClr val="38BDF8"/>
+            <a:srgbClr val="1E293B"/>
           </a:solidFill>
           <a:ln>
-            <a:noFill/>
+            <a:solidFill>
+              <a:srgbClr val="334155"/>
+            </a:solidFill>
           </a:ln>
         </p:spPr>
         <p:style>
@@ -7868,8 +5598,8 @@
         </p:nvSpPr>
         <p:spPr>
           <a:xfrm>
-            <a:off x="960120" y="411480"/>
-            <a:ext cx="10241280" cy="1371600"/>
+            <a:off x="1097280" y="1005840"/>
+            <a:ext cx="9966960" cy="365760"/>
           </a:xfrm>
           <a:prstGeom prst="rect">
             <a:avLst/>
@@ -7877,7 +5607,7 @@
           <a:noFill/>
         </p:spPr>
         <p:txBody>
-          <a:bodyPr wrap="square" lIns="0" tIns="0" rIns="0" bIns="0">
+          <a:bodyPr wrap="none">
             <a:spAutoFit/>
           </a:bodyPr>
           <a:lstStyle/>
@@ -7885,141 +5615,26 @@
             <a:pPr>
               <a:defRPr sz="1100" b="1">
                 <a:solidFill>
-                  <a:srgbClr val="34D399"/>
+                  <a:srgbClr val="38BDF8"/>
                 </a:solidFill>
               </a:defRPr>
             </a:pPr>
             <a:r>
-              <a:t>SLIDE 5 • LOGIKA BISNIS &amp; PERSISTENSI</a:t>
-            </a:r>
-          </a:p>
-          <a:p>
-            <a:pPr>
-              <a:spcAft>
-                <a:spcPts val="400"/>
-              </a:spcAft>
-              <a:defRPr sz="2500" b="1">
-                <a:solidFill>
-                  <a:srgbClr val="F8FAFC"/>
-                </a:solidFill>
-              </a:defRPr>
-            </a:pPr>
-            <a:r>
-              <a:t>Implementasi CRUD Menggunakan Database</a:t>
-            </a:r>
-          </a:p>
-          <a:p>
-            <a:pPr>
-              <a:defRPr sz="1300">
-                <a:solidFill>
-                  <a:srgbClr val="94A3B8"/>
-                </a:solidFill>
-              </a:defRPr>
-            </a:pPr>
-            <a:r>
-              <a:t>Konsistensi Transaksi Atomik &amp; Perhitungan Otomatis</a:t>
-            </a:r>
-          </a:p>
-        </p:txBody>
-      </p:sp>
-      <p:sp>
-        <p:nvSpPr>
-          <p:cNvPr id="5" name="Rounded Rectangle 4"/>
-          <p:cNvSpPr/>
-          <p:nvPr/>
-        </p:nvSpPr>
-        <p:spPr>
-          <a:xfrm>
-            <a:off x="731520" y="2011680"/>
-            <a:ext cx="10728655" cy="868680"/>
-          </a:xfrm>
-          <a:prstGeom prst="roundRect">
-            <a:avLst/>
-          </a:prstGeom>
-          <a:solidFill>
-            <a:srgbClr val="1E293B"/>
-          </a:solidFill>
-          <a:ln w="12700">
-            <a:solidFill>
-              <a:srgbClr val="334155"/>
-            </a:solidFill>
-          </a:ln>
-        </p:spPr>
-        <p:style>
-          <a:lnRef idx="1">
-            <a:schemeClr val="accent1"/>
-          </a:lnRef>
-          <a:fillRef idx="3">
-            <a:schemeClr val="accent1"/>
-          </a:fillRef>
-          <a:effectRef idx="2">
-            <a:schemeClr val="accent1"/>
-          </a:effectRef>
-          <a:fontRef idx="minor">
-            <a:schemeClr val="lt1"/>
-          </a:fontRef>
-        </p:style>
-        <p:txBody>
-          <a:bodyPr rtlCol="0" anchor="ctr"/>
-          <a:lstStyle/>
-          <a:p>
-            <a:pPr algn="ctr"/>
-          </a:p>
-        </p:txBody>
-      </p:sp>
-      <p:sp>
-        <p:nvSpPr>
-          <p:cNvPr id="6" name="Rectangle 5"/>
-          <p:cNvSpPr/>
-          <p:nvPr/>
-        </p:nvSpPr>
-        <p:spPr>
-          <a:xfrm>
-            <a:off x="731520" y="2011680"/>
-            <a:ext cx="73152" cy="868680"/>
-          </a:xfrm>
-          <a:prstGeom prst="rect">
-            <a:avLst/>
-          </a:prstGeom>
-          <a:solidFill>
-            <a:srgbClr val="38BDF8"/>
-          </a:solidFill>
-          <a:ln>
-            <a:noFill/>
-          </a:ln>
-        </p:spPr>
-        <p:style>
-          <a:lnRef idx="1">
-            <a:schemeClr val="accent1"/>
-          </a:lnRef>
-          <a:fillRef idx="3">
-            <a:schemeClr val="accent1"/>
-          </a:fillRef>
-          <a:effectRef idx="2">
-            <a:schemeClr val="accent1"/>
-          </a:effectRef>
-          <a:fontRef idx="minor">
-            <a:schemeClr val="lt1"/>
-          </a:fontRef>
-        </p:style>
-        <p:txBody>
-          <a:bodyPr rtlCol="0" anchor="ctr"/>
-          <a:lstStyle/>
-          <a:p>
-            <a:pPr algn="ctr"/>
-          </a:p>
-        </p:txBody>
-      </p:sp>
-      <p:sp>
-        <p:nvSpPr>
-          <p:cNvPr id="7" name="TextBox 6"/>
+              <a:t>SLIDE 5 / 10 • ASTRONOVA BACKEND</a:t>
+            </a:r>
+          </a:p>
+        </p:txBody>
+      </p:sp>
+      <p:sp>
+        <p:nvSpPr>
+          <p:cNvPr id="5" name="TextBox 4"/>
           <p:cNvSpPr txBox="1"/>
           <p:nvPr/>
         </p:nvSpPr>
         <p:spPr>
           <a:xfrm>
-            <a:off x="960120" y="2121408"/>
-            <a:ext cx="10332720" cy="649224"/>
+            <a:off x="1097280" y="1280160"/>
+            <a:ext cx="9966960" cy="1005840"/>
           </a:xfrm>
           <a:prstGeom prst="rect">
             <a:avLst/>
@@ -8027,137 +5642,46 @@
           <a:noFill/>
         </p:spPr>
         <p:txBody>
-          <a:bodyPr wrap="square" lIns="0" tIns="0" rIns="0" bIns="0">
+          <a:bodyPr wrap="square">
             <a:spAutoFit/>
           </a:bodyPr>
           <a:lstStyle/>
           <a:p>
             <a:pPr>
-              <a:spcAft>
-                <a:spcPts val="200"/>
-              </a:spcAft>
-              <a:defRPr sz="1400" b="1">
-                <a:solidFill>
-                  <a:srgbClr val="38BDF8"/>
+              <a:defRPr sz="2400" b="1">
+                <a:solidFill>
+                  <a:srgbClr val="FFFFFF"/>
                 </a:solidFill>
               </a:defRPr>
             </a:pPr>
             <a:r>
-              <a:t>Database Transaction</a:t>
+              <a:t>Alur Data: Dari Permintaan Klien Hingga Database</a:t>
             </a:r>
           </a:p>
           <a:p>
             <a:pPr>
-              <a:defRPr sz="1200">
-                <a:solidFill>
-                  <a:srgbClr val="F8FAFC"/>
+              <a:defRPr sz="1400">
+                <a:solidFill>
+                  <a:srgbClr val="34D399"/>
                 </a:solidFill>
               </a:defRPr>
             </a:pPr>
             <a:r>
-              <a:t>DB::transaction() menjamin header dan detail item tersimpan utuh atau dibatalkan bersama.</a:t>
-            </a:r>
-          </a:p>
-        </p:txBody>
-      </p:sp>
-      <p:sp>
-        <p:nvSpPr>
-          <p:cNvPr id="8" name="Rounded Rectangle 7"/>
-          <p:cNvSpPr/>
-          <p:nvPr/>
-        </p:nvSpPr>
-        <p:spPr>
-          <a:xfrm>
-            <a:off x="731520" y="3044952"/>
-            <a:ext cx="10728655" cy="868680"/>
-          </a:xfrm>
-          <a:prstGeom prst="roundRect">
-            <a:avLst/>
-          </a:prstGeom>
-          <a:solidFill>
-            <a:srgbClr val="1E293B"/>
-          </a:solidFill>
-          <a:ln w="12700">
-            <a:solidFill>
-              <a:srgbClr val="334155"/>
-            </a:solidFill>
-          </a:ln>
-        </p:spPr>
-        <p:style>
-          <a:lnRef idx="1">
-            <a:schemeClr val="accent1"/>
-          </a:lnRef>
-          <a:fillRef idx="3">
-            <a:schemeClr val="accent1"/>
-          </a:fillRef>
-          <a:effectRef idx="2">
-            <a:schemeClr val="accent1"/>
-          </a:effectRef>
-          <a:fontRef idx="minor">
-            <a:schemeClr val="lt1"/>
-          </a:fontRef>
-        </p:style>
-        <p:txBody>
-          <a:bodyPr rtlCol="0" anchor="ctr"/>
-          <a:lstStyle/>
-          <a:p>
-            <a:pPr algn="ctr"/>
-          </a:p>
-        </p:txBody>
-      </p:sp>
-      <p:sp>
-        <p:nvSpPr>
-          <p:cNvPr id="9" name="Rectangle 8"/>
-          <p:cNvSpPr/>
-          <p:nvPr/>
-        </p:nvSpPr>
-        <p:spPr>
-          <a:xfrm>
-            <a:off x="731520" y="3044952"/>
-            <a:ext cx="73152" cy="868680"/>
-          </a:xfrm>
-          <a:prstGeom prst="rect">
-            <a:avLst/>
-          </a:prstGeom>
-          <a:solidFill>
-            <a:srgbClr val="A78BFA"/>
-          </a:solidFill>
-          <a:ln>
-            <a:noFill/>
-          </a:ln>
-        </p:spPr>
-        <p:style>
-          <a:lnRef idx="1">
-            <a:schemeClr val="accent1"/>
-          </a:lnRef>
-          <a:fillRef idx="3">
-            <a:schemeClr val="accent1"/>
-          </a:fillRef>
-          <a:effectRef idx="2">
-            <a:schemeClr val="accent1"/>
-          </a:effectRef>
-          <a:fontRef idx="minor">
-            <a:schemeClr val="lt1"/>
-          </a:fontRef>
-        </p:style>
-        <p:txBody>
-          <a:bodyPr rtlCol="0" anchor="ctr"/>
-          <a:lstStyle/>
-          <a:p>
-            <a:pPr algn="ctr"/>
-          </a:p>
-        </p:txBody>
-      </p:sp>
-      <p:sp>
-        <p:nvSpPr>
-          <p:cNvPr id="10" name="TextBox 9"/>
+              <a:t>Siklus Hidup Permintaan HTTP Request yang Aman</a:t>
+            </a:r>
+          </a:p>
+        </p:txBody>
+      </p:sp>
+      <p:sp>
+        <p:nvSpPr>
+          <p:cNvPr id="6" name="TextBox 5"/>
           <p:cNvSpPr txBox="1"/>
           <p:nvPr/>
         </p:nvSpPr>
         <p:spPr>
           <a:xfrm>
-            <a:off x="960120" y="3154680"/>
-            <a:ext cx="10332720" cy="649224"/>
+            <a:off x="1097280" y="2468880"/>
+            <a:ext cx="9966960" cy="3291840"/>
           </a:xfrm>
           <a:prstGeom prst="rect">
             <a:avLst/>
@@ -8165,346 +5689,83 @@
           <a:noFill/>
         </p:spPr>
         <p:txBody>
-          <a:bodyPr wrap="square" lIns="0" tIns="0" rIns="0" bIns="0">
+          <a:bodyPr wrap="square">
             <a:spAutoFit/>
           </a:bodyPr>
           <a:lstStyle/>
           <a:p>
             <a:pPr>
               <a:spcAft>
-                <a:spcPts val="200"/>
+                <a:spcPts val="1400"/>
               </a:spcAft>
-              <a:defRPr sz="1400" b="1">
-                <a:solidFill>
-                  <a:srgbClr val="38BDF8"/>
+              <a:defRPr sz="1400">
+                <a:solidFill>
+                  <a:srgbClr val="E2E8F0"/>
                 </a:solidFill>
               </a:defRPr>
             </a:pPr>
             <a:r>
-              <a:t>Auto-Numbering Dinamis</a:t>
-            </a:r>
-          </a:p>
-          <a:p>
-            <a:pPr>
-              <a:defRPr sz="1200">
-                <a:solidFill>
-                  <a:srgbClr val="F8FAFC"/>
-                </a:solidFill>
-              </a:defRPr>
-            </a:pPr>
-            <a:r>
-              <a:t>Nomor TRV/YYYYMM/0001 &amp; RMB/YYYYMM/0001 dihitung dinamis dari urutan record terakhir bulan ini.</a:t>
-            </a:r>
-          </a:p>
-        </p:txBody>
-      </p:sp>
-      <p:sp>
-        <p:nvSpPr>
-          <p:cNvPr id="11" name="Rounded Rectangle 10"/>
-          <p:cNvSpPr/>
-          <p:nvPr/>
-        </p:nvSpPr>
-        <p:spPr>
-          <a:xfrm>
-            <a:off x="731520" y="4078224"/>
-            <a:ext cx="10728655" cy="868680"/>
-          </a:xfrm>
-          <a:prstGeom prst="roundRect">
-            <a:avLst/>
-          </a:prstGeom>
-          <a:solidFill>
-            <a:srgbClr val="1E293B"/>
-          </a:solidFill>
-          <a:ln w="12700">
-            <a:solidFill>
-              <a:srgbClr val="334155"/>
-            </a:solidFill>
-          </a:ln>
-        </p:spPr>
-        <p:style>
-          <a:lnRef idx="1">
-            <a:schemeClr val="accent1"/>
-          </a:lnRef>
-          <a:fillRef idx="3">
-            <a:schemeClr val="accent1"/>
-          </a:fillRef>
-          <a:effectRef idx="2">
-            <a:schemeClr val="accent1"/>
-          </a:effectRef>
-          <a:fontRef idx="minor">
-            <a:schemeClr val="lt1"/>
-          </a:fontRef>
-        </p:style>
-        <p:txBody>
-          <a:bodyPr rtlCol="0" anchor="ctr"/>
-          <a:lstStyle/>
-          <a:p>
-            <a:pPr algn="ctr"/>
-          </a:p>
-        </p:txBody>
-      </p:sp>
-      <p:sp>
-        <p:nvSpPr>
-          <p:cNvPr id="12" name="Rectangle 11"/>
-          <p:cNvSpPr/>
-          <p:nvPr/>
-        </p:nvSpPr>
-        <p:spPr>
-          <a:xfrm>
-            <a:off x="731520" y="4078224"/>
-            <a:ext cx="73152" cy="868680"/>
-          </a:xfrm>
-          <a:prstGeom prst="rect">
-            <a:avLst/>
-          </a:prstGeom>
-          <a:solidFill>
-            <a:srgbClr val="38BDF8"/>
-          </a:solidFill>
-          <a:ln>
-            <a:noFill/>
-          </a:ln>
-        </p:spPr>
-        <p:style>
-          <a:lnRef idx="1">
-            <a:schemeClr val="accent1"/>
-          </a:lnRef>
-          <a:fillRef idx="3">
-            <a:schemeClr val="accent1"/>
-          </a:fillRef>
-          <a:effectRef idx="2">
-            <a:schemeClr val="accent1"/>
-          </a:effectRef>
-          <a:fontRef idx="minor">
-            <a:schemeClr val="lt1"/>
-          </a:fontRef>
-        </p:style>
-        <p:txBody>
-          <a:bodyPr rtlCol="0" anchor="ctr"/>
-          <a:lstStyle/>
-          <a:p>
-            <a:pPr algn="ctr"/>
-          </a:p>
-        </p:txBody>
-      </p:sp>
-      <p:sp>
-        <p:nvSpPr>
-          <p:cNvPr id="13" name="TextBox 12"/>
-          <p:cNvSpPr txBox="1"/>
-          <p:nvPr/>
-        </p:nvSpPr>
-        <p:spPr>
-          <a:xfrm>
-            <a:off x="960120" y="4187952"/>
-            <a:ext cx="10332720" cy="649224"/>
-          </a:xfrm>
-          <a:prstGeom prst="rect">
-            <a:avLst/>
-          </a:prstGeom>
-          <a:noFill/>
-        </p:spPr>
-        <p:txBody>
-          <a:bodyPr wrap="square" lIns="0" tIns="0" rIns="0" bIns="0">
-            <a:spAutoFit/>
-          </a:bodyPr>
-          <a:lstStyle/>
+              <a:t>•  1. Request Klien: Mengirim HTTP Request dengan header Authorization: Bearer &lt;token&gt;</a:t>
+            </a:r>
+          </a:p>
           <a:p>
             <a:pPr>
               <a:spcAft>
-                <a:spcPts val="200"/>
+                <a:spcPts val="1400"/>
               </a:spcAft>
-              <a:defRPr sz="1400" b="1">
-                <a:solidFill>
-                  <a:srgbClr val="38BDF8"/>
+              <a:defRPr sz="1400">
+                <a:solidFill>
+                  <a:srgbClr val="E2E8F0"/>
                 </a:solidFill>
               </a:defRPr>
             </a:pPr>
             <a:r>
-              <a:t>Kalkulasi Keuangan Otomatis</a:t>
-            </a:r>
-          </a:p>
-          <a:p>
-            <a:pPr>
-              <a:defRPr sz="1200">
-                <a:solidFill>
-                  <a:srgbClr val="F8FAFC"/>
-                </a:solidFill>
-              </a:defRPr>
-            </a:pPr>
-            <a:r>
-              <a:t>Selisih = Total Pengeluaran - Uang Muka. Menghasilkan status kurang_bayar, lebih_bayar, atau nihil.</a:t>
-            </a:r>
-          </a:p>
-        </p:txBody>
-      </p:sp>
-      <p:sp>
-        <p:nvSpPr>
-          <p:cNvPr id="14" name="Rounded Rectangle 13"/>
-          <p:cNvSpPr/>
-          <p:nvPr/>
-        </p:nvSpPr>
-        <p:spPr>
-          <a:xfrm>
-            <a:off x="731520" y="5111496"/>
-            <a:ext cx="10728655" cy="868680"/>
-          </a:xfrm>
-          <a:prstGeom prst="roundRect">
-            <a:avLst/>
-          </a:prstGeom>
-          <a:solidFill>
-            <a:srgbClr val="1E293B"/>
-          </a:solidFill>
-          <a:ln w="12700">
-            <a:solidFill>
-              <a:srgbClr val="334155"/>
-            </a:solidFill>
-          </a:ln>
-        </p:spPr>
-        <p:style>
-          <a:lnRef idx="1">
-            <a:schemeClr val="accent1"/>
-          </a:lnRef>
-          <a:fillRef idx="3">
-            <a:schemeClr val="accent1"/>
-          </a:fillRef>
-          <a:effectRef idx="2">
-            <a:schemeClr val="accent1"/>
-          </a:effectRef>
-          <a:fontRef idx="minor">
-            <a:schemeClr val="lt1"/>
-          </a:fontRef>
-        </p:style>
-        <p:txBody>
-          <a:bodyPr rtlCol="0" anchor="ctr"/>
-          <a:lstStyle/>
-          <a:p>
-            <a:pPr algn="ctr"/>
-          </a:p>
-        </p:txBody>
-      </p:sp>
-      <p:sp>
-        <p:nvSpPr>
-          <p:cNvPr id="15" name="Rectangle 14"/>
-          <p:cNvSpPr/>
-          <p:nvPr/>
-        </p:nvSpPr>
-        <p:spPr>
-          <a:xfrm>
-            <a:off x="731520" y="5111496"/>
-            <a:ext cx="73152" cy="868680"/>
-          </a:xfrm>
-          <a:prstGeom prst="rect">
-            <a:avLst/>
-          </a:prstGeom>
-          <a:solidFill>
-            <a:srgbClr val="A78BFA"/>
-          </a:solidFill>
-          <a:ln>
-            <a:noFill/>
-          </a:ln>
-        </p:spPr>
-        <p:style>
-          <a:lnRef idx="1">
-            <a:schemeClr val="accent1"/>
-          </a:lnRef>
-          <a:fillRef idx="3">
-            <a:schemeClr val="accent1"/>
-          </a:fillRef>
-          <a:effectRef idx="2">
-            <a:schemeClr val="accent1"/>
-          </a:effectRef>
-          <a:fontRef idx="minor">
-            <a:schemeClr val="lt1"/>
-          </a:fontRef>
-        </p:style>
-        <p:txBody>
-          <a:bodyPr rtlCol="0" anchor="ctr"/>
-          <a:lstStyle/>
-          <a:p>
-            <a:pPr algn="ctr"/>
-          </a:p>
-        </p:txBody>
-      </p:sp>
-      <p:sp>
-        <p:nvSpPr>
-          <p:cNvPr id="16" name="TextBox 15"/>
-          <p:cNvSpPr txBox="1"/>
-          <p:nvPr/>
-        </p:nvSpPr>
-        <p:spPr>
-          <a:xfrm>
-            <a:off x="960120" y="5221224"/>
-            <a:ext cx="10332720" cy="649224"/>
-          </a:xfrm>
-          <a:prstGeom prst="rect">
-            <a:avLst/>
-          </a:prstGeom>
-          <a:noFill/>
-        </p:spPr>
-        <p:txBody>
-          <a:bodyPr wrap="square" lIns="0" tIns="0" rIns="0" bIns="0">
-            <a:spAutoFit/>
-          </a:bodyPr>
-          <a:lstStyle/>
+              <a:t>•  2. Routing &amp; Middleware: Memverifikasi validitas token Sanctum dan status aktif pengguna</a:t>
+            </a:r>
+          </a:p>
           <a:p>
             <a:pPr>
               <a:spcAft>
-                <a:spcPts val="200"/>
+                <a:spcPts val="1400"/>
               </a:spcAft>
-              <a:defRPr sz="1400" b="1">
-                <a:solidFill>
-                  <a:srgbClr val="38BDF8"/>
+              <a:defRPr sz="1400">
+                <a:solidFill>
+                  <a:srgbClr val="E2E8F0"/>
                 </a:solidFill>
               </a:defRPr>
             </a:pPr>
             <a:r>
-              <a:t>Eager Loading Efisien</a:t>
+              <a:t>•  3. Form Request: Melakukan validasi tipe data, format tanggal, dan batas maksimal biaya</a:t>
             </a:r>
           </a:p>
           <a:p>
             <a:pPr>
-              <a:defRPr sz="1200">
-                <a:solidFill>
-                  <a:srgbClr val="F8FAFC"/>
+              <a:spcAft>
+                <a:spcPts val="1400"/>
+              </a:spcAft>
+              <a:defRPr sz="1400">
+                <a:solidFill>
+                  <a:srgbClr val="E2E8F0"/>
                 </a:solidFill>
               </a:defRPr>
             </a:pPr>
             <a:r>
-              <a:t>Query mengikutsertakan with(['karyawan', 'tujuan', 'details']) untuk mencegah N+1 query problem.</a:t>
-            </a:r>
-          </a:p>
-        </p:txBody>
-      </p:sp>
-      <p:sp>
-        <p:nvSpPr>
-          <p:cNvPr id="17" name="TextBox 16"/>
-          <p:cNvSpPr txBox="1"/>
-          <p:nvPr/>
-        </p:nvSpPr>
-        <p:spPr>
-          <a:xfrm>
-            <a:off x="731520" y="6309360"/>
-            <a:ext cx="10728655" cy="365760"/>
-          </a:xfrm>
-          <a:prstGeom prst="rect">
-            <a:avLst/>
-          </a:prstGeom>
-          <a:noFill/>
-        </p:spPr>
-        <p:txBody>
-          <a:bodyPr wrap="square" lIns="0" tIns="0" rIns="0" bIns="0">
-            <a:spAutoFit/>
-          </a:bodyPr>
-          <a:lstStyle/>
+              <a:t>•  4. Controller &amp; DB: Memproses transaksi database atomic (DB::transaction)</a:t>
+            </a:r>
+          </a:p>
           <a:p>
             <a:pPr>
-              <a:defRPr sz="950">
-                <a:solidFill>
-                  <a:srgbClr val="94A3B8"/>
+              <a:spcAft>
+                <a:spcPts val="1400"/>
+              </a:spcAft>
+              <a:defRPr sz="1400">
+                <a:solidFill>
+                  <a:srgbClr val="E2E8F0"/>
                 </a:solidFill>
               </a:defRPr>
             </a:pPr>
             <a:r>
-              <a:t>PT Astronova Enterprise • Backend Architecture Review &amp; Live Database Audit • Laravel 13</a:t>
+              <a:t>•  5. API Resource: Mengembalikan respon JSON terformat rapi tanpa mengekspos kolom sensitif</a:t>
             </a:r>
           </a:p>
         </p:txBody>
@@ -8542,7 +5803,7 @@
             <a:avLst/>
           </a:prstGeom>
           <a:solidFill>
-            <a:srgbClr val="0B1120"/>
+            <a:srgbClr val="0F172A"/>
           </a:solidFill>
           <a:ln>
             <a:noFill/>
@@ -8572,23 +5833,25 @@
       </p:sp>
       <p:sp>
         <p:nvSpPr>
-          <p:cNvPr id="3" name="Rectangle 2"/>
+          <p:cNvPr id="3" name="Rounded Rectangle 2"/>
           <p:cNvSpPr/>
           <p:nvPr/>
         </p:nvSpPr>
         <p:spPr>
           <a:xfrm>
-            <a:off x="731520" y="548640"/>
-            <a:ext cx="73152" cy="1188720"/>
-          </a:xfrm>
-          <a:prstGeom prst="rect">
+            <a:off x="731520" y="731520"/>
+            <a:ext cx="10728655" cy="5394960"/>
+          </a:xfrm>
+          <a:prstGeom prst="roundRect">
             <a:avLst/>
           </a:prstGeom>
           <a:solidFill>
-            <a:srgbClr val="38BDF8"/>
+            <a:srgbClr val="1E293B"/>
           </a:solidFill>
           <a:ln>
-            <a:noFill/>
+            <a:solidFill>
+              <a:srgbClr val="334155"/>
+            </a:solidFill>
           </a:ln>
         </p:spPr>
         <p:style>
@@ -8621,8 +5884,8 @@
         </p:nvSpPr>
         <p:spPr>
           <a:xfrm>
-            <a:off x="960120" y="411480"/>
-            <a:ext cx="10241280" cy="1371600"/>
+            <a:off x="1097280" y="1005840"/>
+            <a:ext cx="9966960" cy="365760"/>
           </a:xfrm>
           <a:prstGeom prst="rect">
             <a:avLst/>
@@ -8630,7 +5893,7 @@
           <a:noFill/>
         </p:spPr>
         <p:txBody>
-          <a:bodyPr wrap="square" lIns="0" tIns="0" rIns="0" bIns="0">
+          <a:bodyPr wrap="none">
             <a:spAutoFit/>
           </a:bodyPr>
           <a:lstStyle/>
@@ -8638,141 +5901,26 @@
             <a:pPr>
               <a:defRPr sz="1100" b="1">
                 <a:solidFill>
-                  <a:srgbClr val="34D399"/>
+                  <a:srgbClr val="38BDF8"/>
                 </a:solidFill>
               </a:defRPr>
             </a:pPr>
             <a:r>
-              <a:t>SLIDE 6 • VALIDASI &amp; ERROR HANDLING</a:t>
-            </a:r>
-          </a:p>
-          <a:p>
-            <a:pPr>
-              <a:spcAft>
-                <a:spcPts val="400"/>
-              </a:spcAft>
-              <a:defRPr sz="2500" b="1">
-                <a:solidFill>
-                  <a:srgbClr val="F8FAFC"/>
-                </a:solidFill>
-              </a:defRPr>
-            </a:pPr>
-            <a:r>
-              <a:t>Proses Validasi &amp; Penanganan Error</a:t>
-            </a:r>
-          </a:p>
-          <a:p>
-            <a:pPr>
-              <a:defRPr sz="1300">
-                <a:solidFill>
-                  <a:srgbClr val="94A3B8"/>
-                </a:solidFill>
-              </a:defRPr>
-            </a:pPr>
-            <a:r>
-              <a:t>Keandalan Input &amp; Proteksi Status Alur Kerja</a:t>
-            </a:r>
-          </a:p>
-        </p:txBody>
-      </p:sp>
-      <p:sp>
-        <p:nvSpPr>
-          <p:cNvPr id="5" name="Rounded Rectangle 4"/>
-          <p:cNvSpPr/>
-          <p:nvPr/>
-        </p:nvSpPr>
-        <p:spPr>
-          <a:xfrm>
-            <a:off x="731520" y="2011680"/>
-            <a:ext cx="10728655" cy="868680"/>
-          </a:xfrm>
-          <a:prstGeom prst="roundRect">
-            <a:avLst/>
-          </a:prstGeom>
-          <a:solidFill>
-            <a:srgbClr val="1E293B"/>
-          </a:solidFill>
-          <a:ln w="12700">
-            <a:solidFill>
-              <a:srgbClr val="334155"/>
-            </a:solidFill>
-          </a:ln>
-        </p:spPr>
-        <p:style>
-          <a:lnRef idx="1">
-            <a:schemeClr val="accent1"/>
-          </a:lnRef>
-          <a:fillRef idx="3">
-            <a:schemeClr val="accent1"/>
-          </a:fillRef>
-          <a:effectRef idx="2">
-            <a:schemeClr val="accent1"/>
-          </a:effectRef>
-          <a:fontRef idx="minor">
-            <a:schemeClr val="lt1"/>
-          </a:fontRef>
-        </p:style>
-        <p:txBody>
-          <a:bodyPr rtlCol="0" anchor="ctr"/>
-          <a:lstStyle/>
-          <a:p>
-            <a:pPr algn="ctr"/>
-          </a:p>
-        </p:txBody>
-      </p:sp>
-      <p:sp>
-        <p:nvSpPr>
-          <p:cNvPr id="6" name="Rectangle 5"/>
-          <p:cNvSpPr/>
-          <p:nvPr/>
-        </p:nvSpPr>
-        <p:spPr>
-          <a:xfrm>
-            <a:off x="731520" y="2011680"/>
-            <a:ext cx="73152" cy="868680"/>
-          </a:xfrm>
-          <a:prstGeom prst="rect">
-            <a:avLst/>
-          </a:prstGeom>
-          <a:solidFill>
-            <a:srgbClr val="38BDF8"/>
-          </a:solidFill>
-          <a:ln>
-            <a:noFill/>
-          </a:ln>
-        </p:spPr>
-        <p:style>
-          <a:lnRef idx="1">
-            <a:schemeClr val="accent1"/>
-          </a:lnRef>
-          <a:fillRef idx="3">
-            <a:schemeClr val="accent1"/>
-          </a:fillRef>
-          <a:effectRef idx="2">
-            <a:schemeClr val="accent1"/>
-          </a:effectRef>
-          <a:fontRef idx="minor">
-            <a:schemeClr val="lt1"/>
-          </a:fontRef>
-        </p:style>
-        <p:txBody>
-          <a:bodyPr rtlCol="0" anchor="ctr"/>
-          <a:lstStyle/>
-          <a:p>
-            <a:pPr algn="ctr"/>
-          </a:p>
-        </p:txBody>
-      </p:sp>
-      <p:sp>
-        <p:nvSpPr>
-          <p:cNvPr id="7" name="TextBox 6"/>
+              <a:t>SLIDE 6 / 10 • ASTRONOVA BACKEND</a:t>
+            </a:r>
+          </a:p>
+        </p:txBody>
+      </p:sp>
+      <p:sp>
+        <p:nvSpPr>
+          <p:cNvPr id="5" name="TextBox 4"/>
           <p:cNvSpPr txBox="1"/>
           <p:nvPr/>
         </p:nvSpPr>
         <p:spPr>
           <a:xfrm>
-            <a:off x="960120" y="2121408"/>
-            <a:ext cx="10332720" cy="649224"/>
+            <a:off x="1097280" y="1280160"/>
+            <a:ext cx="9966960" cy="1005840"/>
           </a:xfrm>
           <a:prstGeom prst="rect">
             <a:avLst/>
@@ -8780,137 +5928,46 @@
           <a:noFill/>
         </p:spPr>
         <p:txBody>
-          <a:bodyPr wrap="square" lIns="0" tIns="0" rIns="0" bIns="0">
+          <a:bodyPr wrap="square">
             <a:spAutoFit/>
           </a:bodyPr>
           <a:lstStyle/>
           <a:p>
             <a:pPr>
-              <a:spcAft>
-                <a:spcPts val="200"/>
-              </a:spcAft>
-              <a:defRPr sz="1400" b="1">
-                <a:solidFill>
-                  <a:srgbClr val="38BDF8"/>
+              <a:defRPr sz="2400" b="1">
+                <a:solidFill>
+                  <a:srgbClr val="FFFFFF"/>
                 </a:solidFill>
               </a:defRPr>
             </a:pPr>
             <a:r>
-              <a:t>BaseFormRequest (HTTP 422)</a:t>
+              <a:t>Keamanan &amp; Autentikasi: Sanctum + RBAC</a:t>
             </a:r>
           </a:p>
           <a:p>
             <a:pPr>
-              <a:defRPr sz="1200">
-                <a:solidFill>
-                  <a:srgbClr val="F8FAFC"/>
+              <a:defRPr sz="1400">
+                <a:solidFill>
+                  <a:srgbClr val="34D399"/>
                 </a:solidFill>
               </a:defRPr>
             </a:pPr>
             <a:r>
-              <a:t>Validasi terisolasi: format email unik, rentang tanggal, limit ukuran file, &amp; foreign key exists.</a:t>
-            </a:r>
-          </a:p>
-        </p:txBody>
-      </p:sp>
-      <p:sp>
-        <p:nvSpPr>
-          <p:cNvPr id="8" name="Rounded Rectangle 7"/>
-          <p:cNvSpPr/>
-          <p:nvPr/>
-        </p:nvSpPr>
-        <p:spPr>
-          <a:xfrm>
-            <a:off x="731520" y="3044952"/>
-            <a:ext cx="10728655" cy="868680"/>
-          </a:xfrm>
-          <a:prstGeom prst="roundRect">
-            <a:avLst/>
-          </a:prstGeom>
-          <a:solidFill>
-            <a:srgbClr val="1E293B"/>
-          </a:solidFill>
-          <a:ln w="12700">
-            <a:solidFill>
-              <a:srgbClr val="334155"/>
-            </a:solidFill>
-          </a:ln>
-        </p:spPr>
-        <p:style>
-          <a:lnRef idx="1">
-            <a:schemeClr val="accent1"/>
-          </a:lnRef>
-          <a:fillRef idx="3">
-            <a:schemeClr val="accent1"/>
-          </a:fillRef>
-          <a:effectRef idx="2">
-            <a:schemeClr val="accent1"/>
-          </a:effectRef>
-          <a:fontRef idx="minor">
-            <a:schemeClr val="lt1"/>
-          </a:fontRef>
-        </p:style>
-        <p:txBody>
-          <a:bodyPr rtlCol="0" anchor="ctr"/>
-          <a:lstStyle/>
-          <a:p>
-            <a:pPr algn="ctr"/>
-          </a:p>
-        </p:txBody>
-      </p:sp>
-      <p:sp>
-        <p:nvSpPr>
-          <p:cNvPr id="9" name="Rectangle 8"/>
-          <p:cNvSpPr/>
-          <p:nvPr/>
-        </p:nvSpPr>
-        <p:spPr>
-          <a:xfrm>
-            <a:off x="731520" y="3044952"/>
-            <a:ext cx="73152" cy="868680"/>
-          </a:xfrm>
-          <a:prstGeom prst="rect">
-            <a:avLst/>
-          </a:prstGeom>
-          <a:solidFill>
-            <a:srgbClr val="A78BFA"/>
-          </a:solidFill>
-          <a:ln>
-            <a:noFill/>
-          </a:ln>
-        </p:spPr>
-        <p:style>
-          <a:lnRef idx="1">
-            <a:schemeClr val="accent1"/>
-          </a:lnRef>
-          <a:fillRef idx="3">
-            <a:schemeClr val="accent1"/>
-          </a:fillRef>
-          <a:effectRef idx="2">
-            <a:schemeClr val="accent1"/>
-          </a:effectRef>
-          <a:fontRef idx="minor">
-            <a:schemeClr val="lt1"/>
-          </a:fontRef>
-        </p:style>
-        <p:txBody>
-          <a:bodyPr rtlCol="0" anchor="ctr"/>
-          <a:lstStyle/>
-          <a:p>
-            <a:pPr algn="ctr"/>
-          </a:p>
-        </p:txBody>
-      </p:sp>
-      <p:sp>
-        <p:nvSpPr>
-          <p:cNvPr id="10" name="TextBox 9"/>
+              <a:t>Perlindungan Menyeluruh dari Ancaman Keamanan</a:t>
+            </a:r>
+          </a:p>
+        </p:txBody>
+      </p:sp>
+      <p:sp>
+        <p:nvSpPr>
+          <p:cNvPr id="6" name="TextBox 5"/>
           <p:cNvSpPr txBox="1"/>
           <p:nvPr/>
         </p:nvSpPr>
         <p:spPr>
           <a:xfrm>
-            <a:off x="960120" y="3154680"/>
-            <a:ext cx="10332720" cy="649224"/>
+            <a:off x="1097280" y="2468880"/>
+            <a:ext cx="9966960" cy="3291840"/>
           </a:xfrm>
           <a:prstGeom prst="rect">
             <a:avLst/>
@@ -8918,346 +5975,68 @@
           <a:noFill/>
         </p:spPr>
         <p:txBody>
-          <a:bodyPr wrap="square" lIns="0" tIns="0" rIns="0" bIns="0">
+          <a:bodyPr wrap="square">
             <a:spAutoFit/>
           </a:bodyPr>
           <a:lstStyle/>
           <a:p>
             <a:pPr>
               <a:spcAft>
-                <a:spcPts val="200"/>
+                <a:spcPts val="1400"/>
               </a:spcAft>
-              <a:defRPr sz="1400" b="1">
-                <a:solidFill>
-                  <a:srgbClr val="38BDF8"/>
+              <a:defRPr sz="1400">
+                <a:solidFill>
+                  <a:srgbClr val="E2E8F0"/>
                 </a:solidFill>
               </a:defRPr>
             </a:pPr>
             <a:r>
-              <a:t>State Machine via PHP Enum</a:t>
-            </a:r>
-          </a:p>
-          <a:p>
-            <a:pPr>
-              <a:defRPr sz="1200">
-                <a:solidFill>
-                  <a:srgbClr val="F8FAFC"/>
-                </a:solidFill>
-              </a:defRPr>
-            </a:pPr>
-            <a:r>
-              <a:t>StatusPengajuanEnum memblokir transisi status terlarang (misal: dokumen disetujui tidak bisa diedit).</a:t>
-            </a:r>
-          </a:p>
-        </p:txBody>
-      </p:sp>
-      <p:sp>
-        <p:nvSpPr>
-          <p:cNvPr id="11" name="Rounded Rectangle 10"/>
-          <p:cNvSpPr/>
-          <p:nvPr/>
-        </p:nvSpPr>
-        <p:spPr>
-          <a:xfrm>
-            <a:off x="731520" y="4078224"/>
-            <a:ext cx="10728655" cy="868680"/>
-          </a:xfrm>
-          <a:prstGeom prst="roundRect">
-            <a:avLst/>
-          </a:prstGeom>
-          <a:solidFill>
-            <a:srgbClr val="1E293B"/>
-          </a:solidFill>
-          <a:ln w="12700">
-            <a:solidFill>
-              <a:srgbClr val="334155"/>
-            </a:solidFill>
-          </a:ln>
-        </p:spPr>
-        <p:style>
-          <a:lnRef idx="1">
-            <a:schemeClr val="accent1"/>
-          </a:lnRef>
-          <a:fillRef idx="3">
-            <a:schemeClr val="accent1"/>
-          </a:fillRef>
-          <a:effectRef idx="2">
-            <a:schemeClr val="accent1"/>
-          </a:effectRef>
-          <a:fontRef idx="minor">
-            <a:schemeClr val="lt1"/>
-          </a:fontRef>
-        </p:style>
-        <p:txBody>
-          <a:bodyPr rtlCol="0" anchor="ctr"/>
-          <a:lstStyle/>
-          <a:p>
-            <a:pPr algn="ctr"/>
-          </a:p>
-        </p:txBody>
-      </p:sp>
-      <p:sp>
-        <p:nvSpPr>
-          <p:cNvPr id="12" name="Rectangle 11"/>
-          <p:cNvSpPr/>
-          <p:nvPr/>
-        </p:nvSpPr>
-        <p:spPr>
-          <a:xfrm>
-            <a:off x="731520" y="4078224"/>
-            <a:ext cx="73152" cy="868680"/>
-          </a:xfrm>
-          <a:prstGeom prst="rect">
-            <a:avLst/>
-          </a:prstGeom>
-          <a:solidFill>
-            <a:srgbClr val="38BDF8"/>
-          </a:solidFill>
-          <a:ln>
-            <a:noFill/>
-          </a:ln>
-        </p:spPr>
-        <p:style>
-          <a:lnRef idx="1">
-            <a:schemeClr val="accent1"/>
-          </a:lnRef>
-          <a:fillRef idx="3">
-            <a:schemeClr val="accent1"/>
-          </a:fillRef>
-          <a:effectRef idx="2">
-            <a:schemeClr val="accent1"/>
-          </a:effectRef>
-          <a:fontRef idx="minor">
-            <a:schemeClr val="lt1"/>
-          </a:fontRef>
-        </p:style>
-        <p:txBody>
-          <a:bodyPr rtlCol="0" anchor="ctr"/>
-          <a:lstStyle/>
-          <a:p>
-            <a:pPr algn="ctr"/>
-          </a:p>
-        </p:txBody>
-      </p:sp>
-      <p:sp>
-        <p:nvSpPr>
-          <p:cNvPr id="13" name="TextBox 12"/>
-          <p:cNvSpPr txBox="1"/>
-          <p:nvPr/>
-        </p:nvSpPr>
-        <p:spPr>
-          <a:xfrm>
-            <a:off x="960120" y="4187952"/>
-            <a:ext cx="10332720" cy="649224"/>
-          </a:xfrm>
-          <a:prstGeom prst="rect">
-            <a:avLst/>
-          </a:prstGeom>
-          <a:noFill/>
-        </p:spPr>
-        <p:txBody>
-          <a:bodyPr wrap="square" lIns="0" tIns="0" rIns="0" bIns="0">
-            <a:spAutoFit/>
-          </a:bodyPr>
-          <a:lstStyle/>
+              <a:t>•  Token Bearer Hashed: Token Sanctum disimpan dalam format hash SHA-256 di database</a:t>
+            </a:r>
+          </a:p>
           <a:p>
             <a:pPr>
               <a:spcAft>
-                <a:spcPts val="200"/>
+                <a:spcPts val="1400"/>
               </a:spcAft>
-              <a:defRPr sz="1400" b="1">
-                <a:solidFill>
-                  <a:srgbClr val="38BDF8"/>
+              <a:defRPr sz="1400">
+                <a:solidFill>
+                  <a:srgbClr val="E2E8F0"/>
                 </a:solidFill>
               </a:defRPr>
             </a:pPr>
             <a:r>
-              <a:t>Error Handler Terpusat</a:t>
-            </a:r>
-          </a:p>
-          <a:p>
-            <a:pPr>
-              <a:defRPr sz="1200">
-                <a:solidFill>
-                  <a:srgbClr val="F8FAFC"/>
-                </a:solidFill>
-              </a:defRPr>
-            </a:pPr>
-            <a:r>
-              <a:t>bootstrap/app.php memetakan AuthenticationException ke 401 dan NotFoundHttpException ke 404 JSON.</a:t>
-            </a:r>
-          </a:p>
-        </p:txBody>
-      </p:sp>
-      <p:sp>
-        <p:nvSpPr>
-          <p:cNvPr id="14" name="Rounded Rectangle 13"/>
-          <p:cNvSpPr/>
-          <p:nvPr/>
-        </p:nvSpPr>
-        <p:spPr>
-          <a:xfrm>
-            <a:off x="731520" y="5111496"/>
-            <a:ext cx="10728655" cy="868680"/>
-          </a:xfrm>
-          <a:prstGeom prst="roundRect">
-            <a:avLst/>
-          </a:prstGeom>
-          <a:solidFill>
-            <a:srgbClr val="1E293B"/>
-          </a:solidFill>
-          <a:ln w="12700">
-            <a:solidFill>
-              <a:srgbClr val="334155"/>
-            </a:solidFill>
-          </a:ln>
-        </p:spPr>
-        <p:style>
-          <a:lnRef idx="1">
-            <a:schemeClr val="accent1"/>
-          </a:lnRef>
-          <a:fillRef idx="3">
-            <a:schemeClr val="accent1"/>
-          </a:fillRef>
-          <a:effectRef idx="2">
-            <a:schemeClr val="accent1"/>
-          </a:effectRef>
-          <a:fontRef idx="minor">
-            <a:schemeClr val="lt1"/>
-          </a:fontRef>
-        </p:style>
-        <p:txBody>
-          <a:bodyPr rtlCol="0" anchor="ctr"/>
-          <a:lstStyle/>
-          <a:p>
-            <a:pPr algn="ctr"/>
-          </a:p>
-        </p:txBody>
-      </p:sp>
-      <p:sp>
-        <p:nvSpPr>
-          <p:cNvPr id="15" name="Rectangle 14"/>
-          <p:cNvSpPr/>
-          <p:nvPr/>
-        </p:nvSpPr>
-        <p:spPr>
-          <a:xfrm>
-            <a:off x="731520" y="5111496"/>
-            <a:ext cx="73152" cy="868680"/>
-          </a:xfrm>
-          <a:prstGeom prst="rect">
-            <a:avLst/>
-          </a:prstGeom>
-          <a:solidFill>
-            <a:srgbClr val="A78BFA"/>
-          </a:solidFill>
-          <a:ln>
-            <a:noFill/>
-          </a:ln>
-        </p:spPr>
-        <p:style>
-          <a:lnRef idx="1">
-            <a:schemeClr val="accent1"/>
-          </a:lnRef>
-          <a:fillRef idx="3">
-            <a:schemeClr val="accent1"/>
-          </a:fillRef>
-          <a:effectRef idx="2">
-            <a:schemeClr val="accent1"/>
-          </a:effectRef>
-          <a:fontRef idx="minor">
-            <a:schemeClr val="lt1"/>
-          </a:fontRef>
-        </p:style>
-        <p:txBody>
-          <a:bodyPr rtlCol="0" anchor="ctr"/>
-          <a:lstStyle/>
-          <a:p>
-            <a:pPr algn="ctr"/>
-          </a:p>
-        </p:txBody>
-      </p:sp>
-      <p:sp>
-        <p:nvSpPr>
-          <p:cNvPr id="16" name="TextBox 15"/>
-          <p:cNvSpPr txBox="1"/>
-          <p:nvPr/>
-        </p:nvSpPr>
-        <p:spPr>
-          <a:xfrm>
-            <a:off x="960120" y="5221224"/>
-            <a:ext cx="10332720" cy="649224"/>
-          </a:xfrm>
-          <a:prstGeom prst="rect">
-            <a:avLst/>
-          </a:prstGeom>
-          <a:noFill/>
-        </p:spPr>
-        <p:txBody>
-          <a:bodyPr wrap="square" lIns="0" tIns="0" rIns="0" bIns="0">
-            <a:spAutoFit/>
-          </a:bodyPr>
-          <a:lstStyle/>
+              <a:t>•  Role-Based Access Control: Hak akses spesifik untuk Karyawan, Atasan, Finance, Admin Travel, Superadmin</a:t>
+            </a:r>
+          </a:p>
           <a:p>
             <a:pPr>
               <a:spcAft>
-                <a:spcPts val="200"/>
+                <a:spcPts val="1400"/>
               </a:spcAft>
-              <a:defRPr sz="1400" b="1">
-                <a:solidFill>
-                  <a:srgbClr val="38BDF8"/>
+              <a:defRPr sz="1400">
+                <a:solidFill>
+                  <a:srgbClr val="E2E8F0"/>
                 </a:solidFill>
               </a:defRPr>
             </a:pPr>
             <a:r>
-              <a:t>Delete Protection (HTTP 409)</a:t>
+              <a:t>•  Password Hash: Menggunakan algoritma Bcrypt dengan cost factor terstandarisasi</a:t>
             </a:r>
           </a:p>
           <a:p>
             <a:pPr>
-              <a:defRPr sz="1200">
-                <a:solidFill>
-                  <a:srgbClr val="F8FAFC"/>
+              <a:spcAft>
+                <a:spcPts val="1400"/>
+              </a:spcAft>
+              <a:defRPr sz="1400">
+                <a:solidFill>
+                  <a:srgbClr val="E2E8F0"/>
                 </a:solidFill>
               </a:defRPr>
             </a:pPr>
             <a:r>
-              <a:t>Mencegah penghapusan kategori atau departemen yang masih memiliki data terkait di database.</a:t>
-            </a:r>
-          </a:p>
-        </p:txBody>
-      </p:sp>
-      <p:sp>
-        <p:nvSpPr>
-          <p:cNvPr id="17" name="TextBox 16"/>
-          <p:cNvSpPr txBox="1"/>
-          <p:nvPr/>
-        </p:nvSpPr>
-        <p:spPr>
-          <a:xfrm>
-            <a:off x="731520" y="6309360"/>
-            <a:ext cx="10728655" cy="365760"/>
-          </a:xfrm>
-          <a:prstGeom prst="rect">
-            <a:avLst/>
-          </a:prstGeom>
-          <a:noFill/>
-        </p:spPr>
-        <p:txBody>
-          <a:bodyPr wrap="square" lIns="0" tIns="0" rIns="0" bIns="0">
-            <a:spAutoFit/>
-          </a:bodyPr>
-          <a:lstStyle/>
-          <a:p>
-            <a:pPr>
-              <a:defRPr sz="950">
-                <a:solidFill>
-                  <a:srgbClr val="94A3B8"/>
-                </a:solidFill>
-              </a:defRPr>
-            </a:pPr>
-            <a:r>
-              <a:t>PT Astronova Enterprise • Backend Architecture Review &amp; Live Database Audit • Laravel 13</a:t>
+              <a:t>•  Audit Logging: Setiap aksi persetujuan dan perubahan status tercatat di tabel log_audit</a:t>
             </a:r>
           </a:p>
         </p:txBody>
@@ -9295,7 +6074,7 @@
             <a:avLst/>
           </a:prstGeom>
           <a:solidFill>
-            <a:srgbClr val="0B1120"/>
+            <a:srgbClr val="0F172A"/>
           </a:solidFill>
           <a:ln>
             <a:noFill/>
@@ -9325,23 +6104,25 @@
       </p:sp>
       <p:sp>
         <p:nvSpPr>
-          <p:cNvPr id="3" name="Rectangle 2"/>
+          <p:cNvPr id="3" name="Rounded Rectangle 2"/>
           <p:cNvSpPr/>
           <p:nvPr/>
         </p:nvSpPr>
         <p:spPr>
           <a:xfrm>
-            <a:off x="731520" y="548640"/>
-            <a:ext cx="73152" cy="1188720"/>
-          </a:xfrm>
-          <a:prstGeom prst="rect">
+            <a:off x="731520" y="731520"/>
+            <a:ext cx="10728655" cy="5394960"/>
+          </a:xfrm>
+          <a:prstGeom prst="roundRect">
             <a:avLst/>
           </a:prstGeom>
           <a:solidFill>
-            <a:srgbClr val="38BDF8"/>
+            <a:srgbClr val="1E293B"/>
           </a:solidFill>
           <a:ln>
-            <a:noFill/>
+            <a:solidFill>
+              <a:srgbClr val="334155"/>
+            </a:solidFill>
           </a:ln>
         </p:spPr>
         <p:style>
@@ -9374,8 +6155,8 @@
         </p:nvSpPr>
         <p:spPr>
           <a:xfrm>
-            <a:off x="960120" y="411480"/>
-            <a:ext cx="10241280" cy="1371600"/>
+            <a:off x="1097280" y="1005840"/>
+            <a:ext cx="9966960" cy="365760"/>
           </a:xfrm>
           <a:prstGeom prst="rect">
             <a:avLst/>
@@ -9383,7 +6164,7 @@
           <a:noFill/>
         </p:spPr>
         <p:txBody>
-          <a:bodyPr wrap="square" lIns="0" tIns="0" rIns="0" bIns="0">
+          <a:bodyPr wrap="none">
             <a:spAutoFit/>
           </a:bodyPr>
           <a:lstStyle/>
@@ -9391,141 +6172,26 @@
             <a:pPr>
               <a:defRPr sz="1100" b="1">
                 <a:solidFill>
-                  <a:srgbClr val="34D399"/>
+                  <a:srgbClr val="38BDF8"/>
                 </a:solidFill>
               </a:defRPr>
             </a:pPr>
             <a:r>
-              <a:t>SLIDE 7 • SECURITY &amp; ACCESS CONTROL</a:t>
-            </a:r>
-          </a:p>
-          <a:p>
-            <a:pPr>
-              <a:spcAft>
-                <a:spcPts val="400"/>
-              </a:spcAft>
-              <a:defRPr sz="2500" b="1">
-                <a:solidFill>
-                  <a:srgbClr val="F8FAFC"/>
-                </a:solidFill>
-              </a:defRPr>
-            </a:pPr>
-            <a:r>
-              <a:t>Authentication, Authorization, &amp; Keamanan</a:t>
-            </a:r>
-          </a:p>
-          <a:p>
-            <a:pPr>
-              <a:defRPr sz="1300">
-                <a:solidFill>
-                  <a:srgbClr val="94A3B8"/>
-                </a:solidFill>
-              </a:defRPr>
-            </a:pPr>
-            <a:r>
-              <a:t>Proteksi API Berbasis Token Laravel Sanctum v4.0</a:t>
-            </a:r>
-          </a:p>
-        </p:txBody>
-      </p:sp>
-      <p:sp>
-        <p:nvSpPr>
-          <p:cNvPr id="5" name="Rounded Rectangle 4"/>
-          <p:cNvSpPr/>
-          <p:nvPr/>
-        </p:nvSpPr>
-        <p:spPr>
-          <a:xfrm>
-            <a:off x="731520" y="2011680"/>
-            <a:ext cx="10728655" cy="868680"/>
-          </a:xfrm>
-          <a:prstGeom prst="roundRect">
-            <a:avLst/>
-          </a:prstGeom>
-          <a:solidFill>
-            <a:srgbClr val="1E293B"/>
-          </a:solidFill>
-          <a:ln w="12700">
-            <a:solidFill>
-              <a:srgbClr val="334155"/>
-            </a:solidFill>
-          </a:ln>
-        </p:spPr>
-        <p:style>
-          <a:lnRef idx="1">
-            <a:schemeClr val="accent1"/>
-          </a:lnRef>
-          <a:fillRef idx="3">
-            <a:schemeClr val="accent1"/>
-          </a:fillRef>
-          <a:effectRef idx="2">
-            <a:schemeClr val="accent1"/>
-          </a:effectRef>
-          <a:fontRef idx="minor">
-            <a:schemeClr val="lt1"/>
-          </a:fontRef>
-        </p:style>
-        <p:txBody>
-          <a:bodyPr rtlCol="0" anchor="ctr"/>
-          <a:lstStyle/>
-          <a:p>
-            <a:pPr algn="ctr"/>
-          </a:p>
-        </p:txBody>
-      </p:sp>
-      <p:sp>
-        <p:nvSpPr>
-          <p:cNvPr id="6" name="Rectangle 5"/>
-          <p:cNvSpPr/>
-          <p:nvPr/>
-        </p:nvSpPr>
-        <p:spPr>
-          <a:xfrm>
-            <a:off x="731520" y="2011680"/>
-            <a:ext cx="73152" cy="868680"/>
-          </a:xfrm>
-          <a:prstGeom prst="rect">
-            <a:avLst/>
-          </a:prstGeom>
-          <a:solidFill>
-            <a:srgbClr val="38BDF8"/>
-          </a:solidFill>
-          <a:ln>
-            <a:noFill/>
-          </a:ln>
-        </p:spPr>
-        <p:style>
-          <a:lnRef idx="1">
-            <a:schemeClr val="accent1"/>
-          </a:lnRef>
-          <a:fillRef idx="3">
-            <a:schemeClr val="accent1"/>
-          </a:fillRef>
-          <a:effectRef idx="2">
-            <a:schemeClr val="accent1"/>
-          </a:effectRef>
-          <a:fontRef idx="minor">
-            <a:schemeClr val="lt1"/>
-          </a:fontRef>
-        </p:style>
-        <p:txBody>
-          <a:bodyPr rtlCol="0" anchor="ctr"/>
-          <a:lstStyle/>
-          <a:p>
-            <a:pPr algn="ctr"/>
-          </a:p>
-        </p:txBody>
-      </p:sp>
-      <p:sp>
-        <p:nvSpPr>
-          <p:cNvPr id="7" name="TextBox 6"/>
+              <a:t>SLIDE 7 / 10 • ASTRONOVA BACKEND</a:t>
+            </a:r>
+          </a:p>
+        </p:txBody>
+      </p:sp>
+      <p:sp>
+        <p:nvSpPr>
+          <p:cNvPr id="5" name="TextBox 4"/>
           <p:cNvSpPr txBox="1"/>
           <p:nvPr/>
         </p:nvSpPr>
         <p:spPr>
           <a:xfrm>
-            <a:off x="960120" y="2121408"/>
-            <a:ext cx="10332720" cy="649224"/>
+            <a:off x="1097280" y="1280160"/>
+            <a:ext cx="9966960" cy="1005840"/>
           </a:xfrm>
           <a:prstGeom prst="rect">
             <a:avLst/>
@@ -9533,137 +6199,46 @@
           <a:noFill/>
         </p:spPr>
         <p:txBody>
-          <a:bodyPr wrap="square" lIns="0" tIns="0" rIns="0" bIns="0">
+          <a:bodyPr wrap="square">
             <a:spAutoFit/>
           </a:bodyPr>
           <a:lstStyle/>
           <a:p>
             <a:pPr>
-              <a:spcAft>
-                <a:spcPts val="200"/>
-              </a:spcAft>
-              <a:defRPr sz="1400" b="1">
-                <a:solidFill>
-                  <a:srgbClr val="38BDF8"/>
+              <a:defRPr sz="2400" b="1">
+                <a:solidFill>
+                  <a:srgbClr val="FFFFFF"/>
                 </a:solidFill>
               </a:defRPr>
             </a:pPr>
             <a:r>
-              <a:t>Bearer Token Sanctum</a:t>
+              <a:t>Kekuatan Database: Relasi, Foreign Key &amp; Transaksi</a:t>
             </a:r>
           </a:p>
           <a:p>
             <a:pPr>
-              <a:defRPr sz="1200">
-                <a:solidFill>
-                  <a:srgbClr val="F8FAFC"/>
+              <a:defRPr sz="1400">
+                <a:solidFill>
+                  <a:srgbClr val="34D399"/>
                 </a:solidFill>
               </a:defRPr>
             </a:pPr>
             <a:r>
-              <a:t>Seluruh rute dilindungi auth:sanctum kecuali endpoint login dan health check public.</a:t>
-            </a:r>
-          </a:p>
-        </p:txBody>
-      </p:sp>
-      <p:sp>
-        <p:nvSpPr>
-          <p:cNvPr id="8" name="Rounded Rectangle 7"/>
-          <p:cNvSpPr/>
-          <p:nvPr/>
-        </p:nvSpPr>
-        <p:spPr>
-          <a:xfrm>
-            <a:off x="731520" y="3044952"/>
-            <a:ext cx="10728655" cy="868680"/>
-          </a:xfrm>
-          <a:prstGeom prst="roundRect">
-            <a:avLst/>
-          </a:prstGeom>
-          <a:solidFill>
-            <a:srgbClr val="1E293B"/>
-          </a:solidFill>
-          <a:ln w="12700">
-            <a:solidFill>
-              <a:srgbClr val="334155"/>
-            </a:solidFill>
-          </a:ln>
-        </p:spPr>
-        <p:style>
-          <a:lnRef idx="1">
-            <a:schemeClr val="accent1"/>
-          </a:lnRef>
-          <a:fillRef idx="3">
-            <a:schemeClr val="accent1"/>
-          </a:fillRef>
-          <a:effectRef idx="2">
-            <a:schemeClr val="accent1"/>
-          </a:effectRef>
-          <a:fontRef idx="minor">
-            <a:schemeClr val="lt1"/>
-          </a:fontRef>
-        </p:style>
-        <p:txBody>
-          <a:bodyPr rtlCol="0" anchor="ctr"/>
-          <a:lstStyle/>
-          <a:p>
-            <a:pPr algn="ctr"/>
-          </a:p>
-        </p:txBody>
-      </p:sp>
-      <p:sp>
-        <p:nvSpPr>
-          <p:cNvPr id="9" name="Rectangle 8"/>
-          <p:cNvSpPr/>
-          <p:nvPr/>
-        </p:nvSpPr>
-        <p:spPr>
-          <a:xfrm>
-            <a:off x="731520" y="3044952"/>
-            <a:ext cx="73152" cy="868680"/>
-          </a:xfrm>
-          <a:prstGeom prst="rect">
-            <a:avLst/>
-          </a:prstGeom>
-          <a:solidFill>
-            <a:srgbClr val="A78BFA"/>
-          </a:solidFill>
-          <a:ln>
-            <a:noFill/>
-          </a:ln>
-        </p:spPr>
-        <p:style>
-          <a:lnRef idx="1">
-            <a:schemeClr val="accent1"/>
-          </a:lnRef>
-          <a:fillRef idx="3">
-            <a:schemeClr val="accent1"/>
-          </a:fillRef>
-          <a:effectRef idx="2">
-            <a:schemeClr val="accent1"/>
-          </a:effectRef>
-          <a:fontRef idx="minor">
-            <a:schemeClr val="lt1"/>
-          </a:fontRef>
-        </p:style>
-        <p:txBody>
-          <a:bodyPr rtlCol="0" anchor="ctr"/>
-          <a:lstStyle/>
-          <a:p>
-            <a:pPr algn="ctr"/>
-          </a:p>
-        </p:txBody>
-      </p:sp>
-      <p:sp>
-        <p:nvSpPr>
-          <p:cNvPr id="10" name="TextBox 9"/>
+              <a:t>Konsistensi Data Finansial Tanpa Celah Kebocoran</a:t>
+            </a:r>
+          </a:p>
+        </p:txBody>
+      </p:sp>
+      <p:sp>
+        <p:nvSpPr>
+          <p:cNvPr id="6" name="TextBox 5"/>
           <p:cNvSpPr txBox="1"/>
           <p:nvPr/>
         </p:nvSpPr>
         <p:spPr>
           <a:xfrm>
-            <a:off x="960120" y="3154680"/>
-            <a:ext cx="10332720" cy="649224"/>
+            <a:off x="1097280" y="2468880"/>
+            <a:ext cx="9966960" cy="3291840"/>
           </a:xfrm>
           <a:prstGeom prst="rect">
             <a:avLst/>
@@ -9671,346 +6246,68 @@
           <a:noFill/>
         </p:spPr>
         <p:txBody>
-          <a:bodyPr wrap="square" lIns="0" tIns="0" rIns="0" bIns="0">
+          <a:bodyPr wrap="square">
             <a:spAutoFit/>
           </a:bodyPr>
           <a:lstStyle/>
           <a:p>
             <a:pPr>
               <a:spcAft>
-                <a:spcPts val="200"/>
+                <a:spcPts val="1400"/>
               </a:spcAft>
-              <a:defRPr sz="1400" b="1">
-                <a:solidFill>
-                  <a:srgbClr val="38BDF8"/>
+              <a:defRPr sz="1400">
+                <a:solidFill>
+                  <a:srgbClr val="E2E8F0"/>
                 </a:solidFill>
               </a:defRPr>
             </a:pPr>
             <a:r>
-              <a:t>Pencegahan IDOR</a:t>
-            </a:r>
-          </a:p>
-          <a:p>
-            <a:pPr>
-              <a:defRPr sz="1200">
-                <a:solidFill>
-                  <a:srgbClr val="F8FAFC"/>
-                </a:solidFill>
-              </a:defRPr>
-            </a:pPr>
-            <a:r>
-              <a:t>Identitas penyetuju (approver) diambil langsung dari token auth user login ($request-&gt;user()).</a:t>
-            </a:r>
-          </a:p>
-        </p:txBody>
-      </p:sp>
-      <p:sp>
-        <p:nvSpPr>
-          <p:cNvPr id="11" name="Rounded Rectangle 10"/>
-          <p:cNvSpPr/>
-          <p:nvPr/>
-        </p:nvSpPr>
-        <p:spPr>
-          <a:xfrm>
-            <a:off x="731520" y="4078224"/>
-            <a:ext cx="10728655" cy="868680"/>
-          </a:xfrm>
-          <a:prstGeom prst="roundRect">
-            <a:avLst/>
-          </a:prstGeom>
-          <a:solidFill>
-            <a:srgbClr val="1E293B"/>
-          </a:solidFill>
-          <a:ln w="12700">
-            <a:solidFill>
-              <a:srgbClr val="334155"/>
-            </a:solidFill>
-          </a:ln>
-        </p:spPr>
-        <p:style>
-          <a:lnRef idx="1">
-            <a:schemeClr val="accent1"/>
-          </a:lnRef>
-          <a:fillRef idx="3">
-            <a:schemeClr val="accent1"/>
-          </a:fillRef>
-          <a:effectRef idx="2">
-            <a:schemeClr val="accent1"/>
-          </a:effectRef>
-          <a:fontRef idx="minor">
-            <a:schemeClr val="lt1"/>
-          </a:fontRef>
-        </p:style>
-        <p:txBody>
-          <a:bodyPr rtlCol="0" anchor="ctr"/>
-          <a:lstStyle/>
-          <a:p>
-            <a:pPr algn="ctr"/>
-          </a:p>
-        </p:txBody>
-      </p:sp>
-      <p:sp>
-        <p:nvSpPr>
-          <p:cNvPr id="12" name="Rectangle 11"/>
-          <p:cNvSpPr/>
-          <p:nvPr/>
-        </p:nvSpPr>
-        <p:spPr>
-          <a:xfrm>
-            <a:off x="731520" y="4078224"/>
-            <a:ext cx="73152" cy="868680"/>
-          </a:xfrm>
-          <a:prstGeom prst="rect">
-            <a:avLst/>
-          </a:prstGeom>
-          <a:solidFill>
-            <a:srgbClr val="38BDF8"/>
-          </a:solidFill>
-          <a:ln>
-            <a:noFill/>
-          </a:ln>
-        </p:spPr>
-        <p:style>
-          <a:lnRef idx="1">
-            <a:schemeClr val="accent1"/>
-          </a:lnRef>
-          <a:fillRef idx="3">
-            <a:schemeClr val="accent1"/>
-          </a:fillRef>
-          <a:effectRef idx="2">
-            <a:schemeClr val="accent1"/>
-          </a:effectRef>
-          <a:fontRef idx="minor">
-            <a:schemeClr val="lt1"/>
-          </a:fontRef>
-        </p:style>
-        <p:txBody>
-          <a:bodyPr rtlCol="0" anchor="ctr"/>
-          <a:lstStyle/>
-          <a:p>
-            <a:pPr algn="ctr"/>
-          </a:p>
-        </p:txBody>
-      </p:sp>
-      <p:sp>
-        <p:nvSpPr>
-          <p:cNvPr id="13" name="TextBox 12"/>
-          <p:cNvSpPr txBox="1"/>
-          <p:nvPr/>
-        </p:nvSpPr>
-        <p:spPr>
-          <a:xfrm>
-            <a:off x="960120" y="4187952"/>
-            <a:ext cx="10332720" cy="649224"/>
-          </a:xfrm>
-          <a:prstGeom prst="rect">
-            <a:avLst/>
-          </a:prstGeom>
-          <a:noFill/>
-        </p:spPr>
-        <p:txBody>
-          <a:bodyPr wrap="square" lIns="0" tIns="0" rIns="0" bIns="0">
-            <a:spAutoFit/>
-          </a:bodyPr>
-          <a:lstStyle/>
+              <a:t>•  28 Tabel Migrasi: Relasi relasional satu-ke-banyak (1:N) dan polimorfik</a:t>
+            </a:r>
+          </a:p>
           <a:p>
             <a:pPr>
               <a:spcAft>
-                <a:spcPts val="200"/>
+                <a:spcPts val="1400"/>
               </a:spcAft>
-              <a:defRPr sz="1400" b="1">
-                <a:solidFill>
-                  <a:srgbClr val="38BDF8"/>
+              <a:defRPr sz="1400">
+                <a:solidFill>
+                  <a:srgbClr val="E2E8F0"/>
                 </a:solidFill>
               </a:defRPr>
             </a:pPr>
             <a:r>
-              <a:t>Proteksi Mass Assignment</a:t>
-            </a:r>
-          </a:p>
-          <a:p>
-            <a:pPr>
-              <a:defRPr sz="1200">
-                <a:solidFill>
-                  <a:srgbClr val="F8FAFC"/>
-                </a:solidFill>
-              </a:defRPr>
-            </a:pPr>
-            <a:r>
-              <a:t>Semua model menetapkan $fillable eksplisit dan hanya menerima $request-&gt;validated().</a:t>
-            </a:r>
-          </a:p>
-        </p:txBody>
-      </p:sp>
-      <p:sp>
-        <p:nvSpPr>
-          <p:cNvPr id="14" name="Rounded Rectangle 13"/>
-          <p:cNvSpPr/>
-          <p:nvPr/>
-        </p:nvSpPr>
-        <p:spPr>
-          <a:xfrm>
-            <a:off x="731520" y="5111496"/>
-            <a:ext cx="10728655" cy="868680"/>
-          </a:xfrm>
-          <a:prstGeom prst="roundRect">
-            <a:avLst/>
-          </a:prstGeom>
-          <a:solidFill>
-            <a:srgbClr val="1E293B"/>
-          </a:solidFill>
-          <a:ln w="12700">
-            <a:solidFill>
-              <a:srgbClr val="334155"/>
-            </a:solidFill>
-          </a:ln>
-        </p:spPr>
-        <p:style>
-          <a:lnRef idx="1">
-            <a:schemeClr val="accent1"/>
-          </a:lnRef>
-          <a:fillRef idx="3">
-            <a:schemeClr val="accent1"/>
-          </a:fillRef>
-          <a:effectRef idx="2">
-            <a:schemeClr val="accent1"/>
-          </a:effectRef>
-          <a:fontRef idx="minor">
-            <a:schemeClr val="lt1"/>
-          </a:fontRef>
-        </p:style>
-        <p:txBody>
-          <a:bodyPr rtlCol="0" anchor="ctr"/>
-          <a:lstStyle/>
-          <a:p>
-            <a:pPr algn="ctr"/>
-          </a:p>
-        </p:txBody>
-      </p:sp>
-      <p:sp>
-        <p:nvSpPr>
-          <p:cNvPr id="15" name="Rectangle 14"/>
-          <p:cNvSpPr/>
-          <p:nvPr/>
-        </p:nvSpPr>
-        <p:spPr>
-          <a:xfrm>
-            <a:off x="731520" y="5111496"/>
-            <a:ext cx="73152" cy="868680"/>
-          </a:xfrm>
-          <a:prstGeom prst="rect">
-            <a:avLst/>
-          </a:prstGeom>
-          <a:solidFill>
-            <a:srgbClr val="A78BFA"/>
-          </a:solidFill>
-          <a:ln>
-            <a:noFill/>
-          </a:ln>
-        </p:spPr>
-        <p:style>
-          <a:lnRef idx="1">
-            <a:schemeClr val="accent1"/>
-          </a:lnRef>
-          <a:fillRef idx="3">
-            <a:schemeClr val="accent1"/>
-          </a:fillRef>
-          <a:effectRef idx="2">
-            <a:schemeClr val="accent1"/>
-          </a:effectRef>
-          <a:fontRef idx="minor">
-            <a:schemeClr val="lt1"/>
-          </a:fontRef>
-        </p:style>
-        <p:txBody>
-          <a:bodyPr rtlCol="0" anchor="ctr"/>
-          <a:lstStyle/>
-          <a:p>
-            <a:pPr algn="ctr"/>
-          </a:p>
-        </p:txBody>
-      </p:sp>
-      <p:sp>
-        <p:nvSpPr>
-          <p:cNvPr id="16" name="TextBox 15"/>
-          <p:cNvSpPr txBox="1"/>
-          <p:nvPr/>
-        </p:nvSpPr>
-        <p:spPr>
-          <a:xfrm>
-            <a:off x="960120" y="5221224"/>
-            <a:ext cx="10332720" cy="649224"/>
-          </a:xfrm>
-          <a:prstGeom prst="rect">
-            <a:avLst/>
-          </a:prstGeom>
-          <a:noFill/>
-        </p:spPr>
-        <p:txBody>
-          <a:bodyPr wrap="square" lIns="0" tIns="0" rIns="0" bIns="0">
-            <a:spAutoFit/>
-          </a:bodyPr>
-          <a:lstStyle/>
+              <a:t>•  Foreign Key Restrict: Mencegah penghapusan master data jika masih memiliki transaksi aktif</a:t>
+            </a:r>
+          </a:p>
           <a:p>
             <a:pPr>
               <a:spcAft>
-                <a:spcPts val="200"/>
+                <a:spcPts val="1400"/>
               </a:spcAft>
-              <a:defRPr sz="1400" b="1">
-                <a:solidFill>
-                  <a:srgbClr val="38BDF8"/>
+              <a:defRPr sz="1400">
+                <a:solidFill>
+                  <a:srgbClr val="E2E8F0"/>
                 </a:solidFill>
               </a:defRPr>
             </a:pPr>
             <a:r>
-              <a:t>Enkripsi &amp; Hashing</a:t>
+              <a:t>•  Atomic Transaction: Menggunakan DB::transaction() agar pengajuan dan rincian tersimpan utuh</a:t>
             </a:r>
           </a:p>
           <a:p>
             <a:pPr>
-              <a:defRPr sz="1200">
-                <a:solidFill>
-                  <a:srgbClr val="F8FAFC"/>
+              <a:spcAft>
+                <a:spcPts val="1400"/>
+              </a:spcAft>
+              <a:defRPr sz="1400">
+                <a:solidFill>
+                  <a:srgbClr val="E2E8F0"/>
                 </a:solidFill>
               </a:defRPr>
             </a:pPr>
             <a:r>
-              <a:t>Password di-hash Bcrypt, atribut sensitif disembunyikan dengan attribute #[Hidden] model.</a:t>
-            </a:r>
-          </a:p>
-        </p:txBody>
-      </p:sp>
-      <p:sp>
-        <p:nvSpPr>
-          <p:cNvPr id="17" name="TextBox 16"/>
-          <p:cNvSpPr txBox="1"/>
-          <p:nvPr/>
-        </p:nvSpPr>
-        <p:spPr>
-          <a:xfrm>
-            <a:off x="731520" y="6309360"/>
-            <a:ext cx="10728655" cy="365760"/>
-          </a:xfrm>
-          <a:prstGeom prst="rect">
-            <a:avLst/>
-          </a:prstGeom>
-          <a:noFill/>
-        </p:spPr>
-        <p:txBody>
-          <a:bodyPr wrap="square" lIns="0" tIns="0" rIns="0" bIns="0">
-            <a:spAutoFit/>
-          </a:bodyPr>
-          <a:lstStyle/>
-          <a:p>
-            <a:pPr>
-              <a:defRPr sz="950">
-                <a:solidFill>
-                  <a:srgbClr val="94A3B8"/>
-                </a:solidFill>
-              </a:defRPr>
-            </a:pPr>
-            <a:r>
-              <a:t>PT Astronova Enterprise • Backend Architecture Review &amp; Live Database Audit • Laravel 13</a:t>
+              <a:t>•  Eager Loading: Mencegah N+1 query problem menggunakan method with()</a:t>
             </a:r>
           </a:p>
         </p:txBody>
@@ -10048,7 +6345,7 @@
             <a:avLst/>
           </a:prstGeom>
           <a:solidFill>
-            <a:srgbClr val="0B1120"/>
+            <a:srgbClr val="0F172A"/>
           </a:solidFill>
           <a:ln>
             <a:noFill/>
@@ -10078,23 +6375,25 @@
       </p:sp>
       <p:sp>
         <p:nvSpPr>
-          <p:cNvPr id="3" name="Rectangle 2"/>
+          <p:cNvPr id="3" name="Rounded Rectangle 2"/>
           <p:cNvSpPr/>
           <p:nvPr/>
         </p:nvSpPr>
         <p:spPr>
           <a:xfrm>
-            <a:off x="731520" y="548640"/>
-            <a:ext cx="73152" cy="1188720"/>
-          </a:xfrm>
-          <a:prstGeom prst="rect">
+            <a:off x="731520" y="731520"/>
+            <a:ext cx="10728655" cy="5394960"/>
+          </a:xfrm>
+          <a:prstGeom prst="roundRect">
             <a:avLst/>
           </a:prstGeom>
           <a:solidFill>
-            <a:srgbClr val="38BDF8"/>
+            <a:srgbClr val="1E293B"/>
           </a:solidFill>
           <a:ln>
-            <a:noFill/>
+            <a:solidFill>
+              <a:srgbClr val="334155"/>
+            </a:solidFill>
           </a:ln>
         </p:spPr>
         <p:style>
@@ -10127,8 +6426,8 @@
         </p:nvSpPr>
         <p:spPr>
           <a:xfrm>
-            <a:off x="960120" y="411480"/>
-            <a:ext cx="10241280" cy="1371600"/>
+            <a:off x="1097280" y="1005840"/>
+            <a:ext cx="9966960" cy="365760"/>
           </a:xfrm>
           <a:prstGeom prst="rect">
             <a:avLst/>
@@ -10136,7 +6435,7 @@
           <a:noFill/>
         </p:spPr>
         <p:txBody>
-          <a:bodyPr wrap="square" lIns="0" tIns="0" rIns="0" bIns="0">
+          <a:bodyPr wrap="none">
             <a:spAutoFit/>
           </a:bodyPr>
           <a:lstStyle/>
@@ -10144,141 +6443,26 @@
             <a:pPr>
               <a:defRPr sz="1100" b="1">
                 <a:solidFill>
-                  <a:srgbClr val="34D399"/>
+                  <a:srgbClr val="38BDF8"/>
                 </a:solidFill>
               </a:defRPr>
             </a:pPr>
             <a:r>
-              <a:t>SLIDE 8 • TRANSFORMASI DINAMIS</a:t>
-            </a:r>
-          </a:p>
-          <a:p>
-            <a:pPr>
-              <a:spcAft>
-                <a:spcPts val="400"/>
-              </a:spcAft>
-              <a:defRPr sz="2500" b="1">
-                <a:solidFill>
-                  <a:srgbClr val="F8FAFC"/>
-                </a:solidFill>
-              </a:defRPr>
-            </a:pPr>
-            <a:r>
-              <a:t>Dari Mock Data ke Database Dinamis</a:t>
-            </a:r>
-          </a:p>
-          <a:p>
-            <a:pPr>
-              <a:defRPr sz="1300">
-                <a:solidFill>
-                  <a:srgbClr val="94A3B8"/>
-                </a:solidFill>
-              </a:defRPr>
-            </a:pPr>
-            <a:r>
-              <a:t>Penyediaan Endpoint Agregasi &amp; Visualisasi Live</a:t>
-            </a:r>
-          </a:p>
-        </p:txBody>
-      </p:sp>
-      <p:sp>
-        <p:nvSpPr>
-          <p:cNvPr id="5" name="Rounded Rectangle 4"/>
-          <p:cNvSpPr/>
-          <p:nvPr/>
-        </p:nvSpPr>
-        <p:spPr>
-          <a:xfrm>
-            <a:off x="731520" y="2011680"/>
-            <a:ext cx="10728655" cy="868680"/>
-          </a:xfrm>
-          <a:prstGeom prst="roundRect">
-            <a:avLst/>
-          </a:prstGeom>
-          <a:solidFill>
-            <a:srgbClr val="1E293B"/>
-          </a:solidFill>
-          <a:ln w="12700">
-            <a:solidFill>
-              <a:srgbClr val="334155"/>
-            </a:solidFill>
-          </a:ln>
-        </p:spPr>
-        <p:style>
-          <a:lnRef idx="1">
-            <a:schemeClr val="accent1"/>
-          </a:lnRef>
-          <a:fillRef idx="3">
-            <a:schemeClr val="accent1"/>
-          </a:fillRef>
-          <a:effectRef idx="2">
-            <a:schemeClr val="accent1"/>
-          </a:effectRef>
-          <a:fontRef idx="minor">
-            <a:schemeClr val="lt1"/>
-          </a:fontRef>
-        </p:style>
-        <p:txBody>
-          <a:bodyPr rtlCol="0" anchor="ctr"/>
-          <a:lstStyle/>
-          <a:p>
-            <a:pPr algn="ctr"/>
-          </a:p>
-        </p:txBody>
-      </p:sp>
-      <p:sp>
-        <p:nvSpPr>
-          <p:cNvPr id="6" name="Rectangle 5"/>
-          <p:cNvSpPr/>
-          <p:nvPr/>
-        </p:nvSpPr>
-        <p:spPr>
-          <a:xfrm>
-            <a:off x="731520" y="2011680"/>
-            <a:ext cx="73152" cy="868680"/>
-          </a:xfrm>
-          <a:prstGeom prst="rect">
-            <a:avLst/>
-          </a:prstGeom>
-          <a:solidFill>
-            <a:srgbClr val="38BDF8"/>
-          </a:solidFill>
-          <a:ln>
-            <a:noFill/>
-          </a:ln>
-        </p:spPr>
-        <p:style>
-          <a:lnRef idx="1">
-            <a:schemeClr val="accent1"/>
-          </a:lnRef>
-          <a:fillRef idx="3">
-            <a:schemeClr val="accent1"/>
-          </a:fillRef>
-          <a:effectRef idx="2">
-            <a:schemeClr val="accent1"/>
-          </a:effectRef>
-          <a:fontRef idx="minor">
-            <a:schemeClr val="lt1"/>
-          </a:fontRef>
-        </p:style>
-        <p:txBody>
-          <a:bodyPr rtlCol="0" anchor="ctr"/>
-          <a:lstStyle/>
-          <a:p>
-            <a:pPr algn="ctr"/>
-          </a:p>
-        </p:txBody>
-      </p:sp>
-      <p:sp>
-        <p:nvSpPr>
-          <p:cNvPr id="7" name="TextBox 6"/>
+              <a:t>SLIDE 8 / 10 • ASTRONOVA BACKEND</a:t>
+            </a:r>
+          </a:p>
+        </p:txBody>
+      </p:sp>
+      <p:sp>
+        <p:nvSpPr>
+          <p:cNvPr id="5" name="TextBox 4"/>
           <p:cNvSpPr txBox="1"/>
           <p:nvPr/>
         </p:nvSpPr>
         <p:spPr>
           <a:xfrm>
-            <a:off x="960120" y="2121408"/>
-            <a:ext cx="10332720" cy="649224"/>
+            <a:off x="1097280" y="1280160"/>
+            <a:ext cx="9966960" cy="1005840"/>
           </a:xfrm>
           <a:prstGeom prst="rect">
             <a:avLst/>
@@ -10286,137 +6470,46 @@
           <a:noFill/>
         </p:spPr>
         <p:txBody>
-          <a:bodyPr wrap="square" lIns="0" tIns="0" rIns="0" bIns="0">
+          <a:bodyPr wrap="square">
             <a:spAutoFit/>
           </a:bodyPr>
           <a:lstStyle/>
           <a:p>
             <a:pPr>
-              <a:spcAft>
-                <a:spcPts val="200"/>
-              </a:spcAft>
-              <a:defRPr sz="1400" b="1">
-                <a:solidFill>
-                  <a:srgbClr val="38BDF8"/>
+              <a:defRPr sz="2400" b="1">
+                <a:solidFill>
+                  <a:srgbClr val="FFFFFF"/>
                 </a:solidFill>
               </a:defRPr>
             </a:pPr>
             <a:r>
-              <a:t>Modul Dashboard Dinamis</a:t>
+              <a:t>Dari Mock Data Menuju Data Database Riil</a:t>
             </a:r>
           </a:p>
           <a:p>
             <a:pPr>
-              <a:defRPr sz="1200">
-                <a:solidFill>
-                  <a:srgbClr val="F8FAFC"/>
+              <a:defRPr sz="1400">
+                <a:solidFill>
+                  <a:srgbClr val="34D399"/>
                 </a:solidFill>
               </a:defRPr>
             </a:pPr>
             <a:r>
-              <a:t>GET /api/dashboard/stats menghitung count status, total klaim, dan agregat biaya per kategori.</a:t>
-            </a:r>
-          </a:p>
-        </p:txBody>
-      </p:sp>
-      <p:sp>
-        <p:nvSpPr>
-          <p:cNvPr id="8" name="Rounded Rectangle 7"/>
-          <p:cNvSpPr/>
-          <p:nvPr/>
-        </p:nvSpPr>
-        <p:spPr>
-          <a:xfrm>
-            <a:off x="731520" y="3044952"/>
-            <a:ext cx="10728655" cy="868680"/>
-          </a:xfrm>
-          <a:prstGeom prst="roundRect">
-            <a:avLst/>
-          </a:prstGeom>
-          <a:solidFill>
-            <a:srgbClr val="1E293B"/>
-          </a:solidFill>
-          <a:ln w="12700">
-            <a:solidFill>
-              <a:srgbClr val="334155"/>
-            </a:solidFill>
-          </a:ln>
-        </p:spPr>
-        <p:style>
-          <a:lnRef idx="1">
-            <a:schemeClr val="accent1"/>
-          </a:lnRef>
-          <a:fillRef idx="3">
-            <a:schemeClr val="accent1"/>
-          </a:fillRef>
-          <a:effectRef idx="2">
-            <a:schemeClr val="accent1"/>
-          </a:effectRef>
-          <a:fontRef idx="minor">
-            <a:schemeClr val="lt1"/>
-          </a:fontRef>
-        </p:style>
-        <p:txBody>
-          <a:bodyPr rtlCol="0" anchor="ctr"/>
-          <a:lstStyle/>
-          <a:p>
-            <a:pPr algn="ctr"/>
-          </a:p>
-        </p:txBody>
-      </p:sp>
-      <p:sp>
-        <p:nvSpPr>
-          <p:cNvPr id="9" name="Rectangle 8"/>
-          <p:cNvSpPr/>
-          <p:nvPr/>
-        </p:nvSpPr>
-        <p:spPr>
-          <a:xfrm>
-            <a:off x="731520" y="3044952"/>
-            <a:ext cx="73152" cy="868680"/>
-          </a:xfrm>
-          <a:prstGeom prst="rect">
-            <a:avLst/>
-          </a:prstGeom>
-          <a:solidFill>
-            <a:srgbClr val="A78BFA"/>
-          </a:solidFill>
-          <a:ln>
-            <a:noFill/>
-          </a:ln>
-        </p:spPr>
-        <p:style>
-          <a:lnRef idx="1">
-            <a:schemeClr val="accent1"/>
-          </a:lnRef>
-          <a:fillRef idx="3">
-            <a:schemeClr val="accent1"/>
-          </a:fillRef>
-          <a:effectRef idx="2">
-            <a:schemeClr val="accent1"/>
-          </a:effectRef>
-          <a:fontRef idx="minor">
-            <a:schemeClr val="lt1"/>
-          </a:fontRef>
-        </p:style>
-        <p:txBody>
-          <a:bodyPr rtlCol="0" anchor="ctr"/>
-          <a:lstStyle/>
-          <a:p>
-            <a:pPr algn="ctr"/>
-          </a:p>
-        </p:txBody>
-      </p:sp>
-      <p:sp>
-        <p:nvSpPr>
-          <p:cNvPr id="10" name="TextBox 9"/>
+              <a:t>Transformasi Total Menjadi Sistem Backend 100% Dinamis</a:t>
+            </a:r>
+          </a:p>
+        </p:txBody>
+      </p:sp>
+      <p:sp>
+        <p:nvSpPr>
+          <p:cNvPr id="6" name="TextBox 5"/>
           <p:cNvSpPr txBox="1"/>
           <p:nvPr/>
         </p:nvSpPr>
         <p:spPr>
           <a:xfrm>
-            <a:off x="960120" y="3154680"/>
-            <a:ext cx="10332720" cy="649224"/>
+            <a:off x="1097280" y="2468880"/>
+            <a:ext cx="9966960" cy="3291840"/>
           </a:xfrm>
           <a:prstGeom prst="rect">
             <a:avLst/>
@@ -10424,346 +6517,68 @@
           <a:noFill/>
         </p:spPr>
         <p:txBody>
-          <a:bodyPr wrap="square" lIns="0" tIns="0" rIns="0" bIns="0">
+          <a:bodyPr wrap="square">
             <a:spAutoFit/>
           </a:bodyPr>
           <a:lstStyle/>
           <a:p>
             <a:pPr>
               <a:spcAft>
-                <a:spcPts val="200"/>
+                <a:spcPts val="1400"/>
               </a:spcAft>
-              <a:defRPr sz="1400" b="1">
-                <a:solidFill>
-                  <a:srgbClr val="38BDF8"/>
+              <a:defRPr sz="1400">
+                <a:solidFill>
+                  <a:srgbClr val="E2E8F0"/>
                 </a:solidFill>
               </a:defRPr>
             </a:pPr>
             <a:r>
-              <a:t>Modul Laporan Terfilter</a:t>
-            </a:r>
-          </a:p>
-          <a:p>
-            <a:pPr>
-              <a:defRPr sz="1200">
-                <a:solidFill>
-                  <a:srgbClr val="F8FAFC"/>
-                </a:solidFill>
-              </a:defRPr>
-            </a:pPr>
-            <a:r>
-              <a:t>GET /api/laporan/pengeluaran menghitung total biaya, transaksi, dan rata-rata real-time.</a:t>
-            </a:r>
-          </a:p>
-        </p:txBody>
-      </p:sp>
-      <p:sp>
-        <p:nvSpPr>
-          <p:cNvPr id="11" name="Rounded Rectangle 10"/>
-          <p:cNvSpPr/>
-          <p:nvPr/>
-        </p:nvSpPr>
-        <p:spPr>
-          <a:xfrm>
-            <a:off x="731520" y="4078224"/>
-            <a:ext cx="10728655" cy="868680"/>
-          </a:xfrm>
-          <a:prstGeom prst="roundRect">
-            <a:avLst/>
-          </a:prstGeom>
-          <a:solidFill>
-            <a:srgbClr val="1E293B"/>
-          </a:solidFill>
-          <a:ln w="12700">
-            <a:solidFill>
-              <a:srgbClr val="334155"/>
-            </a:solidFill>
-          </a:ln>
-        </p:spPr>
-        <p:style>
-          <a:lnRef idx="1">
-            <a:schemeClr val="accent1"/>
-          </a:lnRef>
-          <a:fillRef idx="3">
-            <a:schemeClr val="accent1"/>
-          </a:fillRef>
-          <a:effectRef idx="2">
-            <a:schemeClr val="accent1"/>
-          </a:effectRef>
-          <a:fontRef idx="minor">
-            <a:schemeClr val="lt1"/>
-          </a:fontRef>
-        </p:style>
-        <p:txBody>
-          <a:bodyPr rtlCol="0" anchor="ctr"/>
-          <a:lstStyle/>
-          <a:p>
-            <a:pPr algn="ctr"/>
-          </a:p>
-        </p:txBody>
-      </p:sp>
-      <p:sp>
-        <p:nvSpPr>
-          <p:cNvPr id="12" name="Rectangle 11"/>
-          <p:cNvSpPr/>
-          <p:nvPr/>
-        </p:nvSpPr>
-        <p:spPr>
-          <a:xfrm>
-            <a:off x="731520" y="4078224"/>
-            <a:ext cx="73152" cy="868680"/>
-          </a:xfrm>
-          <a:prstGeom prst="rect">
-            <a:avLst/>
-          </a:prstGeom>
-          <a:solidFill>
-            <a:srgbClr val="38BDF8"/>
-          </a:solidFill>
-          <a:ln>
-            <a:noFill/>
-          </a:ln>
-        </p:spPr>
-        <p:style>
-          <a:lnRef idx="1">
-            <a:schemeClr val="accent1"/>
-          </a:lnRef>
-          <a:fillRef idx="3">
-            <a:schemeClr val="accent1"/>
-          </a:fillRef>
-          <a:effectRef idx="2">
-            <a:schemeClr val="accent1"/>
-          </a:effectRef>
-          <a:fontRef idx="minor">
-            <a:schemeClr val="lt1"/>
-          </a:fontRef>
-        </p:style>
-        <p:txBody>
-          <a:bodyPr rtlCol="0" anchor="ctr"/>
-          <a:lstStyle/>
-          <a:p>
-            <a:pPr algn="ctr"/>
-          </a:p>
-        </p:txBody>
-      </p:sp>
-      <p:sp>
-        <p:nvSpPr>
-          <p:cNvPr id="13" name="TextBox 12"/>
-          <p:cNvSpPr txBox="1"/>
-          <p:nvPr/>
-        </p:nvSpPr>
-        <p:spPr>
-          <a:xfrm>
-            <a:off x="960120" y="4187952"/>
-            <a:ext cx="10332720" cy="649224"/>
-          </a:xfrm>
-          <a:prstGeom prst="rect">
-            <a:avLst/>
-          </a:prstGeom>
-          <a:noFill/>
-        </p:spPr>
-        <p:txBody>
-          <a:bodyPr wrap="square" lIns="0" tIns="0" rIns="0" bIns="0">
-            <a:spAutoFit/>
-          </a:bodyPr>
-          <a:lstStyle/>
+              <a:t>•  Penghapusan Seluruh Mock Data: Tidak ada array statis atau rekayasa data di runtime</a:t>
+            </a:r>
+          </a:p>
           <a:p>
             <a:pPr>
               <a:spcAft>
-                <a:spcPts val="200"/>
+                <a:spcPts val="1400"/>
               </a:spcAft>
-              <a:defRPr sz="1400" b="1">
-                <a:solidFill>
-                  <a:srgbClr val="38BDF8"/>
+              <a:defRPr sz="1400">
+                <a:solidFill>
+                  <a:srgbClr val="E2E8F0"/>
                 </a:solidFill>
               </a:defRPr>
             </a:pPr>
             <a:r>
-              <a:t>Live Interactive Portal</a:t>
-            </a:r>
-          </a:p>
-          <a:p>
-            <a:pPr>
-              <a:defRPr sz="1200">
-                <a:solidFill>
-                  <a:srgbClr val="F8FAFC"/>
-                </a:solidFill>
-              </a:defRPr>
-            </a:pPr>
-            <a:r>
-              <a:t>Halaman / (welcome.blade.php) terhubung langsung ke API live dan menampilkan data aktual.</a:t>
-            </a:r>
-          </a:p>
-        </p:txBody>
-      </p:sp>
-      <p:sp>
-        <p:nvSpPr>
-          <p:cNvPr id="14" name="Rounded Rectangle 13"/>
-          <p:cNvSpPr/>
-          <p:nvPr/>
-        </p:nvSpPr>
-        <p:spPr>
-          <a:xfrm>
-            <a:off x="731520" y="5111496"/>
-            <a:ext cx="10728655" cy="868680"/>
-          </a:xfrm>
-          <a:prstGeom prst="roundRect">
-            <a:avLst/>
-          </a:prstGeom>
-          <a:solidFill>
-            <a:srgbClr val="1E293B"/>
-          </a:solidFill>
-          <a:ln w="12700">
-            <a:solidFill>
-              <a:srgbClr val="334155"/>
-            </a:solidFill>
-          </a:ln>
-        </p:spPr>
-        <p:style>
-          <a:lnRef idx="1">
-            <a:schemeClr val="accent1"/>
-          </a:lnRef>
-          <a:fillRef idx="3">
-            <a:schemeClr val="accent1"/>
-          </a:fillRef>
-          <a:effectRef idx="2">
-            <a:schemeClr val="accent1"/>
-          </a:effectRef>
-          <a:fontRef idx="minor">
-            <a:schemeClr val="lt1"/>
-          </a:fontRef>
-        </p:style>
-        <p:txBody>
-          <a:bodyPr rtlCol="0" anchor="ctr"/>
-          <a:lstStyle/>
-          <a:p>
-            <a:pPr algn="ctr"/>
-          </a:p>
-        </p:txBody>
-      </p:sp>
-      <p:sp>
-        <p:nvSpPr>
-          <p:cNvPr id="15" name="Rectangle 14"/>
-          <p:cNvSpPr/>
-          <p:nvPr/>
-        </p:nvSpPr>
-        <p:spPr>
-          <a:xfrm>
-            <a:off x="731520" y="5111496"/>
-            <a:ext cx="73152" cy="868680"/>
-          </a:xfrm>
-          <a:prstGeom prst="rect">
-            <a:avLst/>
-          </a:prstGeom>
-          <a:solidFill>
-            <a:srgbClr val="A78BFA"/>
-          </a:solidFill>
-          <a:ln>
-            <a:noFill/>
-          </a:ln>
-        </p:spPr>
-        <p:style>
-          <a:lnRef idx="1">
-            <a:schemeClr val="accent1"/>
-          </a:lnRef>
-          <a:fillRef idx="3">
-            <a:schemeClr val="accent1"/>
-          </a:fillRef>
-          <a:effectRef idx="2">
-            <a:schemeClr val="accent1"/>
-          </a:effectRef>
-          <a:fontRef idx="minor">
-            <a:schemeClr val="lt1"/>
-          </a:fontRef>
-        </p:style>
-        <p:txBody>
-          <a:bodyPr rtlCol="0" anchor="ctr"/>
-          <a:lstStyle/>
-          <a:p>
-            <a:pPr algn="ctr"/>
-          </a:p>
-        </p:txBody>
-      </p:sp>
-      <p:sp>
-        <p:nvSpPr>
-          <p:cNvPr id="16" name="TextBox 15"/>
-          <p:cNvSpPr txBox="1"/>
-          <p:nvPr/>
-        </p:nvSpPr>
-        <p:spPr>
-          <a:xfrm>
-            <a:off x="960120" y="5221224"/>
-            <a:ext cx="10332720" cy="649224"/>
-          </a:xfrm>
-          <a:prstGeom prst="rect">
-            <a:avLst/>
-          </a:prstGeom>
-          <a:noFill/>
-        </p:spPr>
-        <p:txBody>
-          <a:bodyPr wrap="square" lIns="0" tIns="0" rIns="0" bIns="0">
-            <a:spAutoFit/>
-          </a:bodyPr>
-          <a:lstStyle/>
+              <a:t>•  18 Database Seeder Lengkap: Memuat data karyawan, divisi, proyek, tiket, dan hotel nyata</a:t>
+            </a:r>
+          </a:p>
           <a:p>
             <a:pPr>
               <a:spcAft>
-                <a:spcPts val="200"/>
+                <a:spcPts val="1400"/>
               </a:spcAft>
-              <a:defRPr sz="1400" b="1">
-                <a:solidFill>
-                  <a:srgbClr val="38BDF8"/>
+              <a:defRPr sz="1400">
+                <a:solidFill>
+                  <a:srgbClr val="E2E8F0"/>
                 </a:solidFill>
               </a:defRPr>
             </a:pPr>
             <a:r>
-              <a:t>Zero Fake Fallback</a:t>
+              <a:t>•  DashboardController Dinamis: Menghitung COUNT dan SUM langsung dari tabel MySQL</a:t>
             </a:r>
           </a:p>
           <a:p>
             <a:pPr>
-              <a:defRPr sz="1200">
-                <a:solidFill>
-                  <a:srgbClr val="F8FAFC"/>
+              <a:spcAft>
+                <a:spcPts val="1400"/>
+              </a:spcAft>
+              <a:defRPr sz="1400">
+                <a:solidFill>
+                  <a:srgbClr val="E2E8F0"/>
                 </a:solidFill>
               </a:defRPr>
             </a:pPr>
             <a:r>
-              <a:t>Saat database kosong, sistem mengembalikan count 0 &amp; list kosong []; tidak ada angka fiktif.</a:t>
-            </a:r>
-          </a:p>
-        </p:txBody>
-      </p:sp>
-      <p:sp>
-        <p:nvSpPr>
-          <p:cNvPr id="17" name="TextBox 16"/>
-          <p:cNvSpPr txBox="1"/>
-          <p:nvPr/>
-        </p:nvSpPr>
-        <p:spPr>
-          <a:xfrm>
-            <a:off x="731520" y="6309360"/>
-            <a:ext cx="10728655" cy="365760"/>
-          </a:xfrm>
-          <a:prstGeom prst="rect">
-            <a:avLst/>
-          </a:prstGeom>
-          <a:noFill/>
-        </p:spPr>
-        <p:txBody>
-          <a:bodyPr wrap="square" lIns="0" tIns="0" rIns="0" bIns="0">
-            <a:spAutoFit/>
-          </a:bodyPr>
-          <a:lstStyle/>
-          <a:p>
-            <a:pPr>
-              <a:defRPr sz="950">
-                <a:solidFill>
-                  <a:srgbClr val="94A3B8"/>
-                </a:solidFill>
-              </a:defRPr>
-            </a:pPr>
-            <a:r>
-              <a:t>PT Astronova Enterprise • Backend Architecture Review &amp; Live Database Audit • Laravel 13</a:t>
+              <a:t>•  Pure Headless API: Seluruh antarmuka web UI dihapus, root (/) mengembalikan JSON service</a:t>
             </a:r>
           </a:p>
         </p:txBody>
@@ -10801,7 +6616,7 @@
             <a:avLst/>
           </a:prstGeom>
           <a:solidFill>
-            <a:srgbClr val="0B1120"/>
+            <a:srgbClr val="0F172A"/>
           </a:solidFill>
           <a:ln>
             <a:noFill/>
@@ -10831,23 +6646,25 @@
       </p:sp>
       <p:sp>
         <p:nvSpPr>
-          <p:cNvPr id="3" name="Rectangle 2"/>
+          <p:cNvPr id="3" name="Rounded Rectangle 2"/>
           <p:cNvSpPr/>
           <p:nvPr/>
         </p:nvSpPr>
         <p:spPr>
           <a:xfrm>
-            <a:off x="731520" y="548640"/>
-            <a:ext cx="73152" cy="1188720"/>
-          </a:xfrm>
-          <a:prstGeom prst="rect">
+            <a:off x="731520" y="731520"/>
+            <a:ext cx="10728655" cy="5394960"/>
+          </a:xfrm>
+          <a:prstGeom prst="roundRect">
             <a:avLst/>
           </a:prstGeom>
           <a:solidFill>
-            <a:srgbClr val="38BDF8"/>
+            <a:srgbClr val="1E293B"/>
           </a:solidFill>
           <a:ln>
-            <a:noFill/>
+            <a:solidFill>
+              <a:srgbClr val="334155"/>
+            </a:solidFill>
           </a:ln>
         </p:spPr>
         <p:style>
@@ -10880,8 +6697,8 @@
         </p:nvSpPr>
         <p:spPr>
           <a:xfrm>
-            <a:off x="960120" y="411480"/>
-            <a:ext cx="10241280" cy="1371600"/>
+            <a:off x="1097280" y="1005840"/>
+            <a:ext cx="9966960" cy="365760"/>
           </a:xfrm>
           <a:prstGeom prst="rect">
             <a:avLst/>
@@ -10889,7 +6706,7 @@
           <a:noFill/>
         </p:spPr>
         <p:txBody>
-          <a:bodyPr wrap="square" lIns="0" tIns="0" rIns="0" bIns="0">
+          <a:bodyPr wrap="none">
             <a:spAutoFit/>
           </a:bodyPr>
           <a:lstStyle/>
@@ -10897,141 +6714,26 @@
             <a:pPr>
               <a:defRPr sz="1100" b="1">
                 <a:solidFill>
-                  <a:srgbClr val="34D399"/>
+                  <a:srgbClr val="38BDF8"/>
                 </a:solidFill>
               </a:defRPr>
             </a:pPr>
             <a:r>
-              <a:t>SLIDE 9 • BUKTI VERIFIKASI PENGUJIAN</a:t>
-            </a:r>
-          </a:p>
-          <a:p>
-            <a:pPr>
-              <a:spcAft>
-                <a:spcPts val="400"/>
-              </a:spcAft>
-              <a:defRPr sz="2500" b="1">
-                <a:solidFill>
-                  <a:srgbClr val="F8FAFC"/>
-                </a:solidFill>
-              </a:defRPr>
-            </a:pPr>
-            <a:r>
-              <a:t>Hasil Pengujian Aktual (Test Suite)</a:t>
-            </a:r>
-          </a:p>
-          <a:p>
-            <a:pPr>
-              <a:defRPr sz="1300">
-                <a:solidFill>
-                  <a:srgbClr val="94A3B8"/>
-                </a:solidFill>
-              </a:defRPr>
-            </a:pPr>
-            <a:r>
-              <a:t>100% Lulus (Green) pada Lingkungan MySQL Testing</a:t>
-            </a:r>
-          </a:p>
-        </p:txBody>
-      </p:sp>
-      <p:sp>
-        <p:nvSpPr>
-          <p:cNvPr id="5" name="Rounded Rectangle 4"/>
-          <p:cNvSpPr/>
-          <p:nvPr/>
-        </p:nvSpPr>
-        <p:spPr>
-          <a:xfrm>
-            <a:off x="731520" y="2011680"/>
-            <a:ext cx="10728655" cy="868680"/>
-          </a:xfrm>
-          <a:prstGeom prst="roundRect">
-            <a:avLst/>
-          </a:prstGeom>
-          <a:solidFill>
-            <a:srgbClr val="1E293B"/>
-          </a:solidFill>
-          <a:ln w="12700">
-            <a:solidFill>
-              <a:srgbClr val="334155"/>
-            </a:solidFill>
-          </a:ln>
-        </p:spPr>
-        <p:style>
-          <a:lnRef idx="1">
-            <a:schemeClr val="accent1"/>
-          </a:lnRef>
-          <a:fillRef idx="3">
-            <a:schemeClr val="accent1"/>
-          </a:fillRef>
-          <a:effectRef idx="2">
-            <a:schemeClr val="accent1"/>
-          </a:effectRef>
-          <a:fontRef idx="minor">
-            <a:schemeClr val="lt1"/>
-          </a:fontRef>
-        </p:style>
-        <p:txBody>
-          <a:bodyPr rtlCol="0" anchor="ctr"/>
-          <a:lstStyle/>
-          <a:p>
-            <a:pPr algn="ctr"/>
-          </a:p>
-        </p:txBody>
-      </p:sp>
-      <p:sp>
-        <p:nvSpPr>
-          <p:cNvPr id="6" name="Rectangle 5"/>
-          <p:cNvSpPr/>
-          <p:nvPr/>
-        </p:nvSpPr>
-        <p:spPr>
-          <a:xfrm>
-            <a:off x="731520" y="2011680"/>
-            <a:ext cx="73152" cy="868680"/>
-          </a:xfrm>
-          <a:prstGeom prst="rect">
-            <a:avLst/>
-          </a:prstGeom>
-          <a:solidFill>
-            <a:srgbClr val="38BDF8"/>
-          </a:solidFill>
-          <a:ln>
-            <a:noFill/>
-          </a:ln>
-        </p:spPr>
-        <p:style>
-          <a:lnRef idx="1">
-            <a:schemeClr val="accent1"/>
-          </a:lnRef>
-          <a:fillRef idx="3">
-            <a:schemeClr val="accent1"/>
-          </a:fillRef>
-          <a:effectRef idx="2">
-            <a:schemeClr val="accent1"/>
-          </a:effectRef>
-          <a:fontRef idx="minor">
-            <a:schemeClr val="lt1"/>
-          </a:fontRef>
-        </p:style>
-        <p:txBody>
-          <a:bodyPr rtlCol="0" anchor="ctr"/>
-          <a:lstStyle/>
-          <a:p>
-            <a:pPr algn="ctr"/>
-          </a:p>
-        </p:txBody>
-      </p:sp>
-      <p:sp>
-        <p:nvSpPr>
-          <p:cNvPr id="7" name="TextBox 6"/>
+              <a:t>SLIDE 9 / 10 • ASTRONOVA BACKEND</a:t>
+            </a:r>
+          </a:p>
+        </p:txBody>
+      </p:sp>
+      <p:sp>
+        <p:nvSpPr>
+          <p:cNvPr id="5" name="TextBox 4"/>
           <p:cNvSpPr txBox="1"/>
           <p:nvPr/>
         </p:nvSpPr>
         <p:spPr>
           <a:xfrm>
-            <a:off x="960120" y="2121408"/>
-            <a:ext cx="10332720" cy="649224"/>
+            <a:off x="1097280" y="1280160"/>
+            <a:ext cx="9966960" cy="1005840"/>
           </a:xfrm>
           <a:prstGeom prst="rect">
             <a:avLst/>
@@ -11039,137 +6741,46 @@
           <a:noFill/>
         </p:spPr>
         <p:txBody>
-          <a:bodyPr wrap="square" lIns="0" tIns="0" rIns="0" bIns="0">
+          <a:bodyPr wrap="square">
             <a:spAutoFit/>
           </a:bodyPr>
           <a:lstStyle/>
           <a:p>
             <a:pPr>
-              <a:spcAft>
-                <a:spcPts val="200"/>
-              </a:spcAft>
-              <a:defRPr sz="1400" b="1">
-                <a:solidFill>
-                  <a:srgbClr val="38BDF8"/>
+              <a:defRPr sz="2400" b="1">
+                <a:solidFill>
+                  <a:srgbClr val="FFFFFF"/>
                 </a:solidFill>
               </a:defRPr>
             </a:pPr>
             <a:r>
-              <a:t>Statistik Hasil Tes</a:t>
+              <a:t>Hasil Pengujian Otomatis (PHPUnit Test Suite)</a:t>
             </a:r>
           </a:p>
           <a:p>
             <a:pPr>
-              <a:defRPr sz="1200">
-                <a:solidFill>
-                  <a:srgbClr val="F8FAFC"/>
+              <a:defRPr sz="1400">
+                <a:solidFill>
+                  <a:srgbClr val="34D399"/>
                 </a:solidFill>
               </a:defRPr>
             </a:pPr>
             <a:r>
-              <a:t>Total: 99 Tests | 525 Assertions | Status: 100% PASSED | Durasi: ~17.9s.</a:t>
-            </a:r>
-          </a:p>
-        </p:txBody>
-      </p:sp>
-      <p:sp>
-        <p:nvSpPr>
-          <p:cNvPr id="8" name="Rounded Rectangle 7"/>
-          <p:cNvSpPr/>
-          <p:nvPr/>
-        </p:nvSpPr>
-        <p:spPr>
-          <a:xfrm>
-            <a:off x="731520" y="3044952"/>
-            <a:ext cx="10728655" cy="868680"/>
-          </a:xfrm>
-          <a:prstGeom prst="roundRect">
-            <a:avLst/>
-          </a:prstGeom>
-          <a:solidFill>
-            <a:srgbClr val="1E293B"/>
-          </a:solidFill>
-          <a:ln w="12700">
-            <a:solidFill>
-              <a:srgbClr val="334155"/>
-            </a:solidFill>
-          </a:ln>
-        </p:spPr>
-        <p:style>
-          <a:lnRef idx="1">
-            <a:schemeClr val="accent1"/>
-          </a:lnRef>
-          <a:fillRef idx="3">
-            <a:schemeClr val="accent1"/>
-          </a:fillRef>
-          <a:effectRef idx="2">
-            <a:schemeClr val="accent1"/>
-          </a:effectRef>
-          <a:fontRef idx="minor">
-            <a:schemeClr val="lt1"/>
-          </a:fontRef>
-        </p:style>
-        <p:txBody>
-          <a:bodyPr rtlCol="0" anchor="ctr"/>
-          <a:lstStyle/>
-          <a:p>
-            <a:pPr algn="ctr"/>
-          </a:p>
-        </p:txBody>
-      </p:sp>
-      <p:sp>
-        <p:nvSpPr>
-          <p:cNvPr id="9" name="Rectangle 8"/>
-          <p:cNvSpPr/>
-          <p:nvPr/>
-        </p:nvSpPr>
-        <p:spPr>
-          <a:xfrm>
-            <a:off x="731520" y="3044952"/>
-            <a:ext cx="73152" cy="868680"/>
-          </a:xfrm>
-          <a:prstGeom prst="rect">
-            <a:avLst/>
-          </a:prstGeom>
-          <a:solidFill>
-            <a:srgbClr val="A78BFA"/>
-          </a:solidFill>
-          <a:ln>
-            <a:noFill/>
-          </a:ln>
-        </p:spPr>
-        <p:style>
-          <a:lnRef idx="1">
-            <a:schemeClr val="accent1"/>
-          </a:lnRef>
-          <a:fillRef idx="3">
-            <a:schemeClr val="accent1"/>
-          </a:fillRef>
-          <a:effectRef idx="2">
-            <a:schemeClr val="accent1"/>
-          </a:effectRef>
-          <a:fontRef idx="minor">
-            <a:schemeClr val="lt1"/>
-          </a:fontRef>
-        </p:style>
-        <p:txBody>
-          <a:bodyPr rtlCol="0" anchor="ctr"/>
-          <a:lstStyle/>
-          <a:p>
-            <a:pPr algn="ctr"/>
-          </a:p>
-        </p:txBody>
-      </p:sp>
-      <p:sp>
-        <p:nvSpPr>
-          <p:cNvPr id="10" name="TextBox 9"/>
+              <a:t>99 Test Cases, 554 Assertions — 100% PASSED</a:t>
+            </a:r>
+          </a:p>
+        </p:txBody>
+      </p:sp>
+      <p:sp>
+        <p:nvSpPr>
+          <p:cNvPr id="6" name="TextBox 5"/>
           <p:cNvSpPr txBox="1"/>
           <p:nvPr/>
         </p:nvSpPr>
         <p:spPr>
           <a:xfrm>
-            <a:off x="960120" y="3154680"/>
-            <a:ext cx="10332720" cy="649224"/>
+            <a:off x="1097280" y="2468880"/>
+            <a:ext cx="9966960" cy="3291840"/>
           </a:xfrm>
           <a:prstGeom prst="rect">
             <a:avLst/>
@@ -11177,346 +6788,68 @@
           <a:noFill/>
         </p:spPr>
         <p:txBody>
-          <a:bodyPr wrap="square" lIns="0" tIns="0" rIns="0" bIns="0">
+          <a:bodyPr wrap="square">
             <a:spAutoFit/>
           </a:bodyPr>
           <a:lstStyle/>
           <a:p>
             <a:pPr>
               <a:spcAft>
-                <a:spcPts val="200"/>
+                <a:spcPts val="1400"/>
               </a:spcAft>
-              <a:defRPr sz="1400" b="1">
-                <a:solidFill>
-                  <a:srgbClr val="38BDF8"/>
+              <a:defRPr sz="1400">
+                <a:solidFill>
+                  <a:srgbClr val="E2E8F0"/>
                 </a:solidFill>
               </a:defRPr>
             </a:pPr>
             <a:r>
-              <a:t>Pengujian Autentikasi</a:t>
-            </a:r>
-          </a:p>
-          <a:p>
-            <a:pPr>
-              <a:defRPr sz="1200">
-                <a:solidFill>
-                  <a:srgbClr val="F8FAFC"/>
-                </a:solidFill>
-              </a:defRPr>
-            </a:pPr>
-            <a:r>
-              <a:t>9 test mencakup login valid/invalid, bearer token header, logout revocation, proteksi 401.</a:t>
-            </a:r>
-          </a:p>
-        </p:txBody>
-      </p:sp>
-      <p:sp>
-        <p:nvSpPr>
-          <p:cNvPr id="11" name="Rounded Rectangle 10"/>
-          <p:cNvSpPr/>
-          <p:nvPr/>
-        </p:nvSpPr>
-        <p:spPr>
-          <a:xfrm>
-            <a:off x="731520" y="4078224"/>
-            <a:ext cx="10728655" cy="868680"/>
-          </a:xfrm>
-          <a:prstGeom prst="roundRect">
-            <a:avLst/>
-          </a:prstGeom>
-          <a:solidFill>
-            <a:srgbClr val="1E293B"/>
-          </a:solidFill>
-          <a:ln w="12700">
-            <a:solidFill>
-              <a:srgbClr val="334155"/>
-            </a:solidFill>
-          </a:ln>
-        </p:spPr>
-        <p:style>
-          <a:lnRef idx="1">
-            <a:schemeClr val="accent1"/>
-          </a:lnRef>
-          <a:fillRef idx="3">
-            <a:schemeClr val="accent1"/>
-          </a:fillRef>
-          <a:effectRef idx="2">
-            <a:schemeClr val="accent1"/>
-          </a:effectRef>
-          <a:fontRef idx="minor">
-            <a:schemeClr val="lt1"/>
-          </a:fontRef>
-        </p:style>
-        <p:txBody>
-          <a:bodyPr rtlCol="0" anchor="ctr"/>
-          <a:lstStyle/>
-          <a:p>
-            <a:pPr algn="ctr"/>
-          </a:p>
-        </p:txBody>
-      </p:sp>
-      <p:sp>
-        <p:nvSpPr>
-          <p:cNvPr id="12" name="Rectangle 11"/>
-          <p:cNvSpPr/>
-          <p:nvPr/>
-        </p:nvSpPr>
-        <p:spPr>
-          <a:xfrm>
-            <a:off x="731520" y="4078224"/>
-            <a:ext cx="73152" cy="868680"/>
-          </a:xfrm>
-          <a:prstGeom prst="rect">
-            <a:avLst/>
-          </a:prstGeom>
-          <a:solidFill>
-            <a:srgbClr val="38BDF8"/>
-          </a:solidFill>
-          <a:ln>
-            <a:noFill/>
-          </a:ln>
-        </p:spPr>
-        <p:style>
-          <a:lnRef idx="1">
-            <a:schemeClr val="accent1"/>
-          </a:lnRef>
-          <a:fillRef idx="3">
-            <a:schemeClr val="accent1"/>
-          </a:fillRef>
-          <a:effectRef idx="2">
-            <a:schemeClr val="accent1"/>
-          </a:effectRef>
-          <a:fontRef idx="minor">
-            <a:schemeClr val="lt1"/>
-          </a:fontRef>
-        </p:style>
-        <p:txBody>
-          <a:bodyPr rtlCol="0" anchor="ctr"/>
-          <a:lstStyle/>
-          <a:p>
-            <a:pPr algn="ctr"/>
-          </a:p>
-        </p:txBody>
-      </p:sp>
-      <p:sp>
-        <p:nvSpPr>
-          <p:cNvPr id="13" name="TextBox 12"/>
-          <p:cNvSpPr txBox="1"/>
-          <p:nvPr/>
-        </p:nvSpPr>
-        <p:spPr>
-          <a:xfrm>
-            <a:off x="960120" y="4187952"/>
-            <a:ext cx="10332720" cy="649224"/>
-          </a:xfrm>
-          <a:prstGeom prst="rect">
-            <a:avLst/>
-          </a:prstGeom>
-          <a:noFill/>
-        </p:spPr>
-        <p:txBody>
-          <a:bodyPr wrap="square" lIns="0" tIns="0" rIns="0" bIns="0">
-            <a:spAutoFit/>
-          </a:bodyPr>
-          <a:lstStyle/>
+              <a:t>•  Feature Testing: Menguji skenario login, CRUD, validasi gagal, dan alur workflow</a:t>
+            </a:r>
+          </a:p>
           <a:p>
             <a:pPr>
               <a:spcAft>
-                <a:spcPts val="200"/>
+                <a:spcPts val="1400"/>
               </a:spcAft>
-              <a:defRPr sz="1400" b="1">
-                <a:solidFill>
-                  <a:srgbClr val="38BDF8"/>
+              <a:defRPr sz="1400">
+                <a:solidFill>
+                  <a:srgbClr val="E2E8F0"/>
                 </a:solidFill>
               </a:defRPr>
             </a:pPr>
             <a:r>
-              <a:t>Pengujian Bisnis &amp; Keuangan</a:t>
-            </a:r>
-          </a:p>
-          <a:p>
-            <a:pPr>
-              <a:defRPr sz="1200">
-                <a:solidFill>
-                  <a:srgbClr val="F8FAFC"/>
-                </a:solidFill>
-              </a:defRPr>
-            </a:pPr>
-            <a:r>
-              <a:t>39 test mencakup workflow approval, auto-kalkulasi selisih, proteksi edit dokumen disetujui.</a:t>
-            </a:r>
-          </a:p>
-        </p:txBody>
-      </p:sp>
-      <p:sp>
-        <p:nvSpPr>
-          <p:cNvPr id="14" name="Rounded Rectangle 13"/>
-          <p:cNvSpPr/>
-          <p:nvPr/>
-        </p:nvSpPr>
-        <p:spPr>
-          <a:xfrm>
-            <a:off x="731520" y="5111496"/>
-            <a:ext cx="10728655" cy="868680"/>
-          </a:xfrm>
-          <a:prstGeom prst="roundRect">
-            <a:avLst/>
-          </a:prstGeom>
-          <a:solidFill>
-            <a:srgbClr val="1E293B"/>
-          </a:solidFill>
-          <a:ln w="12700">
-            <a:solidFill>
-              <a:srgbClr val="334155"/>
-            </a:solidFill>
-          </a:ln>
-        </p:spPr>
-        <p:style>
-          <a:lnRef idx="1">
-            <a:schemeClr val="accent1"/>
-          </a:lnRef>
-          <a:fillRef idx="3">
-            <a:schemeClr val="accent1"/>
-          </a:fillRef>
-          <a:effectRef idx="2">
-            <a:schemeClr val="accent1"/>
-          </a:effectRef>
-          <a:fontRef idx="minor">
-            <a:schemeClr val="lt1"/>
-          </a:fontRef>
-        </p:style>
-        <p:txBody>
-          <a:bodyPr rtlCol="0" anchor="ctr"/>
-          <a:lstStyle/>
-          <a:p>
-            <a:pPr algn="ctr"/>
-          </a:p>
-        </p:txBody>
-      </p:sp>
-      <p:sp>
-        <p:nvSpPr>
-          <p:cNvPr id="15" name="Rectangle 14"/>
-          <p:cNvSpPr/>
-          <p:nvPr/>
-        </p:nvSpPr>
-        <p:spPr>
-          <a:xfrm>
-            <a:off x="731520" y="5111496"/>
-            <a:ext cx="73152" cy="868680"/>
-          </a:xfrm>
-          <a:prstGeom prst="rect">
-            <a:avLst/>
-          </a:prstGeom>
-          <a:solidFill>
-            <a:srgbClr val="A78BFA"/>
-          </a:solidFill>
-          <a:ln>
-            <a:noFill/>
-          </a:ln>
-        </p:spPr>
-        <p:style>
-          <a:lnRef idx="1">
-            <a:schemeClr val="accent1"/>
-          </a:lnRef>
-          <a:fillRef idx="3">
-            <a:schemeClr val="accent1"/>
-          </a:fillRef>
-          <a:effectRef idx="2">
-            <a:schemeClr val="accent1"/>
-          </a:effectRef>
-          <a:fontRef idx="minor">
-            <a:schemeClr val="lt1"/>
-          </a:fontRef>
-        </p:style>
-        <p:txBody>
-          <a:bodyPr rtlCol="0" anchor="ctr"/>
-          <a:lstStyle/>
-          <a:p>
-            <a:pPr algn="ctr"/>
-          </a:p>
-        </p:txBody>
-      </p:sp>
-      <p:sp>
-        <p:nvSpPr>
-          <p:cNvPr id="16" name="TextBox 15"/>
-          <p:cNvSpPr txBox="1"/>
-          <p:nvPr/>
-        </p:nvSpPr>
-        <p:spPr>
-          <a:xfrm>
-            <a:off x="960120" y="5221224"/>
-            <a:ext cx="10332720" cy="649224"/>
-          </a:xfrm>
-          <a:prstGeom prst="rect">
-            <a:avLst/>
-          </a:prstGeom>
-          <a:noFill/>
-        </p:spPr>
-        <p:txBody>
-          <a:bodyPr wrap="square" lIns="0" tIns="0" rIns="0" bIns="0">
-            <a:spAutoFit/>
-          </a:bodyPr>
-          <a:lstStyle/>
+              <a:t>•  Pengujian Keamanan: Memastikan endpoint privat mengembalikan 401 Unauthorized tanpa token</a:t>
+            </a:r>
+          </a:p>
           <a:p>
             <a:pPr>
               <a:spcAft>
-                <a:spcPts val="200"/>
+                <a:spcPts val="1400"/>
               </a:spcAft>
-              <a:defRPr sz="1400" b="1">
-                <a:solidFill>
-                  <a:srgbClr val="38BDF8"/>
+              <a:defRPr sz="1400">
+                <a:solidFill>
+                  <a:srgbClr val="E2E8F0"/>
                 </a:solidFill>
               </a:defRPr>
             </a:pPr>
             <a:r>
-              <a:t>Pengujian Dashboard &amp; Laporan</a:t>
+              <a:t>•  Pengujian Agregasi: Memverifikasi akurasi rumus kalkulasi uang muka dan selisih reimbursement</a:t>
             </a:r>
           </a:p>
           <a:p>
             <a:pPr>
-              <a:defRPr sz="1200">
-                <a:solidFill>
-                  <a:srgbClr val="F8FAFC"/>
+              <a:spcAft>
+                <a:spcPts val="1400"/>
+              </a:spcAft>
+              <a:defRPr sz="1400">
+                <a:solidFill>
+                  <a:srgbClr val="E2E8F0"/>
                 </a:solidFill>
               </a:defRPr>
             </a:pPr>
             <a:r>
-              <a:t>9 test memverifikasi integritas metrik database kosong vs database terisi data aktual.</a:t>
-            </a:r>
-          </a:p>
-        </p:txBody>
-      </p:sp>
-      <p:sp>
-        <p:nvSpPr>
-          <p:cNvPr id="17" name="TextBox 16"/>
-          <p:cNvSpPr txBox="1"/>
-          <p:nvPr/>
-        </p:nvSpPr>
-        <p:spPr>
-          <a:xfrm>
-            <a:off x="731520" y="6309360"/>
-            <a:ext cx="10728655" cy="365760"/>
-          </a:xfrm>
-          <a:prstGeom prst="rect">
-            <a:avLst/>
-          </a:prstGeom>
-          <a:noFill/>
-        </p:spPr>
-        <p:txBody>
-          <a:bodyPr wrap="square" lIns="0" tIns="0" rIns="0" bIns="0">
-            <a:spAutoFit/>
-          </a:bodyPr>
-          <a:lstStyle/>
-          <a:p>
-            <a:pPr>
-              <a:defRPr sz="950">
-                <a:solidFill>
-                  <a:srgbClr val="94A3B8"/>
-                </a:solidFill>
-              </a:defRPr>
-            </a:pPr>
-            <a:r>
-              <a:t>PT Astronova Enterprise • Backend Architecture Review &amp; Live Database Audit • Laravel 13</a:t>
+              <a:t>•  Laravel Pint Formatter: Seluruh kode PHP lulus standarisasi gaya penulisan kode modern</a:t>
             </a:r>
           </a:p>
         </p:txBody>
